--- a/docs/bb84_qkd_presentation.pptx
+++ b/docs/bb84_qkd_presentation.pptx
@@ -4,6 +4,9 @@
   <p:sldMasterIdLst>
     <p:sldMasterId id="2147483648" r:id="rId1"/>
   </p:sldMasterIdLst>
+  <p:notesMasterIdLst>
+    <p:notesMasterId r:id="rId12"/>
+  </p:notesMasterIdLst>
   <p:sldIdLst>
     <p:sldId id="256" r:id="rId2"/>
     <p:sldId id="257" r:id="rId3"/>
@@ -12,16 +15,10 @@
     <p:sldId id="260" r:id="rId6"/>
     <p:sldId id="261" r:id="rId7"/>
     <p:sldId id="262" r:id="rId8"/>
-    <p:sldId id="263" r:id="rId9"/>
-    <p:sldId id="264" r:id="rId10"/>
-    <p:sldId id="265" r:id="rId11"/>
-    <p:sldId id="266" r:id="rId12"/>
-    <p:sldId id="267" r:id="rId13"/>
-    <p:sldId id="268" r:id="rId14"/>
+    <p:sldId id="266" r:id="rId9"/>
+    <p:sldId id="267" r:id="rId10"/>
+    <p:sldId id="268" r:id="rId11"/>
   </p:sldIdLst>
-  <p:notesMasterIdLst>
-    <p:notesMasterId r:id="rId15"/>
-  </p:notesMasterIdLst>
   <p:sldSz cx="12192000" cy="6858000"/>
   <p:notesSz cx="6858000" cy="12192000"/>
   <p:defaultTextStyle>
@@ -119,12 +116,12 @@
   <p:extLst>
     <p:ext uri="{521415D9-36F7-43E2-AB2F-B90AF26B5E84}">
       <p14:sectionLst xmlns:p14="http://schemas.microsoft.com/office/powerpoint/2010/main">
-        <p14:section name="Opening" id="{c8180ce1-032e-1571-ef49-06cc655edfbf}">
+        <p14:section name="Opening" id="{C8180CE1-032E-1571-EF49-06CC655EDFBF}">
           <p14:sldIdLst>
             <p14:sldId id="256"/>
           </p14:sldIdLst>
         </p14:section>
-        <p14:section name="Concept" id="{4c60e735-0d3f-257c-fb89-de0de5a54c7e}">
+        <p14:section name="Concept" id="{4C60E735-0D3F-257C-FB89-DE0DE5A54C7E}">
           <p14:sldIdLst>
             <p14:sldId id="257"/>
             <p14:sldId id="258"/>
@@ -132,17 +129,14 @@
             <p14:sldId id="260"/>
           </p14:sldIdLst>
         </p14:section>
-        <p14:section name="Build and results" id="{0cf6d3a7-c696-a067-0795-4fb8102d68d2}">
+        <p14:section name="Build and results" id="{0CF6D3A7-C696-A067-0795-4FB8102D68D2}">
           <p14:sldIdLst>
             <p14:sldId id="261"/>
             <p14:sldId id="262"/>
-            <p14:sldId id="263"/>
-            <p14:sldId id="264"/>
-            <p14:sldId id="265"/>
             <p14:sldId id="266"/>
           </p14:sldIdLst>
         </p14:section>
-        <p14:section name="Wrap-up" id="{88147a40-b670-fdd0-fb4e-f0594b708572}">
+        <p14:section name="Wrap-up" id="{88147A40-B670-FDD0-FB4E-F0594B708572}">
           <p14:sldIdLst>
             <p14:sldId id="267"/>
             <p14:sldId id="268"/>
@@ -155,1902 +149,6 @@
     </p:ext>
   </p:extLst>
 </p:presentation>
-</file>
-
-<file path=ppt/charts/chart1.xml><?xml version="1.0" encoding="utf-8"?>
-<c:chartSpace xmlns:c="http://schemas.openxmlformats.org/drawingml/2006/chart" xmlns:a="http://schemas.openxmlformats.org/drawingml/2006/main" xmlns:r="http://schemas.openxmlformats.org/officeDocument/2006/relationships">
-  <c:date1904 val="0"/>
-  <c:roundedCorners val="1"/>
-  <c:chart>
-    <c:title>
-      <c:tx>
-        <c:rich>
-          <a:bodyPr/>
-          <a:lstStyle/>
-          <a:p>
-            <a:pPr>
-              <a:defRPr sz="1400" b="0" i="0" u="none" strike="noStrike">
-                <a:solidFill>
-                  <a:srgbClr val="1B2A5C"/>
-                </a:solidFill>
-                <a:latin typeface="+mn-lt"/>
-              </a:defRPr>
-            </a:pPr>
-            <a:r>
-              <a:rPr sz="1400" b="0" i="0" u="none" strike="noStrike">
-                <a:solidFill>
-                  <a:srgbClr val="1B2A5C"/>
-                </a:solidFill>
-                <a:latin typeface="+mn-lt"/>
-              </a:rPr>
-              <a:t>QBER vs share of qubits Eve intercepts</a:t>
-            </a:r>
-          </a:p>
-        </c:rich>
-      </c:tx>
-      <c:layout/>
-      <c:overlay val="0"/>
-    </c:title>
-    <c:autoTitleDeleted val="0"/>
-    <c:plotArea>
-      <c:layout/>
-      <c:lineChart>
-        <c:varyColors val="0"/>
-        <c:ser>
-          <c:idx val="0"/>
-          <c:order val="0"/>
-          <c:tx>
-            <c:strRef>
-              <c:f>Sheet1!$B$1</c:f>
-              <c:strCache>
-                <c:ptCount val="1"/>
-                <c:pt idx="0">
-                  <c:v>Expected QBER (25% x share intercepted)</c:v>
-                </c:pt>
-              </c:strCache>
-            </c:strRef>
-          </c:tx>
-          <c:spPr>
-            <a:solidFill>
-              <a:srgbClr val="00808A"/>
-            </a:solidFill>
-            <a:ln w="38100" cap="flat">
-              <a:solidFill>
-                <a:srgbClr val="00808A"/>
-              </a:solidFill>
-              <a:prstDash val="solid,dash"/>
-              <a:round/>
-            </a:ln>
-            <a:effectLst/>
-          </c:spPr>
-          <c:invertIfNegative val="0"/>
-          <c:dLbls>
-            <c:numFmt formatCode="#,##0" sourceLinked="0"/>
-            <c:txPr>
-              <a:bodyPr/>
-              <a:lstStyle/>
-              <a:p>
-                <a:pPr>
-                  <a:defRPr b="0" i="0" strike="noStrike" sz="1200" u="none">
-                    <a:solidFill>
-                      <a:srgbClr val="000000"/>
-                    </a:solidFill>
-                    <a:latin typeface="Arial"/>
-                  </a:defRPr>
-                </a:pPr>
-              </a:p>
-            </c:txPr>
-            <c:showLegendKey val="0"/>
-            <c:showVal val="0"/>
-            <c:showCatName val="0"/>
-            <c:showSerName val="0"/>
-            <c:showPercent val="0"/>
-            <c:showBubbleSize val="0"/>
-            <c:showLeaderLines val="0"/>
-          </c:dLbls>
-          <c:marker>
-            <c:symbol val="circle"/>
-            <c:size val="7"/>
-            <c:spPr>
-              <a:solidFill>
-                <a:srgbClr val="00808A"/>
-              </a:solidFill>
-              <a:ln w="9525" cap="flat">
-                <a:solidFill>
-                  <a:srgbClr val="00808A"/>
-                </a:solidFill>
-                <a:prstDash val="solid"/>
-                <a:round/>
-              </a:ln>
-              <a:effectLst/>
-            </c:spPr>
-          </c:marker>
-          <c:cat>
-            <c:multiLvlStrRef>
-              <c:f>Sheet1!$A$2:$A$12</c:f>
-              <c:multiLvlStrCache>
-                <c:ptCount val="11"/>
-                <c:lvl>
-                  <c:pt idx="0">
-                    <c:v>0</c:v>
-                  </c:pt>
-                  <c:pt idx="1">
-                    <c:v>10</c:v>
-                  </c:pt>
-                  <c:pt idx="2">
-                    <c:v>20</c:v>
-                  </c:pt>
-                  <c:pt idx="3">
-                    <c:v>30</c:v>
-                  </c:pt>
-                  <c:pt idx="4">
-                    <c:v>40</c:v>
-                  </c:pt>
-                  <c:pt idx="5">
-                    <c:v>50</c:v>
-                  </c:pt>
-                  <c:pt idx="6">
-                    <c:v>60</c:v>
-                  </c:pt>
-                  <c:pt idx="7">
-                    <c:v>70</c:v>
-                  </c:pt>
-                  <c:pt idx="8">
-                    <c:v>80</c:v>
-                  </c:pt>
-                  <c:pt idx="9">
-                    <c:v>90</c:v>
-                  </c:pt>
-                  <c:pt idx="10">
-                    <c:v>100</c:v>
-                  </c:pt>
-                </c:lvl>
-              </c:multiLvlStrCache>
-            </c:multiLvlStrRef>
-          </c:cat>
-          <c:val>
-            <c:numRef>
-              <c:f>Sheet1!$B$2:$B$12</c:f>
-              <c:numCache>
-                <c:formatCode>General</c:formatCode>
-                <c:ptCount val="11"/>
-                <c:pt idx="0">
-                  <c:v>0</c:v>
-                </c:pt>
-                <c:pt idx="1">
-                  <c:v>2.5</c:v>
-                </c:pt>
-                <c:pt idx="2">
-                  <c:v>5</c:v>
-                </c:pt>
-                <c:pt idx="3">
-                  <c:v>7.5</c:v>
-                </c:pt>
-                <c:pt idx="4">
-                  <c:v>10</c:v>
-                </c:pt>
-                <c:pt idx="5">
-                  <c:v>12.5</c:v>
-                </c:pt>
-                <c:pt idx="6">
-                  <c:v>15</c:v>
-                </c:pt>
-                <c:pt idx="7">
-                  <c:v>17.5</c:v>
-                </c:pt>
-                <c:pt idx="8">
-                  <c:v>20</c:v>
-                </c:pt>
-                <c:pt idx="9">
-                  <c:v>22.5</c:v>
-                </c:pt>
-                <c:pt idx="10">
-                  <c:v>25</c:v>
-                </c:pt>
-              </c:numCache>
-            </c:numRef>
-          </c:val>
-          <c:smooth val="0"/>
-        </c:ser>
-        <c:ser>
-          <c:idx val="1"/>
-          <c:order val="1"/>
-          <c:tx>
-            <c:strRef>
-              <c:f>Sheet1!$C$1</c:f>
-              <c:strCache>
-                <c:ptCount val="1"/>
-                <c:pt idx="0">
-                  <c:v>Abort threshold (11%)</c:v>
-                </c:pt>
-              </c:strCache>
-            </c:strRef>
-          </c:tx>
-          <c:spPr>
-            <a:solidFill>
-              <a:srgbClr val="D9480F"/>
-            </a:solidFill>
-            <a:ln w="38100" cap="flat">
-              <a:solidFill>
-                <a:srgbClr val="D9480F"/>
-              </a:solidFill>
-              <a:prstDash val="solid,dash"/>
-              <a:round/>
-            </a:ln>
-            <a:effectLst/>
-          </c:spPr>
-          <c:invertIfNegative val="0"/>
-          <c:dLbls>
-            <c:numFmt formatCode="#,##0" sourceLinked="0"/>
-            <c:txPr>
-              <a:bodyPr/>
-              <a:lstStyle/>
-              <a:p>
-                <a:pPr>
-                  <a:defRPr b="0" i="0" strike="noStrike" sz="1200" u="none">
-                    <a:solidFill>
-                      <a:srgbClr val="000000"/>
-                    </a:solidFill>
-                    <a:latin typeface="Arial"/>
-                  </a:defRPr>
-                </a:pPr>
-              </a:p>
-            </c:txPr>
-            <c:showLegendKey val="0"/>
-            <c:showVal val="0"/>
-            <c:showCatName val="0"/>
-            <c:showSerName val="0"/>
-            <c:showPercent val="0"/>
-            <c:showBubbleSize val="0"/>
-            <c:showLeaderLines val="0"/>
-          </c:dLbls>
-          <c:marker>
-            <c:symbol val="circle"/>
-            <c:size val="7"/>
-            <c:spPr>
-              <a:solidFill>
-                <a:srgbClr val="D9480F"/>
-              </a:solidFill>
-              <a:ln w="9525" cap="flat">
-                <a:solidFill>
-                  <a:srgbClr val="D9480F"/>
-                </a:solidFill>
-                <a:prstDash val="solid"/>
-                <a:round/>
-              </a:ln>
-              <a:effectLst/>
-            </c:spPr>
-          </c:marker>
-          <c:cat>
-            <c:multiLvlStrRef>
-              <c:f>Sheet1!$A$2:$A$12</c:f>
-              <c:multiLvlStrCache>
-                <c:ptCount val="11"/>
-                <c:lvl>
-                  <c:pt idx="0">
-                    <c:v>0</c:v>
-                  </c:pt>
-                  <c:pt idx="1">
-                    <c:v>10</c:v>
-                  </c:pt>
-                  <c:pt idx="2">
-                    <c:v>20</c:v>
-                  </c:pt>
-                  <c:pt idx="3">
-                    <c:v>30</c:v>
-                  </c:pt>
-                  <c:pt idx="4">
-                    <c:v>40</c:v>
-                  </c:pt>
-                  <c:pt idx="5">
-                    <c:v>50</c:v>
-                  </c:pt>
-                  <c:pt idx="6">
-                    <c:v>60</c:v>
-                  </c:pt>
-                  <c:pt idx="7">
-                    <c:v>70</c:v>
-                  </c:pt>
-                  <c:pt idx="8">
-                    <c:v>80</c:v>
-                  </c:pt>
-                  <c:pt idx="9">
-                    <c:v>90</c:v>
-                  </c:pt>
-                  <c:pt idx="10">
-                    <c:v>100</c:v>
-                  </c:pt>
-                </c:lvl>
-              </c:multiLvlStrCache>
-            </c:multiLvlStrRef>
-          </c:cat>
-          <c:val>
-            <c:numRef>
-              <c:f>Sheet1!$C$2:$C$12</c:f>
-              <c:numCache>
-                <c:formatCode>General</c:formatCode>
-                <c:ptCount val="11"/>
-                <c:pt idx="0">
-                  <c:v>11</c:v>
-                </c:pt>
-                <c:pt idx="1">
-                  <c:v>11</c:v>
-                </c:pt>
-                <c:pt idx="2">
-                  <c:v>11</c:v>
-                </c:pt>
-                <c:pt idx="3">
-                  <c:v>11</c:v>
-                </c:pt>
-                <c:pt idx="4">
-                  <c:v>11</c:v>
-                </c:pt>
-                <c:pt idx="5">
-                  <c:v>11</c:v>
-                </c:pt>
-                <c:pt idx="6">
-                  <c:v>11</c:v>
-                </c:pt>
-                <c:pt idx="7">
-                  <c:v>11</c:v>
-                </c:pt>
-                <c:pt idx="8">
-                  <c:v>11</c:v>
-                </c:pt>
-                <c:pt idx="9">
-                  <c:v>11</c:v>
-                </c:pt>
-                <c:pt idx="10">
-                  <c:v>11</c:v>
-                </c:pt>
-              </c:numCache>
-            </c:numRef>
-          </c:val>
-          <c:smooth val="0"/>
-        </c:ser>
-        <c:dLbls>
-          <c:numFmt formatCode="#,##0" sourceLinked="0"/>
-          <c:txPr>
-            <a:bodyPr/>
-            <a:lstStyle/>
-            <a:p>
-              <a:pPr>
-                <a:defRPr b="0" i="0" strike="noStrike" sz="1200" u="none">
-                  <a:solidFill>
-                    <a:srgbClr val="000000"/>
-                  </a:solidFill>
-                  <a:latin typeface="Arial"/>
-                </a:defRPr>
-              </a:pPr>
-            </a:p>
-          </c:txPr>
-          <c:showLegendKey val="0"/>
-          <c:showVal val="0"/>
-          <c:showCatName val="0"/>
-          <c:showSerName val="0"/>
-          <c:showPercent val="0"/>
-          <c:showBubbleSize val="0"/>
-          <c:showLeaderLines val="0"/>
-        </c:dLbls>
-        <c:marker val="1"/>
-        <c:axId val="2094734554"/>
-        <c:axId val="2094734552"/>
-        <c:axId val="2094734556"/>
-      </c:lineChart>
-      <c:catAx>
-        <c:axId val="2094734554"/>
-        <c:scaling>
-          <c:orientation val="minMax"/>
-        </c:scaling>
-        <c:delete val="0"/>
-        <c:axPos val="b"/>
-        <c:title>
-          <c:tx>
-            <c:rich>
-              <a:bodyPr/>
-              <a:lstStyle/>
-              <a:p>
-                <a:pPr>
-                  <a:defRPr sz="1200" b="0" i="0" u="none" strike="noStrike">
-                    <a:solidFill>
-                      <a:srgbClr val="6B7699"/>
-                    </a:solidFill>
-                    <a:latin typeface="+mn-lt"/>
-                  </a:defRPr>
-                </a:pPr>
-                <a:r>
-                  <a:rPr sz="1200" b="0" i="0" u="none" strike="noStrike">
-                    <a:solidFill>
-                      <a:srgbClr val="6B7699"/>
-                    </a:solidFill>
-                    <a:latin typeface="+mn-lt"/>
-                  </a:rPr>
-                  <a:t>Qubits intercepted (%)</a:t>
-                </a:r>
-              </a:p>
-            </c:rich>
-          </c:tx>
-          <c:layout/>
-          <c:overlay val="0"/>
-        </c:title>
-        <c:numFmt formatCode="General" sourceLinked="1"/>
-        <c:majorTickMark val="out"/>
-        <c:minorTickMark val="none"/>
-        <c:tickLblPos val="low"/>
-        <c:spPr>
-          <a:ln w="12700" cap="flat">
-            <a:solidFill>
-              <a:srgbClr val="888888"/>
-            </a:solidFill>
-            <a:prstDash val="solid"/>
-            <a:round/>
-          </a:ln>
-        </c:spPr>
-        <c:txPr>
-          <a:bodyPr/>
-          <a:lstStyle/>
-          <a:p>
-            <a:pPr>
-              <a:defRPr sz="1200" b="0" i="0" u="none" strike="noStrike">
-                <a:solidFill>
-                  <a:srgbClr val="6B7699"/>
-                </a:solidFill>
-                <a:latin typeface="+mn-lt"/>
-              </a:defRPr>
-            </a:pPr>
-            <a:endParaRPr lang="en-US"/>
-          </a:p>
-        </c:txPr>
-        <c:crossAx val="2094734552"/>
-        <c:crosses val="autoZero"/>
-        <c:auto val="1"/>
-        <c:lblAlgn val="ctr"/>
-        <c:noMultiLvlLbl val="1"/>
-      </c:catAx>
-      <c:valAx>
-        <c:axId val="2094734552"/>
-        <c:scaling>
-          <c:orientation val="minMax"/>
-          <c:max val="30"/>
-          <c:min val="0"/>
-        </c:scaling>
-        <c:delete val="0"/>
-        <c:axPos val="l"/>
-        <c:majorGridlines>
-          <c:spPr>
-            <a:ln w="9525" cap="flat">
-              <a:solidFill>
-                <a:srgbClr val="D5DBEA"/>
-              </a:solidFill>
-              <a:prstDash val="solid"/>
-              <a:round/>
-            </a:ln>
-          </c:spPr>
-        </c:majorGridlines>
-        <c:title>
-          <c:tx>
-            <c:rich>
-              <a:bodyPr/>
-              <a:lstStyle/>
-              <a:p>
-                <a:pPr>
-                  <a:defRPr sz="1200" b="0" i="0" u="none" strike="noStrike">
-                    <a:solidFill>
-                      <a:srgbClr val="6B7699"/>
-                    </a:solidFill>
-                    <a:latin typeface="+mn-lt"/>
-                  </a:defRPr>
-                </a:pPr>
-                <a:r>
-                  <a:rPr sz="1200" b="0" i="0" u="none" strike="noStrike">
-                    <a:solidFill>
-                      <a:srgbClr val="6B7699"/>
-                    </a:solidFill>
-                    <a:latin typeface="+mn-lt"/>
-                  </a:rPr>
-                  <a:t>QBER (%)</a:t>
-                </a:r>
-              </a:p>
-            </c:rich>
-          </c:tx>
-          <c:layout/>
-          <c:overlay val="0"/>
-        </c:title>
-        <c:numFmt formatCode="General" sourceLinked="0"/>
-        <c:majorTickMark val="out"/>
-        <c:minorTickMark val="none"/>
-        <c:tickLblPos val="nextTo"/>
-        <c:spPr>
-          <a:ln w="12700" cap="flat">
-            <a:solidFill>
-              <a:srgbClr val="888888"/>
-            </a:solidFill>
-            <a:prstDash val="solid"/>
-            <a:round/>
-          </a:ln>
-        </c:spPr>
-        <c:txPr>
-          <a:bodyPr/>
-          <a:lstStyle/>
-          <a:p>
-            <a:pPr>
-              <a:defRPr sz="1200" b="0" i="0" u="none" strike="noStrike">
-                <a:solidFill>
-                  <a:srgbClr val="6B7699"/>
-                </a:solidFill>
-                <a:latin typeface="+mn-lt"/>
-              </a:defRPr>
-            </a:pPr>
-            <a:endParaRPr lang="en-US"/>
-          </a:p>
-        </c:txPr>
-        <c:crossAx val="2094734554"/>
-        <c:crosses val="autoZero"/>
-        <c:crossBetween val="between"/>
-        <c:majorUnit val="5"/>
-      </c:valAx>
-      <c:spPr>
-        <a:noFill/>
-        <a:ln>
-          <a:noFill/>
-        </a:ln>
-        <a:effectLst/>
-      </c:spPr>
-    </c:plotArea>
-    <c:legend>
-      <c:legendPos val="b"/>
-      <c:overlay val="0"/>
-      <c:txPr>
-        <a:bodyPr/>
-        <a:lstStyle/>
-        <a:p>
-          <a:pPr>
-            <a:defRPr sz="1200">
-              <a:solidFill>
-                <a:srgbClr val="0F1B33"/>
-              </a:solidFill>
-              <a:latin typeface="+mn-lt"/>
-              <a:cs typeface="+mn-lt"/>
-            </a:defRPr>
-          </a:pPr>
-          <a:endParaRPr lang="en-US"/>
-        </a:p>
-      </c:txPr>
-    </c:legend>
-    <c:plotVisOnly val="1"/>
-    <c:dispBlanksAs val="span"/>
-  </c:chart>
-  <c:spPr>
-    <a:noFill/>
-    <a:ln>
-      <a:noFill/>
-    </a:ln>
-    <a:effectLst/>
-  </c:spPr>
-  <c:externalData r:id="rId1">
-    <c:autoUpdate val="0"/>
-  </c:externalData>
-</c:chartSpace>
-</file>
-
-<file path=ppt/charts/chart2.xml><?xml version="1.0" encoding="utf-8"?>
-<c:chartSpace xmlns:c="http://schemas.openxmlformats.org/drawingml/2006/chart" xmlns:a="http://schemas.openxmlformats.org/drawingml/2006/main" xmlns:r="http://schemas.openxmlformats.org/officeDocument/2006/relationships">
-  <c:date1904 val="0"/>
-  <c:roundedCorners val="1"/>
-  <c:chart>
-    <c:title>
-      <c:tx>
-        <c:rich>
-          <a:bodyPr/>
-          <a:lstStyle/>
-          <a:p>
-            <a:pPr>
-              <a:defRPr sz="1400" b="0" i="0" u="none" strike="noStrike">
-                <a:solidFill>
-                  <a:srgbClr val="1B2A5C"/>
-                </a:solidFill>
-                <a:latin typeface="+mn-lt"/>
-              </a:defRPr>
-            </a:pPr>
-            <a:r>
-              <a:rPr sz="1400" b="0" i="0" u="none" strike="noStrike">
-                <a:solidFill>
-                  <a:srgbClr val="1B2A5C"/>
-                </a:solidFill>
-                <a:latin typeface="+mn-lt"/>
-              </a:rPr>
-              <a:t>QBER vs channel noise (200 qubits, 500 runs per point)</a:t>
-            </a:r>
-          </a:p>
-        </c:rich>
-      </c:tx>
-      <c:layout/>
-      <c:overlay val="0"/>
-    </c:title>
-    <c:autoTitleDeleted val="0"/>
-    <c:plotArea>
-      <c:layout/>
-      <c:lineChart>
-        <c:varyColors val="0"/>
-        <c:ser>
-          <c:idx val="0"/>
-          <c:order val="0"/>
-          <c:tx>
-            <c:strRef>
-              <c:f>Sheet1!$B$1</c:f>
-              <c:strCache>
-                <c:ptCount val="1"/>
-                <c:pt idx="0">
-                  <c:v>No Eve</c:v>
-                </c:pt>
-              </c:strCache>
-            </c:strRef>
-          </c:tx>
-          <c:spPr>
-            <a:solidFill>
-              <a:srgbClr val="00808A"/>
-            </a:solidFill>
-            <a:ln w="38100" cap="flat">
-              <a:solidFill>
-                <a:srgbClr val="00808A"/>
-              </a:solidFill>
-              <a:prstDash val="solid,solid,dash"/>
-              <a:round/>
-            </a:ln>
-            <a:effectLst/>
-          </c:spPr>
-          <c:invertIfNegative val="0"/>
-          <c:dLbls>
-            <c:numFmt formatCode="#,##0" sourceLinked="0"/>
-            <c:txPr>
-              <a:bodyPr/>
-              <a:lstStyle/>
-              <a:p>
-                <a:pPr>
-                  <a:defRPr b="0" i="0" strike="noStrike" sz="1200" u="none">
-                    <a:solidFill>
-                      <a:srgbClr val="000000"/>
-                    </a:solidFill>
-                    <a:latin typeface="Arial"/>
-                  </a:defRPr>
-                </a:pPr>
-              </a:p>
-            </c:txPr>
-            <c:showLegendKey val="0"/>
-            <c:showVal val="0"/>
-            <c:showCatName val="0"/>
-            <c:showSerName val="0"/>
-            <c:showPercent val="0"/>
-            <c:showBubbleSize val="0"/>
-            <c:showLeaderLines val="0"/>
-          </c:dLbls>
-          <c:marker>
-            <c:symbol val="circle"/>
-            <c:size val="7"/>
-            <c:spPr>
-              <a:solidFill>
-                <a:srgbClr val="00808A"/>
-              </a:solidFill>
-              <a:ln w="9525" cap="flat">
-                <a:solidFill>
-                  <a:srgbClr val="00808A"/>
-                </a:solidFill>
-                <a:prstDash val="solid"/>
-                <a:round/>
-              </a:ln>
-              <a:effectLst/>
-            </c:spPr>
-          </c:marker>
-          <c:cat>
-            <c:multiLvlStrRef>
-              <c:f>Sheet1!$A$2:$A$10</c:f>
-              <c:multiLvlStrCache>
-                <c:ptCount val="9"/>
-                <c:lvl>
-                  <c:pt idx="0">
-                    <c:v>0</c:v>
-                  </c:pt>
-                  <c:pt idx="1">
-                    <c:v>2</c:v>
-                  </c:pt>
-                  <c:pt idx="2">
-                    <c:v>4</c:v>
-                  </c:pt>
-                  <c:pt idx="3">
-                    <c:v>6</c:v>
-                  </c:pt>
-                  <c:pt idx="4">
-                    <c:v>8</c:v>
-                  </c:pt>
-                  <c:pt idx="5">
-                    <c:v>10</c:v>
-                  </c:pt>
-                  <c:pt idx="6">
-                    <c:v>12</c:v>
-                  </c:pt>
-                  <c:pt idx="7">
-                    <c:v>14</c:v>
-                  </c:pt>
-                  <c:pt idx="8">
-                    <c:v>16</c:v>
-                  </c:pt>
-                </c:lvl>
-              </c:multiLvlStrCache>
-            </c:multiLvlStrRef>
-          </c:cat>
-          <c:val>
-            <c:numRef>
-              <c:f>Sheet1!$B$2:$B$10</c:f>
-              <c:numCache>
-                <c:formatCode>General</c:formatCode>
-                <c:ptCount val="9"/>
-                <c:pt idx="0">
-                  <c:v>0</c:v>
-                </c:pt>
-                <c:pt idx="1">
-                  <c:v>1.9</c:v>
-                </c:pt>
-                <c:pt idx="2">
-                  <c:v>3.9</c:v>
-                </c:pt>
-                <c:pt idx="3">
-                  <c:v>5.9</c:v>
-                </c:pt>
-                <c:pt idx="4">
-                  <c:v>7.9</c:v>
-                </c:pt>
-                <c:pt idx="5">
-                  <c:v>10.1</c:v>
-                </c:pt>
-                <c:pt idx="6">
-                  <c:v>12</c:v>
-                </c:pt>
-                <c:pt idx="7">
-                  <c:v>13.9</c:v>
-                </c:pt>
-                <c:pt idx="8">
-                  <c:v>15.8</c:v>
-                </c:pt>
-              </c:numCache>
-            </c:numRef>
-          </c:val>
-          <c:smooth val="0"/>
-        </c:ser>
-        <c:ser>
-          <c:idx val="1"/>
-          <c:order val="1"/>
-          <c:tx>
-            <c:strRef>
-              <c:f>Sheet1!$C$1</c:f>
-              <c:strCache>
-                <c:ptCount val="1"/>
-                <c:pt idx="0">
-                  <c:v>Eve on every qubit</c:v>
-                </c:pt>
-              </c:strCache>
-            </c:strRef>
-          </c:tx>
-          <c:spPr>
-            <a:solidFill>
-              <a:srgbClr val="D9480F"/>
-            </a:solidFill>
-            <a:ln w="38100" cap="flat">
-              <a:solidFill>
-                <a:srgbClr val="D9480F"/>
-              </a:solidFill>
-              <a:prstDash val="solid,solid,dash"/>
-              <a:round/>
-            </a:ln>
-            <a:effectLst/>
-          </c:spPr>
-          <c:invertIfNegative val="0"/>
-          <c:dLbls>
-            <c:numFmt formatCode="#,##0" sourceLinked="0"/>
-            <c:txPr>
-              <a:bodyPr/>
-              <a:lstStyle/>
-              <a:p>
-                <a:pPr>
-                  <a:defRPr b="0" i="0" strike="noStrike" sz="1200" u="none">
-                    <a:solidFill>
-                      <a:srgbClr val="000000"/>
-                    </a:solidFill>
-                    <a:latin typeface="Arial"/>
-                  </a:defRPr>
-                </a:pPr>
-              </a:p>
-            </c:txPr>
-            <c:showLegendKey val="0"/>
-            <c:showVal val="0"/>
-            <c:showCatName val="0"/>
-            <c:showSerName val="0"/>
-            <c:showPercent val="0"/>
-            <c:showBubbleSize val="0"/>
-            <c:showLeaderLines val="0"/>
-          </c:dLbls>
-          <c:marker>
-            <c:symbol val="circle"/>
-            <c:size val="7"/>
-            <c:spPr>
-              <a:solidFill>
-                <a:srgbClr val="D9480F"/>
-              </a:solidFill>
-              <a:ln w="9525" cap="flat">
-                <a:solidFill>
-                  <a:srgbClr val="D9480F"/>
-                </a:solidFill>
-                <a:prstDash val="solid"/>
-                <a:round/>
-              </a:ln>
-              <a:effectLst/>
-            </c:spPr>
-          </c:marker>
-          <c:cat>
-            <c:multiLvlStrRef>
-              <c:f>Sheet1!$A$2:$A$10</c:f>
-              <c:multiLvlStrCache>
-                <c:ptCount val="9"/>
-                <c:lvl>
-                  <c:pt idx="0">
-                    <c:v>0</c:v>
-                  </c:pt>
-                  <c:pt idx="1">
-                    <c:v>2</c:v>
-                  </c:pt>
-                  <c:pt idx="2">
-                    <c:v>4</c:v>
-                  </c:pt>
-                  <c:pt idx="3">
-                    <c:v>6</c:v>
-                  </c:pt>
-                  <c:pt idx="4">
-                    <c:v>8</c:v>
-                  </c:pt>
-                  <c:pt idx="5">
-                    <c:v>10</c:v>
-                  </c:pt>
-                  <c:pt idx="6">
-                    <c:v>12</c:v>
-                  </c:pt>
-                  <c:pt idx="7">
-                    <c:v>14</c:v>
-                  </c:pt>
-                  <c:pt idx="8">
-                    <c:v>16</c:v>
-                  </c:pt>
-                </c:lvl>
-              </c:multiLvlStrCache>
-            </c:multiLvlStrRef>
-          </c:cat>
-          <c:val>
-            <c:numRef>
-              <c:f>Sheet1!$C$2:$C$10</c:f>
-              <c:numCache>
-                <c:formatCode>General</c:formatCode>
-                <c:ptCount val="9"/>
-                <c:pt idx="0">
-                  <c:v>25.1</c:v>
-                </c:pt>
-                <c:pt idx="1">
-                  <c:v>27.5</c:v>
-                </c:pt>
-                <c:pt idx="2">
-                  <c:v>29.4</c:v>
-                </c:pt>
-                <c:pt idx="3">
-                  <c:v>30.2</c:v>
-                </c:pt>
-                <c:pt idx="4">
-                  <c:v>32.5</c:v>
-                </c:pt>
-                <c:pt idx="5">
-                  <c:v>34.4</c:v>
-                </c:pt>
-                <c:pt idx="6">
-                  <c:v>35.9</c:v>
-                </c:pt>
-                <c:pt idx="7">
-                  <c:v>37.2</c:v>
-                </c:pt>
-                <c:pt idx="8">
-                  <c:v>38.3</c:v>
-                </c:pt>
-              </c:numCache>
-            </c:numRef>
-          </c:val>
-          <c:smooth val="0"/>
-        </c:ser>
-        <c:ser>
-          <c:idx val="2"/>
-          <c:order val="2"/>
-          <c:tx>
-            <c:strRef>
-              <c:f>Sheet1!$D$1</c:f>
-              <c:strCache>
-                <c:ptCount val="1"/>
-                <c:pt idx="0">
-                  <c:v>Abort threshold (11%)</c:v>
-                </c:pt>
-              </c:strCache>
-            </c:strRef>
-          </c:tx>
-          <c:spPr>
-            <a:solidFill>
-              <a:srgbClr val="6B7699"/>
-            </a:solidFill>
-            <a:ln w="38100" cap="flat">
-              <a:solidFill>
-                <a:srgbClr val="6B7699"/>
-              </a:solidFill>
-              <a:prstDash val="solid,solid,dash"/>
-              <a:round/>
-            </a:ln>
-            <a:effectLst/>
-          </c:spPr>
-          <c:invertIfNegative val="0"/>
-          <c:dLbls>
-            <c:numFmt formatCode="#,##0" sourceLinked="0"/>
-            <c:txPr>
-              <a:bodyPr/>
-              <a:lstStyle/>
-              <a:p>
-                <a:pPr>
-                  <a:defRPr b="0" i="0" strike="noStrike" sz="1200" u="none">
-                    <a:solidFill>
-                      <a:srgbClr val="000000"/>
-                    </a:solidFill>
-                    <a:latin typeface="Arial"/>
-                  </a:defRPr>
-                </a:pPr>
-              </a:p>
-            </c:txPr>
-            <c:showLegendKey val="0"/>
-            <c:showVal val="0"/>
-            <c:showCatName val="0"/>
-            <c:showSerName val="0"/>
-            <c:showPercent val="0"/>
-            <c:showBubbleSize val="0"/>
-            <c:showLeaderLines val="0"/>
-          </c:dLbls>
-          <c:marker>
-            <c:symbol val="circle"/>
-            <c:size val="7"/>
-            <c:spPr>
-              <a:solidFill>
-                <a:srgbClr val="6B7699"/>
-              </a:solidFill>
-              <a:ln w="9525" cap="flat">
-                <a:solidFill>
-                  <a:srgbClr val="6B7699"/>
-                </a:solidFill>
-                <a:prstDash val="solid"/>
-                <a:round/>
-              </a:ln>
-              <a:effectLst/>
-            </c:spPr>
-          </c:marker>
-          <c:cat>
-            <c:multiLvlStrRef>
-              <c:f>Sheet1!$A$2:$A$10</c:f>
-              <c:multiLvlStrCache>
-                <c:ptCount val="9"/>
-                <c:lvl>
-                  <c:pt idx="0">
-                    <c:v>0</c:v>
-                  </c:pt>
-                  <c:pt idx="1">
-                    <c:v>2</c:v>
-                  </c:pt>
-                  <c:pt idx="2">
-                    <c:v>4</c:v>
-                  </c:pt>
-                  <c:pt idx="3">
-                    <c:v>6</c:v>
-                  </c:pt>
-                  <c:pt idx="4">
-                    <c:v>8</c:v>
-                  </c:pt>
-                  <c:pt idx="5">
-                    <c:v>10</c:v>
-                  </c:pt>
-                  <c:pt idx="6">
-                    <c:v>12</c:v>
-                  </c:pt>
-                  <c:pt idx="7">
-                    <c:v>14</c:v>
-                  </c:pt>
-                  <c:pt idx="8">
-                    <c:v>16</c:v>
-                  </c:pt>
-                </c:lvl>
-              </c:multiLvlStrCache>
-            </c:multiLvlStrRef>
-          </c:cat>
-          <c:val>
-            <c:numRef>
-              <c:f>Sheet1!$D$2:$D$10</c:f>
-              <c:numCache>
-                <c:formatCode>General</c:formatCode>
-                <c:ptCount val="9"/>
-                <c:pt idx="0">
-                  <c:v>11</c:v>
-                </c:pt>
-                <c:pt idx="1">
-                  <c:v>11</c:v>
-                </c:pt>
-                <c:pt idx="2">
-                  <c:v>11</c:v>
-                </c:pt>
-                <c:pt idx="3">
-                  <c:v>11</c:v>
-                </c:pt>
-                <c:pt idx="4">
-                  <c:v>11</c:v>
-                </c:pt>
-                <c:pt idx="5">
-                  <c:v>11</c:v>
-                </c:pt>
-                <c:pt idx="6">
-                  <c:v>11</c:v>
-                </c:pt>
-                <c:pt idx="7">
-                  <c:v>11</c:v>
-                </c:pt>
-                <c:pt idx="8">
-                  <c:v>11</c:v>
-                </c:pt>
-              </c:numCache>
-            </c:numRef>
-          </c:val>
-          <c:smooth val="0"/>
-        </c:ser>
-        <c:dLbls>
-          <c:numFmt formatCode="#,##0" sourceLinked="0"/>
-          <c:txPr>
-            <a:bodyPr/>
-            <a:lstStyle/>
-            <a:p>
-              <a:pPr>
-                <a:defRPr b="0" i="0" strike="noStrike" sz="1200" u="none">
-                  <a:solidFill>
-                    <a:srgbClr val="000000"/>
-                  </a:solidFill>
-                  <a:latin typeface="Arial"/>
-                </a:defRPr>
-              </a:pPr>
-            </a:p>
-          </c:txPr>
-          <c:showLegendKey val="0"/>
-          <c:showVal val="0"/>
-          <c:showCatName val="0"/>
-          <c:showSerName val="0"/>
-          <c:showPercent val="0"/>
-          <c:showBubbleSize val="0"/>
-          <c:showLeaderLines val="0"/>
-        </c:dLbls>
-        <c:marker val="1"/>
-        <c:axId val="2094734554"/>
-        <c:axId val="2094734552"/>
-        <c:axId val="2094734556"/>
-      </c:lineChart>
-      <c:catAx>
-        <c:axId val="2094734554"/>
-        <c:scaling>
-          <c:orientation val="minMax"/>
-        </c:scaling>
-        <c:delete val="0"/>
-        <c:axPos val="b"/>
-        <c:title>
-          <c:tx>
-            <c:rich>
-              <a:bodyPr/>
-              <a:lstStyle/>
-              <a:p>
-                <a:pPr>
-                  <a:defRPr sz="1200" b="0" i="0" u="none" strike="noStrike">
-                    <a:solidFill>
-                      <a:srgbClr val="6B7699"/>
-                    </a:solidFill>
-                    <a:latin typeface="+mn-lt"/>
-                  </a:defRPr>
-                </a:pPr>
-                <a:r>
-                  <a:rPr sz="1200" b="0" i="0" u="none" strike="noStrike">
-                    <a:solidFill>
-                      <a:srgbClr val="6B7699"/>
-                    </a:solidFill>
-                    <a:latin typeface="+mn-lt"/>
-                  </a:rPr>
-                  <a:t>Channel noise (%)</a:t>
-                </a:r>
-              </a:p>
-            </c:rich>
-          </c:tx>
-          <c:layout/>
-          <c:overlay val="0"/>
-        </c:title>
-        <c:numFmt formatCode="General" sourceLinked="1"/>
-        <c:majorTickMark val="out"/>
-        <c:minorTickMark val="none"/>
-        <c:tickLblPos val="low"/>
-        <c:spPr>
-          <a:ln w="12700" cap="flat">
-            <a:solidFill>
-              <a:srgbClr val="888888"/>
-            </a:solidFill>
-            <a:prstDash val="solid"/>
-            <a:round/>
-          </a:ln>
-        </c:spPr>
-        <c:txPr>
-          <a:bodyPr/>
-          <a:lstStyle/>
-          <a:p>
-            <a:pPr>
-              <a:defRPr sz="1200" b="0" i="0" u="none" strike="noStrike">
-                <a:solidFill>
-                  <a:srgbClr val="6B7699"/>
-                </a:solidFill>
-                <a:latin typeface="+mn-lt"/>
-              </a:defRPr>
-            </a:pPr>
-            <a:endParaRPr lang="en-US"/>
-          </a:p>
-        </c:txPr>
-        <c:crossAx val="2094734552"/>
-        <c:crosses val="autoZero"/>
-        <c:auto val="1"/>
-        <c:lblAlgn val="ctr"/>
-        <c:noMultiLvlLbl val="1"/>
-      </c:catAx>
-      <c:valAx>
-        <c:axId val="2094734552"/>
-        <c:scaling>
-          <c:orientation val="minMax"/>
-          <c:max val="40"/>
-          <c:min val="0"/>
-        </c:scaling>
-        <c:delete val="0"/>
-        <c:axPos val="l"/>
-        <c:majorGridlines>
-          <c:spPr>
-            <a:ln w="9525" cap="flat">
-              <a:solidFill>
-                <a:srgbClr val="D5DBEA"/>
-              </a:solidFill>
-              <a:prstDash val="solid"/>
-              <a:round/>
-            </a:ln>
-          </c:spPr>
-        </c:majorGridlines>
-        <c:title>
-          <c:tx>
-            <c:rich>
-              <a:bodyPr/>
-              <a:lstStyle/>
-              <a:p>
-                <a:pPr>
-                  <a:defRPr sz="1200" b="0" i="0" u="none" strike="noStrike">
-                    <a:solidFill>
-                      <a:srgbClr val="6B7699"/>
-                    </a:solidFill>
-                    <a:latin typeface="+mn-lt"/>
-                  </a:defRPr>
-                </a:pPr>
-                <a:r>
-                  <a:rPr sz="1200" b="0" i="0" u="none" strike="noStrike">
-                    <a:solidFill>
-                      <a:srgbClr val="6B7699"/>
-                    </a:solidFill>
-                    <a:latin typeface="+mn-lt"/>
-                  </a:rPr>
-                  <a:t>QBER (%)</a:t>
-                </a:r>
-              </a:p>
-            </c:rich>
-          </c:tx>
-          <c:layout/>
-          <c:overlay val="0"/>
-        </c:title>
-        <c:numFmt formatCode="General" sourceLinked="0"/>
-        <c:majorTickMark val="out"/>
-        <c:minorTickMark val="none"/>
-        <c:tickLblPos val="nextTo"/>
-        <c:spPr>
-          <a:ln w="12700" cap="flat">
-            <a:solidFill>
-              <a:srgbClr val="888888"/>
-            </a:solidFill>
-            <a:prstDash val="solid"/>
-            <a:round/>
-          </a:ln>
-        </c:spPr>
-        <c:txPr>
-          <a:bodyPr/>
-          <a:lstStyle/>
-          <a:p>
-            <a:pPr>
-              <a:defRPr sz="1200" b="0" i="0" u="none" strike="noStrike">
-                <a:solidFill>
-                  <a:srgbClr val="6B7699"/>
-                </a:solidFill>
-                <a:latin typeface="+mn-lt"/>
-              </a:defRPr>
-            </a:pPr>
-            <a:endParaRPr lang="en-US"/>
-          </a:p>
-        </c:txPr>
-        <c:crossAx val="2094734554"/>
-        <c:crosses val="autoZero"/>
-        <c:crossBetween val="between"/>
-        <c:majorUnit val="10"/>
-      </c:valAx>
-      <c:spPr>
-        <a:noFill/>
-        <a:ln>
-          <a:noFill/>
-        </a:ln>
-        <a:effectLst/>
-      </c:spPr>
-    </c:plotArea>
-    <c:legend>
-      <c:legendPos val="b"/>
-      <c:overlay val="0"/>
-      <c:txPr>
-        <a:bodyPr/>
-        <a:lstStyle/>
-        <a:p>
-          <a:pPr>
-            <a:defRPr sz="1200">
-              <a:solidFill>
-                <a:srgbClr val="0F1B33"/>
-              </a:solidFill>
-              <a:latin typeface="+mn-lt"/>
-              <a:cs typeface="+mn-lt"/>
-            </a:defRPr>
-          </a:pPr>
-          <a:endParaRPr lang="en-US"/>
-        </a:p>
-      </c:txPr>
-    </c:legend>
-    <c:plotVisOnly val="1"/>
-    <c:dispBlanksAs val="span"/>
-  </c:chart>
-  <c:spPr>
-    <a:noFill/>
-    <a:ln>
-      <a:noFill/>
-    </a:ln>
-    <a:effectLst/>
-  </c:spPr>
-  <c:externalData r:id="rId1">
-    <c:autoUpdate val="0"/>
-  </c:externalData>
-</c:chartSpace>
-</file>
-
-<file path=ppt/charts/chart3.xml><?xml version="1.0" encoding="utf-8"?>
-<c:chartSpace xmlns:c="http://schemas.openxmlformats.org/drawingml/2006/chart" xmlns:a="http://schemas.openxmlformats.org/drawingml/2006/main" xmlns:r="http://schemas.openxmlformats.org/officeDocument/2006/relationships">
-  <c:date1904 val="0"/>
-  <c:roundedCorners val="1"/>
-  <c:chart>
-    <c:title>
-      <c:tx>
-        <c:rich>
-          <a:bodyPr/>
-          <a:lstStyle/>
-          <a:p>
-            <a:pPr>
-              <a:defRPr sz="1400" b="0" i="0" u="none" strike="noStrike">
-                <a:solidFill>
-                  <a:srgbClr val="1B2A5C"/>
-                </a:solidFill>
-                <a:latin typeface="+mn-lt"/>
-              </a:defRPr>
-            </a:pPr>
-            <a:r>
-              <a:rPr sz="1400" b="0" i="0" u="none" strike="noStrike">
-                <a:solidFill>
-                  <a:srgbClr val="1B2A5C"/>
-                </a:solidFill>
-                <a:latin typeface="+mn-lt"/>
-              </a:rPr>
-              <a:t>Attack detected (% of 500 runs) vs qubits sent</a:t>
-            </a:r>
-          </a:p>
-        </c:rich>
-      </c:tx>
-      <c:layout/>
-      <c:overlay val="0"/>
-    </c:title>
-    <c:autoTitleDeleted val="0"/>
-    <c:plotArea>
-      <c:layout/>
-      <c:lineChart>
-        <c:varyColors val="0"/>
-        <c:ser>
-          <c:idx val="0"/>
-          <c:order val="0"/>
-          <c:tx>
-            <c:strRef>
-              <c:f>Sheet1!$B$1</c:f>
-              <c:strCache>
-                <c:ptCount val="1"/>
-                <c:pt idx="0">
-                  <c:v>Eve intercepts 20%</c:v>
-                </c:pt>
-              </c:strCache>
-            </c:strRef>
-          </c:tx>
-          <c:spPr>
-            <a:solidFill>
-              <a:srgbClr val="00808A"/>
-            </a:solidFill>
-            <a:ln w="38100" cap="flat">
-              <a:solidFill>
-                <a:srgbClr val="00808A"/>
-              </a:solidFill>
-              <a:prstDash val="solid,solid,solid"/>
-              <a:round/>
-            </a:ln>
-            <a:effectLst/>
-          </c:spPr>
-          <c:invertIfNegative val="0"/>
-          <c:dLbls>
-            <c:numFmt formatCode="#,##0" sourceLinked="0"/>
-            <c:txPr>
-              <a:bodyPr/>
-              <a:lstStyle/>
-              <a:p>
-                <a:pPr>
-                  <a:defRPr b="0" i="0" strike="noStrike" sz="1200" u="none">
-                    <a:solidFill>
-                      <a:srgbClr val="000000"/>
-                    </a:solidFill>
-                    <a:latin typeface="Arial"/>
-                  </a:defRPr>
-                </a:pPr>
-              </a:p>
-            </c:txPr>
-            <c:showLegendKey val="0"/>
-            <c:showVal val="0"/>
-            <c:showCatName val="0"/>
-            <c:showSerName val="0"/>
-            <c:showPercent val="0"/>
-            <c:showBubbleSize val="0"/>
-            <c:showLeaderLines val="0"/>
-          </c:dLbls>
-          <c:marker>
-            <c:symbol val="circle"/>
-            <c:size val="7"/>
-            <c:spPr>
-              <a:solidFill>
-                <a:srgbClr val="00808A"/>
-              </a:solidFill>
-              <a:ln w="9525" cap="flat">
-                <a:solidFill>
-                  <a:srgbClr val="00808A"/>
-                </a:solidFill>
-                <a:prstDash val="solid"/>
-                <a:round/>
-              </a:ln>
-              <a:effectLst/>
-            </c:spPr>
-          </c:marker>
-          <c:cat>
-            <c:multiLvlStrRef>
-              <c:f>Sheet1!$A$2:$A$6</c:f>
-              <c:multiLvlStrCache>
-                <c:ptCount val="5"/>
-                <c:lvl>
-                  <c:pt idx="0">
-                    <c:v>20</c:v>
-                  </c:pt>
-                  <c:pt idx="1">
-                    <c:v>40</c:v>
-                  </c:pt>
-                  <c:pt idx="2">
-                    <c:v>80</c:v>
-                  </c:pt>
-                  <c:pt idx="3">
-                    <c:v>160</c:v>
-                  </c:pt>
-                  <c:pt idx="4">
-                    <c:v>320</c:v>
-                  </c:pt>
-                </c:lvl>
-              </c:multiLvlStrCache>
-            </c:multiLvlStrRef>
-          </c:cat>
-          <c:val>
-            <c:numRef>
-              <c:f>Sheet1!$B$2:$B$6</c:f>
-              <c:numCache>
-                <c:formatCode>General</c:formatCode>
-                <c:ptCount val="5"/>
-                <c:pt idx="0">
-                  <c:v>26</c:v>
-                </c:pt>
-                <c:pt idx="1">
-                  <c:v>22</c:v>
-                </c:pt>
-                <c:pt idx="2">
-                  <c:v>13</c:v>
-                </c:pt>
-                <c:pt idx="3">
-                  <c:v>6</c:v>
-                </c:pt>
-                <c:pt idx="4">
-                  <c:v>1</c:v>
-                </c:pt>
-              </c:numCache>
-            </c:numRef>
-          </c:val>
-          <c:smooth val="0"/>
-        </c:ser>
-        <c:ser>
-          <c:idx val="1"/>
-          <c:order val="1"/>
-          <c:tx>
-            <c:strRef>
-              <c:f>Sheet1!$C$1</c:f>
-              <c:strCache>
-                <c:ptCount val="1"/>
-                <c:pt idx="0">
-                  <c:v>Eve intercepts 50%</c:v>
-                </c:pt>
-              </c:strCache>
-            </c:strRef>
-          </c:tx>
-          <c:spPr>
-            <a:solidFill>
-              <a:srgbClr val="5B6CFF"/>
-            </a:solidFill>
-            <a:ln w="38100" cap="flat">
-              <a:solidFill>
-                <a:srgbClr val="5B6CFF"/>
-              </a:solidFill>
-              <a:prstDash val="solid,solid,solid"/>
-              <a:round/>
-            </a:ln>
-            <a:effectLst/>
-          </c:spPr>
-          <c:invertIfNegative val="0"/>
-          <c:dLbls>
-            <c:numFmt formatCode="#,##0" sourceLinked="0"/>
-            <c:txPr>
-              <a:bodyPr/>
-              <a:lstStyle/>
-              <a:p>
-                <a:pPr>
-                  <a:defRPr b="0" i="0" strike="noStrike" sz="1200" u="none">
-                    <a:solidFill>
-                      <a:srgbClr val="000000"/>
-                    </a:solidFill>
-                    <a:latin typeface="Arial"/>
-                  </a:defRPr>
-                </a:pPr>
-              </a:p>
-            </c:txPr>
-            <c:showLegendKey val="0"/>
-            <c:showVal val="0"/>
-            <c:showCatName val="0"/>
-            <c:showSerName val="0"/>
-            <c:showPercent val="0"/>
-            <c:showBubbleSize val="0"/>
-            <c:showLeaderLines val="0"/>
-          </c:dLbls>
-          <c:marker>
-            <c:symbol val="circle"/>
-            <c:size val="7"/>
-            <c:spPr>
-              <a:solidFill>
-                <a:srgbClr val="5B6CFF"/>
-              </a:solidFill>
-              <a:ln w="9525" cap="flat">
-                <a:solidFill>
-                  <a:srgbClr val="5B6CFF"/>
-                </a:solidFill>
-                <a:prstDash val="solid"/>
-                <a:round/>
-              </a:ln>
-              <a:effectLst/>
-            </c:spPr>
-          </c:marker>
-          <c:cat>
-            <c:multiLvlStrRef>
-              <c:f>Sheet1!$A$2:$A$6</c:f>
-              <c:multiLvlStrCache>
-                <c:ptCount val="5"/>
-                <c:lvl>
-                  <c:pt idx="0">
-                    <c:v>20</c:v>
-                  </c:pt>
-                  <c:pt idx="1">
-                    <c:v>40</c:v>
-                  </c:pt>
-                  <c:pt idx="2">
-                    <c:v>80</c:v>
-                  </c:pt>
-                  <c:pt idx="3">
-                    <c:v>160</c:v>
-                  </c:pt>
-                  <c:pt idx="4">
-                    <c:v>320</c:v>
-                  </c:pt>
-                </c:lvl>
-              </c:multiLvlStrCache>
-            </c:multiLvlStrRef>
-          </c:cat>
-          <c:val>
-            <c:numRef>
-              <c:f>Sheet1!$C$2:$C$6</c:f>
-              <c:numCache>
-                <c:formatCode>General</c:formatCode>
-                <c:ptCount val="5"/>
-                <c:pt idx="0">
-                  <c:v>50</c:v>
-                </c:pt>
-                <c:pt idx="1">
-                  <c:v>53</c:v>
-                </c:pt>
-                <c:pt idx="2">
-                  <c:v>53</c:v>
-                </c:pt>
-                <c:pt idx="3">
-                  <c:v>55</c:v>
-                </c:pt>
-                <c:pt idx="4">
-                  <c:v>67</c:v>
-                </c:pt>
-              </c:numCache>
-            </c:numRef>
-          </c:val>
-          <c:smooth val="0"/>
-        </c:ser>
-        <c:ser>
-          <c:idx val="2"/>
-          <c:order val="2"/>
-          <c:tx>
-            <c:strRef>
-              <c:f>Sheet1!$D$1</c:f>
-              <c:strCache>
-                <c:ptCount val="1"/>
-                <c:pt idx="0">
-                  <c:v>Eve intercepts 100%</c:v>
-                </c:pt>
-              </c:strCache>
-            </c:strRef>
-          </c:tx>
-          <c:spPr>
-            <a:solidFill>
-              <a:srgbClr val="D9480F"/>
-            </a:solidFill>
-            <a:ln w="38100" cap="flat">
-              <a:solidFill>
-                <a:srgbClr val="D9480F"/>
-              </a:solidFill>
-              <a:prstDash val="solid,solid,solid"/>
-              <a:round/>
-            </a:ln>
-            <a:effectLst/>
-          </c:spPr>
-          <c:invertIfNegative val="0"/>
-          <c:dLbls>
-            <c:numFmt formatCode="#,##0" sourceLinked="0"/>
-            <c:txPr>
-              <a:bodyPr/>
-              <a:lstStyle/>
-              <a:p>
-                <a:pPr>
-                  <a:defRPr b="0" i="0" strike="noStrike" sz="1200" u="none">
-                    <a:solidFill>
-                      <a:srgbClr val="000000"/>
-                    </a:solidFill>
-                    <a:latin typeface="Arial"/>
-                  </a:defRPr>
-                </a:pPr>
-              </a:p>
-            </c:txPr>
-            <c:showLegendKey val="0"/>
-            <c:showVal val="0"/>
-            <c:showCatName val="0"/>
-            <c:showSerName val="0"/>
-            <c:showPercent val="0"/>
-            <c:showBubbleSize val="0"/>
-            <c:showLeaderLines val="0"/>
-          </c:dLbls>
-          <c:marker>
-            <c:symbol val="circle"/>
-            <c:size val="7"/>
-            <c:spPr>
-              <a:solidFill>
-                <a:srgbClr val="D9480F"/>
-              </a:solidFill>
-              <a:ln w="9525" cap="flat">
-                <a:solidFill>
-                  <a:srgbClr val="D9480F"/>
-                </a:solidFill>
-                <a:prstDash val="solid"/>
-                <a:round/>
-              </a:ln>
-              <a:effectLst/>
-            </c:spPr>
-          </c:marker>
-          <c:cat>
-            <c:multiLvlStrRef>
-              <c:f>Sheet1!$A$2:$A$6</c:f>
-              <c:multiLvlStrCache>
-                <c:ptCount val="5"/>
-                <c:lvl>
-                  <c:pt idx="0">
-                    <c:v>20</c:v>
-                  </c:pt>
-                  <c:pt idx="1">
-                    <c:v>40</c:v>
-                  </c:pt>
-                  <c:pt idx="2">
-                    <c:v>80</c:v>
-                  </c:pt>
-                  <c:pt idx="3">
-                    <c:v>160</c:v>
-                  </c:pt>
-                  <c:pt idx="4">
-                    <c:v>320</c:v>
-                  </c:pt>
-                </c:lvl>
-              </c:multiLvlStrCache>
-            </c:multiLvlStrRef>
-          </c:cat>
-          <c:val>
-            <c:numRef>
-              <c:f>Sheet1!$D$2:$D$6</c:f>
-              <c:numCache>
-                <c:formatCode>General</c:formatCode>
-                <c:ptCount val="5"/>
-                <c:pt idx="0">
-                  <c:v>71</c:v>
-                </c:pt>
-                <c:pt idx="1">
-                  <c:v>86</c:v>
-                </c:pt>
-                <c:pt idx="2">
-                  <c:v>92</c:v>
-                </c:pt>
-                <c:pt idx="3">
-                  <c:v>98</c:v>
-                </c:pt>
-                <c:pt idx="4">
-                  <c:v>100</c:v>
-                </c:pt>
-              </c:numCache>
-            </c:numRef>
-          </c:val>
-          <c:smooth val="0"/>
-        </c:ser>
-        <c:dLbls>
-          <c:numFmt formatCode="#,##0" sourceLinked="0"/>
-          <c:txPr>
-            <a:bodyPr/>
-            <a:lstStyle/>
-            <a:p>
-              <a:pPr>
-                <a:defRPr b="0" i="0" strike="noStrike" sz="1200" u="none">
-                  <a:solidFill>
-                    <a:srgbClr val="000000"/>
-                  </a:solidFill>
-                  <a:latin typeface="Arial"/>
-                </a:defRPr>
-              </a:pPr>
-            </a:p>
-          </c:txPr>
-          <c:showLegendKey val="0"/>
-          <c:showVal val="0"/>
-          <c:showCatName val="0"/>
-          <c:showSerName val="0"/>
-          <c:showPercent val="0"/>
-          <c:showBubbleSize val="0"/>
-          <c:showLeaderLines val="0"/>
-        </c:dLbls>
-        <c:marker val="1"/>
-        <c:axId val="2094734554"/>
-        <c:axId val="2094734552"/>
-        <c:axId val="2094734556"/>
-      </c:lineChart>
-      <c:catAx>
-        <c:axId val="2094734554"/>
-        <c:scaling>
-          <c:orientation val="minMax"/>
-        </c:scaling>
-        <c:delete val="0"/>
-        <c:axPos val="b"/>
-        <c:title>
-          <c:tx>
-            <c:rich>
-              <a:bodyPr/>
-              <a:lstStyle/>
-              <a:p>
-                <a:pPr>
-                  <a:defRPr sz="1200" b="0" i="0" u="none" strike="noStrike">
-                    <a:solidFill>
-                      <a:srgbClr val="6B7699"/>
-                    </a:solidFill>
-                    <a:latin typeface="+mn-lt"/>
-                  </a:defRPr>
-                </a:pPr>
-                <a:r>
-                  <a:rPr sz="1200" b="0" i="0" u="none" strike="noStrike">
-                    <a:solidFill>
-                      <a:srgbClr val="6B7699"/>
-                    </a:solidFill>
-                    <a:latin typeface="+mn-lt"/>
-                  </a:rPr>
-                  <a:t>Qubits sent by Alice</a:t>
-                </a:r>
-              </a:p>
-            </c:rich>
-          </c:tx>
-          <c:layout/>
-          <c:overlay val="0"/>
-        </c:title>
-        <c:numFmt formatCode="General" sourceLinked="1"/>
-        <c:majorTickMark val="out"/>
-        <c:minorTickMark val="none"/>
-        <c:tickLblPos val="low"/>
-        <c:spPr>
-          <a:ln w="12700" cap="flat">
-            <a:solidFill>
-              <a:srgbClr val="888888"/>
-            </a:solidFill>
-            <a:prstDash val="solid"/>
-            <a:round/>
-          </a:ln>
-        </c:spPr>
-        <c:txPr>
-          <a:bodyPr/>
-          <a:lstStyle/>
-          <a:p>
-            <a:pPr>
-              <a:defRPr sz="1200" b="0" i="0" u="none" strike="noStrike">
-                <a:solidFill>
-                  <a:srgbClr val="6B7699"/>
-                </a:solidFill>
-                <a:latin typeface="+mn-lt"/>
-              </a:defRPr>
-            </a:pPr>
-            <a:endParaRPr lang="en-US"/>
-          </a:p>
-        </c:txPr>
-        <c:crossAx val="2094734552"/>
-        <c:crosses val="autoZero"/>
-        <c:auto val="1"/>
-        <c:lblAlgn val="ctr"/>
-        <c:noMultiLvlLbl val="1"/>
-      </c:catAx>
-      <c:valAx>
-        <c:axId val="2094734552"/>
-        <c:scaling>
-          <c:orientation val="minMax"/>
-          <c:max val="100"/>
-          <c:min val="0"/>
-        </c:scaling>
-        <c:delete val="0"/>
-        <c:axPos val="l"/>
-        <c:majorGridlines>
-          <c:spPr>
-            <a:ln w="9525" cap="flat">
-              <a:solidFill>
-                <a:srgbClr val="D5DBEA"/>
-              </a:solidFill>
-              <a:prstDash val="solid"/>
-              <a:round/>
-            </a:ln>
-          </c:spPr>
-        </c:majorGridlines>
-        <c:title>
-          <c:tx>
-            <c:rich>
-              <a:bodyPr/>
-              <a:lstStyle/>
-              <a:p>
-                <a:pPr>
-                  <a:defRPr sz="1200" b="0" i="0" u="none" strike="noStrike">
-                    <a:solidFill>
-                      <a:srgbClr val="6B7699"/>
-                    </a:solidFill>
-                    <a:latin typeface="+mn-lt"/>
-                  </a:defRPr>
-                </a:pPr>
-                <a:r>
-                  <a:rPr sz="1200" b="0" i="0" u="none" strike="noStrike">
-                    <a:solidFill>
-                      <a:srgbClr val="6B7699"/>
-                    </a:solidFill>
-                    <a:latin typeface="+mn-lt"/>
-                  </a:rPr>
-                  <a:t>Detected (%)</a:t>
-                </a:r>
-              </a:p>
-            </c:rich>
-          </c:tx>
-          <c:layout/>
-          <c:overlay val="0"/>
-        </c:title>
-        <c:numFmt formatCode="General" sourceLinked="0"/>
-        <c:majorTickMark val="out"/>
-        <c:minorTickMark val="none"/>
-        <c:tickLblPos val="nextTo"/>
-        <c:spPr>
-          <a:ln w="12700" cap="flat">
-            <a:solidFill>
-              <a:srgbClr val="888888"/>
-            </a:solidFill>
-            <a:prstDash val="solid"/>
-            <a:round/>
-          </a:ln>
-        </c:spPr>
-        <c:txPr>
-          <a:bodyPr/>
-          <a:lstStyle/>
-          <a:p>
-            <a:pPr>
-              <a:defRPr sz="1200" b="0" i="0" u="none" strike="noStrike">
-                <a:solidFill>
-                  <a:srgbClr val="6B7699"/>
-                </a:solidFill>
-                <a:latin typeface="+mn-lt"/>
-              </a:defRPr>
-            </a:pPr>
-            <a:endParaRPr lang="en-US"/>
-          </a:p>
-        </c:txPr>
-        <c:crossAx val="2094734554"/>
-        <c:crosses val="autoZero"/>
-        <c:crossBetween val="between"/>
-        <c:majorUnit val="20"/>
-      </c:valAx>
-      <c:spPr>
-        <a:noFill/>
-        <a:ln>
-          <a:noFill/>
-        </a:ln>
-        <a:effectLst/>
-      </c:spPr>
-    </c:plotArea>
-    <c:legend>
-      <c:legendPos val="b"/>
-      <c:overlay val="0"/>
-      <c:txPr>
-        <a:bodyPr/>
-        <a:lstStyle/>
-        <a:p>
-          <a:pPr>
-            <a:defRPr sz="1200">
-              <a:solidFill>
-                <a:srgbClr val="0F1B33"/>
-              </a:solidFill>
-              <a:latin typeface="+mn-lt"/>
-              <a:cs typeface="+mn-lt"/>
-            </a:defRPr>
-          </a:pPr>
-          <a:endParaRPr lang="en-US"/>
-        </a:p>
-      </c:txPr>
-    </c:legend>
-    <c:plotVisOnly val="1"/>
-    <c:dispBlanksAs val="span"/>
-  </c:chart>
-  <c:spPr>
-    <a:noFill/>
-    <a:ln>
-      <a:noFill/>
-    </a:ln>
-    <a:effectLst/>
-  </c:spPr>
-  <c:externalData r:id="rId1">
-    <c:autoUpdate val="0"/>
-  </c:externalData>
-</c:chartSpace>
 </file>
 
 <file path=ppt/notesMasters/notesMaster1.xml><?xml version="1.0" encoding="utf-8"?>
@@ -2075,234 +173,10 @@
           <a:chExt cx="0" cy="0"/>
         </a:xfrm>
       </p:grpSpPr>
-      <p:sp>
-        <p:nvSpPr>
-          <p:cNvPr id="2" name="Header Placeholder 1"/>
-          <p:cNvSpPr>
-            <a:spLocks noGrp="1"/>
-          </p:cNvSpPr>
-          <p:nvPr>
-            <p:ph type="hdr" sz="quarter"/>
-          </p:nvPr>
-        </p:nvSpPr>
-        <p:spPr>
-          <a:xfrm>
-            <a:off x="0" y="0"/>
-            <a:ext cx="2971800" cy="458788"/>
-          </a:xfrm>
-          <a:prstGeom prst="rect">
-            <a:avLst/>
-          </a:prstGeom>
-        </p:spPr>
-        <p:txBody>
-          <a:bodyPr vert="horz" lIns="91440" tIns="45720" rIns="91440" bIns="45720" rtlCol="0"/>
-          <a:lstStyle>
-            <a:lvl1pPr algn="l">
-              <a:defRPr sz="1200"/>
-            </a:lvl1pPr>
-          </a:lstStyle>
-          <a:p>
-            <a:endParaRPr lang="en-US"/>
-          </a:p>
-        </p:txBody>
-      </p:sp>
-      <p:sp>
-        <p:nvSpPr>
-          <p:cNvPr id="3" name="Date Placeholder 2"/>
-          <p:cNvSpPr>
-            <a:spLocks noGrp="1"/>
-          </p:cNvSpPr>
-          <p:nvPr>
-            <p:ph type="dt" idx="1"/>
-          </p:nvPr>
-        </p:nvSpPr>
-        <p:spPr>
-          <a:xfrm>
-            <a:off x="3884613" y="0"/>
-            <a:ext cx="2971800" cy="458788"/>
-          </a:xfrm>
-          <a:prstGeom prst="rect">
-            <a:avLst/>
-          </a:prstGeom>
-        </p:spPr>
-        <p:txBody>
-          <a:bodyPr vert="horz" lIns="91440" tIns="45720" rIns="91440" bIns="45720" rtlCol="0"/>
-          <a:lstStyle>
-            <a:lvl1pPr algn="r">
-              <a:defRPr sz="1200"/>
-            </a:lvl1pPr>
-          </a:lstStyle>
-          <a:p>
-            <a:fld id="{5282F153-3F37-0F45-9E97-73ACFA13230C}" type="datetimeFigureOut">
-              <a:rPr lang="en-US"/>
-              <a:t>7/23/19</a:t>
-            </a:fld>
-            <a:endParaRPr lang="en-US"/>
-          </a:p>
-        </p:txBody>
-      </p:sp>
-      <p:sp>
-        <p:nvSpPr>
-          <p:cNvPr id="4" name="Slide Image Placeholder 3"/>
-          <p:cNvSpPr>
-            <a:spLocks noGrp="1" noRot="1" noChangeAspect="1"/>
-          </p:cNvSpPr>
-          <p:nvPr>
-            <p:ph type="sldImg" idx="2"/>
-          </p:nvPr>
-        </p:nvSpPr>
-        <p:spPr>
-          <a:xfrm>
-            <a:off x="685800" y="1143000"/>
-            <a:ext cx="5486400" cy="3086100"/>
-          </a:xfrm>
-          <a:prstGeom prst="rect">
-            <a:avLst/>
-          </a:prstGeom>
-          <a:noFill/>
-          <a:ln w="12700">
-            <a:solidFill>
-              <a:prstClr val="black"/>
-            </a:solidFill>
-          </a:ln>
-        </p:spPr>
-        <p:txBody>
-          <a:bodyPr vert="horz" lIns="91440" tIns="45720" rIns="91440" bIns="45720" rtlCol="0" anchor="ctr"/>
-          <a:lstStyle/>
-          <a:p>
-            <a:endParaRPr lang="en-US"/>
-          </a:p>
-        </p:txBody>
-      </p:sp>
-      <p:sp>
-        <p:nvSpPr>
-          <p:cNvPr id="5" name="Notes Placeholder 4"/>
-          <p:cNvSpPr>
-            <a:spLocks noGrp="1"/>
-          </p:cNvSpPr>
-          <p:nvPr>
-            <p:ph type="body" sz="quarter" idx="3"/>
-          </p:nvPr>
-        </p:nvSpPr>
-        <p:spPr>
-          <a:xfrm>
-            <a:off x="685800" y="4400550"/>
-            <a:ext cx="5486400" cy="3600450"/>
-          </a:xfrm>
-          <a:prstGeom prst="rect">
-            <a:avLst/>
-          </a:prstGeom>
-        </p:spPr>
-        <p:txBody>
-          <a:bodyPr vert="horz" lIns="91440" tIns="45720" rIns="91440" bIns="45720" rtlCol="0"/>
-          <a:lstStyle/>
-          <a:p>
-            <a:pPr lvl="0"/>
-            <a:r>
-              <a:rPr lang="en-US"/>
-              <a:t>Click to edit Master text styles</a:t>
-            </a:r>
-          </a:p>
-          <a:p>
-            <a:pPr lvl="1"/>
-            <a:r>
-              <a:rPr lang="en-US"/>
-              <a:t>Second level</a:t>
-            </a:r>
-          </a:p>
-          <a:p>
-            <a:pPr lvl="2"/>
-            <a:r>
-              <a:rPr lang="en-US"/>
-              <a:t>Third level</a:t>
-            </a:r>
-          </a:p>
-          <a:p>
-            <a:pPr lvl="3"/>
-            <a:r>
-              <a:rPr lang="en-US"/>
-              <a:t>Fourth level</a:t>
-            </a:r>
-          </a:p>
-          <a:p>
-            <a:pPr lvl="4"/>
-            <a:r>
-              <a:rPr lang="en-US"/>
-              <a:t>Fifth level</a:t>
-            </a:r>
-          </a:p>
-        </p:txBody>
-      </p:sp>
-      <p:sp>
-        <p:nvSpPr>
-          <p:cNvPr id="6" name="Footer Placeholder 5"/>
-          <p:cNvSpPr>
-            <a:spLocks noGrp="1"/>
-          </p:cNvSpPr>
-          <p:nvPr>
-            <p:ph type="ftr" sz="quarter" idx="4"/>
-          </p:nvPr>
-        </p:nvSpPr>
-        <p:spPr>
-          <a:xfrm>
-            <a:off x="0" y="8685213"/>
-            <a:ext cx="2971800" cy="458787"/>
-          </a:xfrm>
-          <a:prstGeom prst="rect">
-            <a:avLst/>
-          </a:prstGeom>
-        </p:spPr>
-        <p:txBody>
-          <a:bodyPr vert="horz" lIns="91440" tIns="45720" rIns="91440" bIns="45720" rtlCol="0" anchor="b"/>
-          <a:lstStyle>
-            <a:lvl1pPr algn="l">
-              <a:defRPr sz="1200"/>
-            </a:lvl1pPr>
-          </a:lstStyle>
-          <a:p>
-            <a:endParaRPr lang="en-US"/>
-          </a:p>
-        </p:txBody>
-      </p:sp>
-      <p:sp>
-        <p:nvSpPr>
-          <p:cNvPr id="7" name="Slide Number Placeholder 6"/>
-          <p:cNvSpPr>
-            <a:spLocks noGrp="1"/>
-          </p:cNvSpPr>
-          <p:nvPr>
-            <p:ph type="sldNum" sz="quarter" idx="5"/>
-          </p:nvPr>
-        </p:nvSpPr>
-        <p:spPr>
-          <a:xfrm>
-            <a:off x="3884613" y="8685213"/>
-            <a:ext cx="2971800" cy="458787"/>
-          </a:xfrm>
-          <a:prstGeom prst="rect">
-            <a:avLst/>
-          </a:prstGeom>
-        </p:spPr>
-        <p:txBody>
-          <a:bodyPr vert="horz" lIns="91440" tIns="45720" rIns="91440" bIns="45720" rtlCol="0" anchor="b"/>
-          <a:lstStyle>
-            <a:lvl1pPr algn="r">
-              <a:defRPr sz="1200"/>
-            </a:lvl1pPr>
-          </a:lstStyle>
-          <a:p>
-            <a:fld id="{CE5E9CC1-C706-0F49-92D6-E571CC5EEA8F}" type="slidenum">
-              <a:rPr lang="en-US"/>
-              <a:t>‹#›</a:t>
-            </a:fld>
-            <a:endParaRPr lang="en-US"/>
-          </a:p>
-        </p:txBody>
-      </p:sp>
     </p:spTree>
     <p:extLst>
       <p:ext uri="{BB962C8B-B14F-4D97-AF65-F5344CB8AC3E}">
-        <p14:creationId xmlns:p14="http://schemas.microsoft.com/office/powerpoint/2010/main" val="1024086991"/>
+        <p14:creationId xmlns:p14="http://schemas.microsoft.com/office/powerpoint/2010/main" val="328684855"/>
       </p:ext>
     </p:extLst>
   </p:cSld>
@@ -2450,7 +324,6 @@
               <a:rPr lang="en-US" dirty="0"/>
               <a:t>Introduce the team and the track: Quantum Secure Communication. One line: we simulate a quantum key exchange and show that an eavesdropper can be detected.</a:t>
             </a:r>
-            <a:endParaRPr lang="en-US" dirty="0"/>
           </a:p>
         </p:txBody>
       </p:sp>
@@ -2536,9 +409,8 @@
           <a:p>
             <a:r>
               <a:rPr lang="en-US" dirty="0"/>
-              <a:t>More qubits make the error estimate more accurate, so a full attacker is caught reliably by about 160 qubits. Partial attackers are a different story: with a fixed 11 percent threshold, an attacker who intercepts only 20 percent produces about 5 percent errors and slips through. This motivates privacy amplification and adaptive thresholds in future work.</a:t>
-            </a:r>
-            <a:endParaRPr lang="en-US" dirty="0"/>
+              <a:t>Three takeaways, then the GitHub link. Replace the placeholder with your real repository URL before presenting.</a:t>
+            </a:r>
           </a:p>
         </p:txBody>
       </p:sp>
@@ -2560,270 +432,6 @@
             <a:fld id="{F7021451-1387-4CA6-816F-3879F97B5CBC}" type="slidenum">
               <a:rPr lang="en-US"/>
               <a:t>10</a:t>
-            </a:fld>
-            <a:endParaRPr lang="en-US"/>
-          </a:p>
-        </p:txBody>
-      </p:sp>
-    </p:spTree>
-    <p:extLst>
-      <p:ext uri="{BB962C8B-B14F-4D97-AF65-F5344CB8AC3E}">
-        <p14:creationId xmlns:p14="http://schemas.microsoft.com/office/powerpoint/2010/main" val="1024086991"/>
-      </p:ext>
-    </p:extLst>
-  </p:cSld>
-  <p:clrMapOvr>
-    <a:masterClrMapping/>
-  </p:clrMapOvr>
-</p:notes>
-</file>
-
-<file path=ppt/notesSlides/notesSlide11.xml><?xml version="1.0" encoding="utf-8"?>
-<p:notes xmlns:a="http://schemas.openxmlformats.org/drawingml/2006/main" xmlns:r="http://schemas.openxmlformats.org/officeDocument/2006/relationships" xmlns:p="http://schemas.openxmlformats.org/presentationml/2006/main">
-  <p:cSld>
-    <p:spTree>
-      <p:nvGrpSpPr>
-        <p:cNvPr id="1" name=""/>
-        <p:cNvGrpSpPr/>
-        <p:nvPr/>
-      </p:nvGrpSpPr>
-      <p:grpSpPr>
-        <a:xfrm>
-          <a:off x="0" y="0"/>
-          <a:ext cx="0" cy="0"/>
-          <a:chOff x="0" y="0"/>
-          <a:chExt cx="0" cy="0"/>
-        </a:xfrm>
-      </p:grpSpPr>
-      <p:sp>
-        <p:nvSpPr>
-          <p:cNvPr id="2" name="Slide Image Placeholder 1"/>
-          <p:cNvSpPr>
-            <a:spLocks noGrp="1" noRot="1" noChangeAspect="1"/>
-          </p:cNvSpPr>
-          <p:nvPr>
-            <p:ph type="sldImg"/>
-          </p:nvPr>
-        </p:nvSpPr>
-        <p:spPr/>
-      </p:sp>
-      <p:sp>
-        <p:nvSpPr>
-          <p:cNvPr id="3" name="Notes Placeholder 2"/>
-          <p:cNvSpPr>
-            <a:spLocks noGrp="1"/>
-          </p:cNvSpPr>
-          <p:nvPr>
-            <p:ph type="body" idx="1"/>
-          </p:nvPr>
-        </p:nvSpPr>
-        <p:spPr/>
-        <p:txBody>
-          <a:bodyPr/>
-          <a:lstStyle/>
-          <a:p>
-            <a:r>
-              <a:rPr lang="en-US" dirty="0"/>
-              <a:t>Each cell is 200 simulated runs. Green means the attack usually goes unnoticed, red means it is detected. The boundary moves down as noise rises: noise eats into the error budget. The zone is bounded on both sides: on a noisy channel honest users get false alarms, on a clean one a small attacker can still stay below the threshold. Hiding here means detected in under half the runs.</a:t>
-            </a:r>
-            <a:endParaRPr lang="en-US" dirty="0"/>
-          </a:p>
-        </p:txBody>
-      </p:sp>
-      <p:sp>
-        <p:nvSpPr>
-          <p:cNvPr id="4" name="Slide Number Placeholder 3"/>
-          <p:cNvSpPr>
-            <a:spLocks noGrp="1"/>
-          </p:cNvSpPr>
-          <p:nvPr>
-            <p:ph type="sldNum" sz="quarter" idx="10"/>
-          </p:nvPr>
-        </p:nvSpPr>
-        <p:spPr/>
-        <p:txBody>
-          <a:bodyPr/>
-          <a:lstStyle/>
-          <a:p>
-            <a:fld id="{F7021451-1387-4CA6-816F-3879F97B5CBC}" type="slidenum">
-              <a:rPr lang="en-US"/>
-              <a:t>11</a:t>
-            </a:fld>
-            <a:endParaRPr lang="en-US"/>
-          </a:p>
-        </p:txBody>
-      </p:sp>
-    </p:spTree>
-    <p:extLst>
-      <p:ext uri="{BB962C8B-B14F-4D97-AF65-F5344CB8AC3E}">
-        <p14:creationId xmlns:p14="http://schemas.microsoft.com/office/powerpoint/2010/main" val="1024086991"/>
-      </p:ext>
-    </p:extLst>
-  </p:cSld>
-  <p:clrMapOvr>
-    <a:masterClrMapping/>
-  </p:clrMapOvr>
-</p:notes>
-</file>
-
-<file path=ppt/notesSlides/notesSlide12.xml><?xml version="1.0" encoding="utf-8"?>
-<p:notes xmlns:a="http://schemas.openxmlformats.org/drawingml/2006/main" xmlns:r="http://schemas.openxmlformats.org/officeDocument/2006/relationships" xmlns:p="http://schemas.openxmlformats.org/presentationml/2006/main">
-  <p:cSld>
-    <p:spTree>
-      <p:nvGrpSpPr>
-        <p:cNvPr id="1" name=""/>
-        <p:cNvGrpSpPr/>
-        <p:nvPr/>
-      </p:nvGrpSpPr>
-      <p:grpSpPr>
-        <a:xfrm>
-          <a:off x="0" y="0"/>
-          <a:ext cx="0" cy="0"/>
-          <a:chOff x="0" y="0"/>
-          <a:chExt cx="0" cy="0"/>
-        </a:xfrm>
-      </p:grpSpPr>
-      <p:sp>
-        <p:nvSpPr>
-          <p:cNvPr id="2" name="Slide Image Placeholder 1"/>
-          <p:cNvSpPr>
-            <a:spLocks noGrp="1" noRot="1" noChangeAspect="1"/>
-          </p:cNvSpPr>
-          <p:nvPr>
-            <p:ph type="sldImg"/>
-          </p:nvPr>
-        </p:nvSpPr>
-        <p:spPr/>
-      </p:sp>
-      <p:sp>
-        <p:nvSpPr>
-          <p:cNvPr id="3" name="Notes Placeholder 2"/>
-          <p:cNvSpPr>
-            <a:spLocks noGrp="1"/>
-          </p:cNvSpPr>
-          <p:nvPr>
-            <p:ph type="body" idx="1"/>
-          </p:nvPr>
-        </p:nvSpPr>
-        <p:spPr/>
-        <p:txBody>
-          <a:bodyPr/>
-          <a:lstStyle/>
-          <a:p>
-            <a:r>
-              <a:rPr lang="en-US" dirty="0"/>
-              <a:t>Be honest about limits: this is a simulation of one attack. Then show where it goes next: hardware, error correction, other protocols, and hybrid post-quantum security.</a:t>
-            </a:r>
-            <a:endParaRPr lang="en-US" dirty="0"/>
-          </a:p>
-        </p:txBody>
-      </p:sp>
-      <p:sp>
-        <p:nvSpPr>
-          <p:cNvPr id="4" name="Slide Number Placeholder 3"/>
-          <p:cNvSpPr>
-            <a:spLocks noGrp="1"/>
-          </p:cNvSpPr>
-          <p:nvPr>
-            <p:ph type="sldNum" sz="quarter" idx="10"/>
-          </p:nvPr>
-        </p:nvSpPr>
-        <p:spPr/>
-        <p:txBody>
-          <a:bodyPr/>
-          <a:lstStyle/>
-          <a:p>
-            <a:fld id="{F7021451-1387-4CA6-816F-3879F97B5CBC}" type="slidenum">
-              <a:rPr lang="en-US"/>
-              <a:t>12</a:t>
-            </a:fld>
-            <a:endParaRPr lang="en-US"/>
-          </a:p>
-        </p:txBody>
-      </p:sp>
-    </p:spTree>
-    <p:extLst>
-      <p:ext uri="{BB962C8B-B14F-4D97-AF65-F5344CB8AC3E}">
-        <p14:creationId xmlns:p14="http://schemas.microsoft.com/office/powerpoint/2010/main" val="1024086991"/>
-      </p:ext>
-    </p:extLst>
-  </p:cSld>
-  <p:clrMapOvr>
-    <a:masterClrMapping/>
-  </p:clrMapOvr>
-</p:notes>
-</file>
-
-<file path=ppt/notesSlides/notesSlide13.xml><?xml version="1.0" encoding="utf-8"?>
-<p:notes xmlns:a="http://schemas.openxmlformats.org/drawingml/2006/main" xmlns:r="http://schemas.openxmlformats.org/officeDocument/2006/relationships" xmlns:p="http://schemas.openxmlformats.org/presentationml/2006/main">
-  <p:cSld>
-    <p:spTree>
-      <p:nvGrpSpPr>
-        <p:cNvPr id="1" name=""/>
-        <p:cNvGrpSpPr/>
-        <p:nvPr/>
-      </p:nvGrpSpPr>
-      <p:grpSpPr>
-        <a:xfrm>
-          <a:off x="0" y="0"/>
-          <a:ext cx="0" cy="0"/>
-          <a:chOff x="0" y="0"/>
-          <a:chExt cx="0" cy="0"/>
-        </a:xfrm>
-      </p:grpSpPr>
-      <p:sp>
-        <p:nvSpPr>
-          <p:cNvPr id="2" name="Slide Image Placeholder 1"/>
-          <p:cNvSpPr>
-            <a:spLocks noGrp="1" noRot="1" noChangeAspect="1"/>
-          </p:cNvSpPr>
-          <p:nvPr>
-            <p:ph type="sldImg"/>
-          </p:nvPr>
-        </p:nvSpPr>
-        <p:spPr/>
-      </p:sp>
-      <p:sp>
-        <p:nvSpPr>
-          <p:cNvPr id="3" name="Notes Placeholder 2"/>
-          <p:cNvSpPr>
-            <a:spLocks noGrp="1"/>
-          </p:cNvSpPr>
-          <p:nvPr>
-            <p:ph type="body" idx="1"/>
-          </p:nvPr>
-        </p:nvSpPr>
-        <p:spPr/>
-        <p:txBody>
-          <a:bodyPr/>
-          <a:lstStyle/>
-          <a:p>
-            <a:r>
-              <a:rPr lang="en-US" dirty="0"/>
-              <a:t>Three takeaways, then the GitHub link. Replace the placeholder with your real repository URL before presenting.</a:t>
-            </a:r>
-            <a:endParaRPr lang="en-US" dirty="0"/>
-          </a:p>
-        </p:txBody>
-      </p:sp>
-      <p:sp>
-        <p:nvSpPr>
-          <p:cNvPr id="4" name="Slide Number Placeholder 3"/>
-          <p:cNvSpPr>
-            <a:spLocks noGrp="1"/>
-          </p:cNvSpPr>
-          <p:nvPr>
-            <p:ph type="sldNum" sz="quarter" idx="10"/>
-          </p:nvPr>
-        </p:nvSpPr>
-        <p:spPr/>
-        <p:txBody>
-          <a:bodyPr/>
-          <a:lstStyle/>
-          <a:p>
-            <a:fld id="{F7021451-1387-4CA6-816F-3879F97B5CBC}" type="slidenum">
-              <a:rPr lang="en-US"/>
-              <a:t>13</a:t>
             </a:fld>
             <a:endParaRPr lang="en-US"/>
           </a:p>
@@ -2890,7 +498,6 @@
               <a:rPr lang="en-US" dirty="0"/>
               <a:t>Set up the problem. Key exchange today depends on hard maths, and a classical eavesdropper leaves no trace. The question on the bottom bar is what BB84 answers.</a:t>
             </a:r>
-            <a:endParaRPr lang="en-US" dirty="0"/>
           </a:p>
         </p:txBody>
       </p:sp>
@@ -2978,7 +585,6 @@
               <a:rPr lang="en-US" dirty="0"/>
               <a:t>Three physical facts make this work: wrong-basis measurements are random, measuring disturbs the state, and states cannot be cloned. Eve cannot know the basis in advance, so she disturbs some qubits.</a:t>
             </a:r>
-            <a:endParaRPr lang="en-US" dirty="0"/>
           </a:p>
         </p:txBody>
       </p:sp>
@@ -3066,7 +672,6 @@
               <a:rPr lang="en-US" dirty="0"/>
               <a:t>Walk through the five steps left to right. Only the bases are announced publicly, never the bits. Z and X are two different ways of measuring the same qubit.</a:t>
             </a:r>
-            <a:endParaRPr lang="en-US" dirty="0"/>
           </a:p>
         </p:txBody>
       </p:sp>
@@ -3154,7 +759,6 @@
               <a:rPr lang="en-US" dirty="0"/>
               <a:t>Highlighted columns are the positions where Alice's and Bob's bases matched. Only those bits go into the key. Without Eve, Bob's bit equals Alice's bit in every matched column.</a:t>
             </a:r>
-            <a:endParaRPr lang="en-US" dirty="0"/>
           </a:p>
         </p:txBody>
       </p:sp>
@@ -3242,7 +846,6 @@
               <a:rPr lang="en-US" dirty="0"/>
               <a:t>One qubit is one tiny circuit: prepare, optionally pass through Eve, then Bob measures. The pipeline across the top is that circuit. Mention the GitHub repo contains the full code.</a:t>
             </a:r>
-            <a:endParaRPr lang="en-US" dirty="0"/>
           </a:p>
         </p:txBody>
       </p:sp>
@@ -3330,7 +933,6 @@
               <a:rPr lang="en-US" dirty="0"/>
               <a:t>This is the key calculation. Half the time Eve guesses the wrong basis. When she does, her resent qubit gives Bob a random bit, which is wrong half the time. 0.5 x 0.5 = 25%.</a:t>
             </a:r>
-            <a:endParaRPr lang="en-US" dirty="0"/>
           </a:p>
         </p:txBody>
       </p:sp>
@@ -3416,9 +1018,8 @@
           <a:p>
             <a:r>
               <a:rPr lang="en-US" dirty="0"/>
-              <a:t>The chart shows the expected relationship from theory. Replace or overlay it with your own qber_vs_eve.png from the Qiskit run, and update the three values on the right with the numbers you actually measured. Small samples make the simulated points wobble around the line; say so.</a:t>
-            </a:r>
-            <a:endParaRPr lang="en-US" dirty="0"/>
+              <a:t>Each cell is 200 simulated runs. Green means the attack usually goes unnoticed, red means it is detected. The boundary moves down as noise rises: noise eats into the error budget. The zone is bounded on both sides: on a noisy channel honest users get false alarms, on a clean one a small attacker can still stay below the threshold. Hiding here means detected in under half the runs.</a:t>
+            </a:r>
           </a:p>
         </p:txBody>
       </p:sp>
@@ -3504,9 +1105,8 @@
           <a:p>
             <a:r>
               <a:rPr lang="en-US" dirty="0"/>
-              <a:t>Noise and an attacker both raise the error rate. A full attacker keeps the QBER far above the threshold at every noise level, so she is always caught. The real problem is the other direction: once noise passes about 8%, honest users start aborting because their own errors look like an attack. Numbers come from 500 repeated runs per point.</a:t>
-            </a:r>
-            <a:endParaRPr lang="en-US" dirty="0"/>
+              <a:t>Be honest about limits: this is a simulation of one attack. Then show where it goes next: hardware, error correction, other protocols, and hybrid post-quantum security.</a:t>
+            </a:r>
           </a:p>
         </p:txBody>
       </p:sp>
@@ -3584,6 +1184,7 @@
         <a:solidFill>
           <a:srgbClr val="1B2A5C"/>
         </a:solidFill>
+        <a:effectLst/>
       </p:bgPr>
     </p:bg>
     <p:spTree>
@@ -3623,9 +1224,11 @@
       <p:sp>
         <p:nvSpPr>
           <p:cNvPr id="3" name="Text 1"/>
-          <p:cNvSpPr/>
+          <p:cNvSpPr>
+            <a:spLocks noGrp="1"/>
+          </p:cNvSpPr>
           <p:nvPr>
-            <p:ph idx="101" type="title" hasCustomPrompt="1"/>
+            <p:ph type="title" idx="101" hasCustomPrompt="1"/>
           </p:nvPr>
         </p:nvSpPr>
         <p:spPr>
@@ -3642,7 +1245,7 @@
         <p:txBody>
           <a:bodyPr wrap="square" rtlCol="0"/>
           <a:lstStyle>
-            <a:lvl1pPr algn="l" indent="0" marL="0">
+            <a:lvl1pPr marL="0" indent="0" algn="l">
               <a:buNone/>
               <a:defRPr lang="en-US" sz="4000" b="1" dirty="0">
                 <a:solidFill>
@@ -3652,7 +1255,7 @@
             </a:lvl1pPr>
           </a:lstStyle>
           <a:p>
-            <a:pPr algn="l" indent="0" marL="0">
+            <a:pPr marL="0" indent="0" algn="l">
               <a:buNone/>
             </a:pPr>
             <a:r>
@@ -3670,9 +1273,11 @@
       <p:sp>
         <p:nvSpPr>
           <p:cNvPr id="4" name="Text 1"/>
-          <p:cNvSpPr/>
+          <p:cNvSpPr>
+            <a:spLocks noGrp="1"/>
+          </p:cNvSpPr>
           <p:nvPr>
-            <p:ph idx="102" type="body" hasCustomPrompt="1"/>
+            <p:ph type="body" idx="102" hasCustomPrompt="1"/>
           </p:nvPr>
         </p:nvSpPr>
         <p:spPr>
@@ -3689,7 +1294,7 @@
         <p:txBody>
           <a:bodyPr wrap="square" rtlCol="0"/>
           <a:lstStyle>
-            <a:lvl1pPr algn="l" indent="0" marL="0">
+            <a:lvl1pPr marL="0" indent="0" algn="l">
               <a:buNone/>
               <a:defRPr lang="en-US" sz="2000" dirty="0">
                 <a:solidFill>
@@ -3699,7 +1304,7 @@
             </a:lvl1pPr>
           </a:lstStyle>
           <a:p>
-            <a:pPr algn="l" indent="0" marL="0">
+            <a:pPr marL="0" indent="0" algn="l">
               <a:buNone/>
             </a:pPr>
             <a:r>
@@ -3730,6 +1335,7 @@
         <a:solidFill>
           <a:srgbClr val="FFFFFF"/>
         </a:solidFill>
+        <a:effectLst/>
       </p:bgPr>
     </p:bg>
     <p:spTree>
@@ -3749,9 +1355,11 @@
       <p:sp>
         <p:nvSpPr>
           <p:cNvPr id="2" name="Text 0"/>
-          <p:cNvSpPr/>
+          <p:cNvSpPr>
+            <a:spLocks noGrp="1"/>
+          </p:cNvSpPr>
           <p:nvPr>
-            <p:ph idx="100" type="title" hasCustomPrompt="1"/>
+            <p:ph type="title" idx="100" hasCustomPrompt="1"/>
           </p:nvPr>
         </p:nvSpPr>
         <p:spPr>
@@ -3768,7 +1376,7 @@
         <p:txBody>
           <a:bodyPr wrap="square" rtlCol="0"/>
           <a:lstStyle>
-            <a:lvl1pPr algn="l" indent="0" marL="0">
+            <a:lvl1pPr marL="0" indent="0" algn="l">
               <a:buNone/>
               <a:defRPr lang="en-US" sz="3400" b="1" dirty="0">
                 <a:solidFill>
@@ -3778,7 +1386,7 @@
             </a:lvl1pPr>
           </a:lstStyle>
           <a:p>
-            <a:pPr algn="l" indent="0" marL="0">
+            <a:pPr marL="0" indent="0" algn="l">
               <a:buNone/>
             </a:pPr>
             <a:r>
@@ -3814,7 +1422,7 @@
           <a:bodyPr wrap="square" lIns="0" tIns="0" rIns="0" bIns="0" rtlCol="0" anchor="ctr"/>
           <a:lstStyle/>
           <a:p>
-            <a:pPr indent="0" marL="0">
+            <a:pPr marL="0" indent="0">
               <a:buNone/>
             </a:pPr>
             <a:r>
@@ -3849,7 +1457,7 @@
           </a:prstGeom>
           <a:extLst>
             <a:ext uri="{C572A759-6A51-4108-AA02-DFA0A04FC94B}">
-              <ma14:wrappingTextBoxFlag xmlns:ma14="http://schemas.microsoft.com/office/mac/drawingml/2011/main" val="0"/>
+              <ma14:wrappingTextBoxFlag xmlns="" xmlns:ma14="http://schemas.microsoft.com/office/mac/drawingml/2011/main" val="0"/>
             </a:ext>
           </a:extLst>
         </p:spPr>
@@ -3867,8 +1475,8 @@
           <a:p>
             <a:pPr algn="r"/>
             <a:fld id="{F7021451-1387-4CA6-816F-3879F97B5CBC}" type="slidenum">
-              <a:rPr b="0" lang="en-US"/>
-              <a:t>1003</a:t>
+              <a:rPr lang="en-US" b="0"/>
+              <a:t>‹#›</a:t>
             </a:fld>
             <a:endParaRPr lang="en-US"/>
           </a:p>
@@ -3890,6 +1498,7 @@
         <a:solidFill>
           <a:srgbClr val="1B2A5C"/>
         </a:solidFill>
+        <a:effectLst/>
       </p:bgPr>
     </p:bg>
     <p:spTree>
@@ -3929,9 +1538,11 @@
       <p:sp>
         <p:nvSpPr>
           <p:cNvPr id="3" name="Text 1"/>
-          <p:cNvSpPr/>
+          <p:cNvSpPr>
+            <a:spLocks noGrp="1"/>
+          </p:cNvSpPr>
           <p:nvPr>
-            <p:ph idx="101" type="title" hasCustomPrompt="1"/>
+            <p:ph type="title" idx="101" hasCustomPrompt="1"/>
           </p:nvPr>
         </p:nvSpPr>
         <p:spPr>
@@ -3948,7 +1559,7 @@
         <p:txBody>
           <a:bodyPr wrap="square" rtlCol="0"/>
           <a:lstStyle>
-            <a:lvl1pPr algn="l" indent="0" marL="0">
+            <a:lvl1pPr marL="0" indent="0" algn="l">
               <a:buNone/>
               <a:defRPr lang="en-US" sz="3800" b="1" dirty="0">
                 <a:solidFill>
@@ -3958,7 +1569,7 @@
             </a:lvl1pPr>
           </a:lstStyle>
           <a:p>
-            <a:pPr algn="l" indent="0" marL="0">
+            <a:pPr marL="0" indent="0" algn="l">
               <a:buNone/>
             </a:pPr>
             <a:r>
@@ -3976,9 +1587,11 @@
       <p:sp>
         <p:nvSpPr>
           <p:cNvPr id="4" name="Text 1"/>
-          <p:cNvSpPr/>
+          <p:cNvSpPr>
+            <a:spLocks noGrp="1"/>
+          </p:cNvSpPr>
           <p:nvPr>
-            <p:ph idx="102" type="body" hasCustomPrompt="1"/>
+            <p:ph type="body" idx="102" hasCustomPrompt="1"/>
           </p:nvPr>
         </p:nvSpPr>
         <p:spPr>
@@ -3995,7 +1608,7 @@
         <p:txBody>
           <a:bodyPr wrap="square" rtlCol="0"/>
           <a:lstStyle>
-            <a:lvl1pPr algn="l" indent="0" marL="0">
+            <a:lvl1pPr marL="0" indent="0" algn="l">
               <a:buNone/>
               <a:defRPr lang="en-US" sz="1800" dirty="0">
                 <a:solidFill>
@@ -4005,7 +1618,7 @@
             </a:lvl1pPr>
           </a:lstStyle>
           <a:p>
-            <a:pPr algn="l" indent="0" marL="0">
+            <a:pPr marL="0" indent="0" algn="l">
               <a:buNone/>
             </a:pPr>
             <a:r>
@@ -4031,6 +1644,11 @@
 <file path=ppt/slideMasters/slideMaster1.xml><?xml version="1.0" encoding="utf-8"?>
 <p:sldMaster xmlns:a="http://schemas.openxmlformats.org/drawingml/2006/main" xmlns:r="http://schemas.openxmlformats.org/officeDocument/2006/relationships" xmlns:p="http://schemas.openxmlformats.org/presentationml/2006/main">
   <p:cSld>
+    <p:bg>
+      <p:bgRef idx="1001">
+        <a:schemeClr val="bg1"/>
+      </p:bgRef>
+    </p:bg>
     <p:spTree>
       <p:nvGrpSpPr>
         <p:cNvPr id="1" name=""/>
@@ -4065,7 +1683,7 @@
           </a:prstGeom>
           <a:extLst>
             <a:ext uri="{C572A759-6A51-4108-AA02-DFA0A04FC94B}">
-              <ma14:wrappingTextBoxFlag xmlns:ma14="http://schemas.microsoft.com/office/mac/drawingml/2011/main" val="0"/>
+              <ma14:wrappingTextBoxFlag xmlns="" xmlns:ma14="http://schemas.microsoft.com/office/mac/drawingml/2011/main" val="0"/>
             </a:ext>
           </a:extLst>
         </p:spPr>
@@ -4083,8 +1701,8 @@
           <a:p>
             <a:pPr algn="r"/>
             <a:fld id="{F7021451-1387-4CA6-816F-3879F97B5CBC}" type="slidenum">
-              <a:rPr b="0" lang="en-US"/>
-              <a:t>null</a:t>
+              <a:rPr lang="en-US" b="0"/>
+              <a:t>‹#›</a:t>
             </a:fld>
             <a:endParaRPr lang="en-US"/>
           </a:p>
@@ -4373,9 +1991,11 @@
       <p:sp>
         <p:nvSpPr>
           <p:cNvPr id="2" name="Text 1"/>
-          <p:cNvSpPr/>
+          <p:cNvSpPr>
+            <a:spLocks noGrp="1"/>
+          </p:cNvSpPr>
           <p:nvPr>
-            <p:ph idx="101" type="title" hasCustomPrompt="1"/>
+            <p:ph type="title" idx="101" hasCustomPrompt="1"/>
           </p:nvPr>
         </p:nvSpPr>
         <p:spPr>
@@ -4393,7 +2013,7 @@
           <a:bodyPr wrap="square" lIns="0" tIns="0" rIns="0" bIns="0" rtlCol="0" anchor="b"/>
           <a:lstStyle/>
           <a:p>
-            <a:pPr algn="l" indent="0" marL="0">
+            <a:pPr marL="0" indent="0" algn="l">
               <a:buNone/>
             </a:pPr>
             <a:r>
@@ -4411,9 +2031,11 @@
       <p:sp>
         <p:nvSpPr>
           <p:cNvPr id="3" name="Text 1"/>
-          <p:cNvSpPr/>
+          <p:cNvSpPr>
+            <a:spLocks noGrp="1"/>
+          </p:cNvSpPr>
           <p:nvPr>
-            <p:ph idx="102" type="body" hasCustomPrompt="1"/>
+            <p:ph type="body" idx="102" hasCustomPrompt="1"/>
           </p:nvPr>
         </p:nvSpPr>
         <p:spPr>
@@ -4431,7 +2053,7 @@
           <a:bodyPr wrap="square" lIns="0" tIns="0" rIns="0" bIns="0" rtlCol="0" anchor="t"/>
           <a:lstStyle/>
           <a:p>
-            <a:pPr algn="l" indent="0" marL="0">
+            <a:pPr marL="0" indent="0" algn="l">
               <a:buNone/>
             </a:pPr>
             <a:r>
@@ -4534,14 +2156,14 @@
       </p:sp>
       <p:pic>
         <p:nvPicPr>
-          <p:cNvPr id="8" name="Atom icon" descr="Atom">    </p:cNvPr>
+          <p:cNvPr id="8" name="Atom icon" descr="Atom"/>
           <p:cNvPicPr>
             <a:picLocks noChangeAspect="1"/>
           </p:cNvPicPr>
           <p:nvPr/>
         </p:nvPicPr>
         <p:blipFill>
-          <a:blip r:embed="rId1"/>
+          <a:blip r:embed="rId3"/>
           <a:stretch>
             <a:fillRect/>
           </a:stretch>
@@ -4577,16 +2199,48 @@
           <a:bodyPr wrap="square" lIns="0" tIns="0" rIns="0" bIns="0" rtlCol="0" anchor="t"/>
           <a:lstStyle/>
           <a:p>
-            <a:pPr indent="0" marL="0">
+            <a:pPr marL="0" indent="0">
               <a:buNone/>
             </a:pPr>
             <a:r>
+              <a:rPr lang="en-US" b="1" dirty="0">
+                <a:solidFill>
+                  <a:schemeClr val="bg1"/>
+                </a:solidFill>
+              </a:rPr>
+              <a:t>Team </a:t>
+            </a:r>
+            <a:r>
+              <a:rPr lang="en-US" b="1" dirty="0" err="1">
+                <a:solidFill>
+                  <a:schemeClr val="bg1"/>
+                </a:solidFill>
+              </a:rPr>
+              <a:t>Kichkat</a:t>
+            </a:r>
+            <a:r>
               <a:rPr lang="en-US" sz="1800" b="1" dirty="0">
                 <a:solidFill>
                   <a:schemeClr val="bg1"/>
                 </a:solidFill>
               </a:rPr>
-              <a:t>[Team name]  |  [Member names]</a:t>
+              <a:t> | Kshiraja </a:t>
+            </a:r>
+            <a:r>
+              <a:rPr lang="en-US" sz="1800" b="1" dirty="0" err="1">
+                <a:solidFill>
+                  <a:schemeClr val="bg1"/>
+                </a:solidFill>
+              </a:rPr>
+              <a:t>Dhamal</a:t>
+            </a:r>
+            <a:r>
+              <a:rPr lang="en-US" sz="1800" b="1" dirty="0">
+                <a:solidFill>
+                  <a:schemeClr val="bg1"/>
+                </a:solidFill>
+              </a:rPr>
+              <a:t>, Srishti Shewale, Samiksha Patil</a:t>
             </a:r>
             <a:endParaRPr lang="en-US" sz="1800" dirty="0"/>
           </a:p>
@@ -4613,7 +2267,7 @@
           <a:bodyPr wrap="square" lIns="0" tIns="0" rIns="0" bIns="0" rtlCol="0" anchor="t"/>
           <a:lstStyle/>
           <a:p>
-            <a:pPr indent="0" marL="0">
+            <a:pPr marL="0" indent="0">
               <a:buNone/>
             </a:pPr>
             <a:r>
@@ -4637,1382 +2291,6 @@
 </file>
 
 <file path=ppt/slides/slide10.xml><?xml version="1.0" encoding="utf-8"?>
-<p:sld xmlns:a="http://schemas.openxmlformats.org/drawingml/2006/main" xmlns:r="http://schemas.openxmlformats.org/officeDocument/2006/relationships" xmlns:p="http://schemas.openxmlformats.org/presentationml/2006/main">
-  <p:cSld name="Slide 10">
-    <p:spTree>
-      <p:nvGrpSpPr>
-        <p:cNvPr id="1" name=""/>
-        <p:cNvGrpSpPr/>
-        <p:nvPr/>
-      </p:nvGrpSpPr>
-      <p:grpSpPr>
-        <a:xfrm>
-          <a:off x="0" y="0"/>
-          <a:ext cx="0" cy="0"/>
-          <a:chOff x="0" y="0"/>
-          <a:chExt cx="0" cy="0"/>
-        </a:xfrm>
-      </p:grpSpPr>
-      <p:sp>
-        <p:nvSpPr>
-          <p:cNvPr id="2" name="Text 0"/>
-          <p:cNvSpPr/>
-          <p:nvPr>
-            <p:ph idx="100" type="title" hasCustomPrompt="1"/>
-          </p:nvPr>
-        </p:nvSpPr>
-        <p:spPr>
-          <a:xfrm>
-            <a:off x="548640" y="411480"/>
-            <a:ext cx="11064240" cy="822960"/>
-          </a:xfrm>
-          <a:prstGeom prst="rect">
-            <a:avLst/>
-          </a:prstGeom>
-          <a:noFill/>
-          <a:ln/>
-        </p:spPr>
-        <p:txBody>
-          <a:bodyPr wrap="square" lIns="0" tIns="0" rIns="0" bIns="0" rtlCol="0" anchor="ctr"/>
-          <a:lstStyle/>
-          <a:p>
-            <a:pPr algn="l" indent="0" marL="0">
-              <a:buNone/>
-            </a:pPr>
-            <a:r>
-              <a:rPr lang="en-US" sz="3400" b="1" dirty="0">
-                <a:solidFill>
-                  <a:schemeClr val="tx2"/>
-                </a:solidFill>
-              </a:rPr>
-              <a:t>How many qubits are enough?</a:t>
-            </a:r>
-            <a:endParaRPr lang="en-US" sz="3400" dirty="0"/>
-          </a:p>
-        </p:txBody>
-      </p:sp>
-      <p:graphicFrame>
-        <p:nvGraphicFramePr>
-          <p:cNvPr id="3" name="Chart 0" descr=""/>
-          <p:cNvGraphicFramePr/>
-          <p:nvPr/>
-        </p:nvGraphicFramePr>
-        <p:xfrm>
-          <a:off x="548640" y="1554480"/>
-          <a:ext cx="6583680" cy="4480560"/>
-        </p:xfrm>
-        <a:graphic xmlns:a="http://schemas.openxmlformats.org/drawingml/2006/main">
-          <a:graphicData uri="http://schemas.openxmlformats.org/drawingml/2006/chart">
-            <c:chart xmlns:c="http://schemas.openxmlformats.org/drawingml/2006/chart" r:id="rId1"/>
-          </a:graphicData>
-        </a:graphic>
-      </p:graphicFrame>
-      <p:sp>
-        <p:nvSpPr>
-          <p:cNvPr id="4" name="Qubits card 1"/>
-          <p:cNvSpPr/>
-          <p:nvPr/>
-        </p:nvSpPr>
-        <p:spPr>
-          <a:xfrm>
-            <a:off x="7406640" y="1554480"/>
-            <a:ext cx="4206240" cy="1371600"/>
-          </a:xfrm>
-          <a:prstGeom prst="roundRect">
-            <a:avLst>
-              <a:gd name="adj" fmla="val 8000"/>
-            </a:avLst>
-          </a:prstGeom>
-          <a:solidFill>
-            <a:schemeClr val="bg2"/>
-          </a:solidFill>
-          <a:ln/>
-          <a:effectLst>
-            <a:outerShdw sx="100000" sy="100000" kx="0" ky="0" algn="bl" rotWithShape="0" blurRad="101600" dist="25400" dir="5400000">
-              <a:srgbClr val="1B2A5C">
-                <a:alpha val="12000"/>
-              </a:srgbClr>
-            </a:outerShdw>
-          </a:effectLst>
-        </p:spPr>
-      </p:sp>
-      <p:sp>
-        <p:nvSpPr>
-          <p:cNvPr id="5" name="Text 2"/>
-          <p:cNvSpPr txBox="1"/>
-          <p:nvPr/>
-        </p:nvSpPr>
-        <p:spPr>
-          <a:xfrm>
-            <a:off x="7635240" y="1554480"/>
-            <a:ext cx="1463040" cy="1371600"/>
-          </a:xfrm>
-          <a:prstGeom prst="rect">
-            <a:avLst/>
-          </a:prstGeom>
-          <a:noFill/>
-          <a:ln/>
-        </p:spPr>
-        <p:txBody>
-          <a:bodyPr wrap="square" lIns="0" tIns="0" rIns="0" bIns="0" rtlCol="0" anchor="ctr"/>
-          <a:lstStyle/>
-          <a:p>
-            <a:pPr indent="0" marL="0">
-              <a:buNone/>
-            </a:pPr>
-            <a:r>
-              <a:rPr lang="en-US" sz="3200" b="1" dirty="0">
-                <a:solidFill>
-                  <a:schemeClr val="accent4"/>
-                </a:solidFill>
-              </a:rPr>
-              <a:t>98%</a:t>
-            </a:r>
-            <a:endParaRPr lang="en-US" sz="3200" dirty="0"/>
-          </a:p>
-        </p:txBody>
-      </p:sp>
-      <p:sp>
-        <p:nvSpPr>
-          <p:cNvPr id="6" name="Text 3"/>
-          <p:cNvSpPr txBox="1"/>
-          <p:nvPr/>
-        </p:nvSpPr>
-        <p:spPr>
-          <a:xfrm>
-            <a:off x="9144000" y="1554480"/>
-            <a:ext cx="2286000" cy="1371600"/>
-          </a:xfrm>
-          <a:prstGeom prst="rect">
-            <a:avLst/>
-          </a:prstGeom>
-          <a:noFill/>
-          <a:ln/>
-        </p:spPr>
-        <p:txBody>
-          <a:bodyPr wrap="square" lIns="0" tIns="0" rIns="0" bIns="0" rtlCol="0" anchor="ctr"/>
-          <a:lstStyle/>
-          <a:p>
-            <a:pPr indent="0" marL="0">
-              <a:buNone/>
-            </a:pPr>
-            <a:r>
-              <a:rPr lang="en-US" sz="1400" dirty="0">
-                <a:solidFill>
-                  <a:schemeClr val="tx1"/>
-                </a:solidFill>
-              </a:rPr>
-              <a:t>Full attack caught with 160 qubits (100% with 320)</a:t>
-            </a:r>
-            <a:endParaRPr lang="en-US" sz="1400" dirty="0"/>
-          </a:p>
-        </p:txBody>
-      </p:sp>
-      <p:sp>
-        <p:nvSpPr>
-          <p:cNvPr id="7" name="Qubits card 2"/>
-          <p:cNvSpPr/>
-          <p:nvPr/>
-        </p:nvSpPr>
-        <p:spPr>
-          <a:xfrm>
-            <a:off x="7406640" y="3108960"/>
-            <a:ext cx="4206240" cy="1371600"/>
-          </a:xfrm>
-          <a:prstGeom prst="roundRect">
-            <a:avLst>
-              <a:gd name="adj" fmla="val 8000"/>
-            </a:avLst>
-          </a:prstGeom>
-          <a:solidFill>
-            <a:schemeClr val="bg2"/>
-          </a:solidFill>
-          <a:ln/>
-          <a:effectLst>
-            <a:outerShdw sx="100000" sy="100000" kx="0" ky="0" algn="bl" rotWithShape="0" blurRad="101600" dist="25400" dir="5400000">
-              <a:srgbClr val="1B2A5C">
-                <a:alpha val="12000"/>
-              </a:srgbClr>
-            </a:outerShdw>
-          </a:effectLst>
-        </p:spPr>
-      </p:sp>
-      <p:sp>
-        <p:nvSpPr>
-          <p:cNvPr id="8" name="Text 5"/>
-          <p:cNvSpPr txBox="1"/>
-          <p:nvPr/>
-        </p:nvSpPr>
-        <p:spPr>
-          <a:xfrm>
-            <a:off x="7635240" y="3108960"/>
-            <a:ext cx="1463040" cy="1371600"/>
-          </a:xfrm>
-          <a:prstGeom prst="rect">
-            <a:avLst/>
-          </a:prstGeom>
-          <a:noFill/>
-          <a:ln/>
-        </p:spPr>
-        <p:txBody>
-          <a:bodyPr wrap="square" lIns="0" tIns="0" rIns="0" bIns="0" rtlCol="0" anchor="ctr"/>
-          <a:lstStyle/>
-          <a:p>
-            <a:pPr indent="0" marL="0">
-              <a:buNone/>
-            </a:pPr>
-            <a:r>
-              <a:rPr lang="en-US" sz="3200" b="1" dirty="0">
-                <a:solidFill>
-                  <a:schemeClr val="accent2"/>
-                </a:solidFill>
-              </a:rPr>
-              <a:t>67%</a:t>
-            </a:r>
-            <a:endParaRPr lang="en-US" sz="3200" dirty="0"/>
-          </a:p>
-        </p:txBody>
-      </p:sp>
-      <p:sp>
-        <p:nvSpPr>
-          <p:cNvPr id="9" name="Text 6"/>
-          <p:cNvSpPr txBox="1"/>
-          <p:nvPr/>
-        </p:nvSpPr>
-        <p:spPr>
-          <a:xfrm>
-            <a:off x="9144000" y="3108960"/>
-            <a:ext cx="2286000" cy="1371600"/>
-          </a:xfrm>
-          <a:prstGeom prst="rect">
-            <a:avLst/>
-          </a:prstGeom>
-          <a:noFill/>
-          <a:ln/>
-        </p:spPr>
-        <p:txBody>
-          <a:bodyPr wrap="square" lIns="0" tIns="0" rIns="0" bIns="0" rtlCol="0" anchor="ctr"/>
-          <a:lstStyle/>
-          <a:p>
-            <a:pPr indent="0" marL="0">
-              <a:buNone/>
-            </a:pPr>
-            <a:r>
-              <a:rPr lang="en-US" sz="1400" dirty="0">
-                <a:solidFill>
-                  <a:schemeClr val="tx1"/>
-                </a:solidFill>
-              </a:rPr>
-              <a:t>A 50% attacker is caught only this often, even with 320 qubits</a:t>
-            </a:r>
-            <a:endParaRPr lang="en-US" sz="1400" dirty="0"/>
-          </a:p>
-        </p:txBody>
-      </p:sp>
-      <p:sp>
-        <p:nvSpPr>
-          <p:cNvPr id="10" name="Qubits card 3"/>
-          <p:cNvSpPr/>
-          <p:nvPr/>
-        </p:nvSpPr>
-        <p:spPr>
-          <a:xfrm>
-            <a:off x="7406640" y="4663440"/>
-            <a:ext cx="4206240" cy="1371600"/>
-          </a:xfrm>
-          <a:prstGeom prst="roundRect">
-            <a:avLst>
-              <a:gd name="adj" fmla="val 8000"/>
-            </a:avLst>
-          </a:prstGeom>
-          <a:solidFill>
-            <a:schemeClr val="bg2"/>
-          </a:solidFill>
-          <a:ln/>
-          <a:effectLst>
-            <a:outerShdw sx="100000" sy="100000" kx="0" ky="0" algn="bl" rotWithShape="0" blurRad="101600" dist="25400" dir="5400000">
-              <a:srgbClr val="1B2A5C">
-                <a:alpha val="12000"/>
-              </a:srgbClr>
-            </a:outerShdw>
-          </a:effectLst>
-        </p:spPr>
-      </p:sp>
-      <p:sp>
-        <p:nvSpPr>
-          <p:cNvPr id="11" name="Text 8"/>
-          <p:cNvSpPr txBox="1"/>
-          <p:nvPr/>
-        </p:nvSpPr>
-        <p:spPr>
-          <a:xfrm>
-            <a:off x="7635240" y="4663440"/>
-            <a:ext cx="1463040" cy="1371600"/>
-          </a:xfrm>
-          <a:prstGeom prst="rect">
-            <a:avLst/>
-          </a:prstGeom>
-          <a:noFill/>
-          <a:ln/>
-        </p:spPr>
-        <p:txBody>
-          <a:bodyPr wrap="square" lIns="0" tIns="0" rIns="0" bIns="0" rtlCol="0" anchor="ctr"/>
-          <a:lstStyle/>
-          <a:p>
-            <a:pPr indent="0" marL="0">
-              <a:buNone/>
-            </a:pPr>
-            <a:r>
-              <a:rPr lang="en-US" sz="3200" b="1" dirty="0">
-                <a:solidFill>
-                  <a:schemeClr val="accent2"/>
-                </a:solidFill>
-              </a:rPr>
-              <a:t>1%</a:t>
-            </a:r>
-            <a:endParaRPr lang="en-US" sz="3200" dirty="0"/>
-          </a:p>
-        </p:txBody>
-      </p:sp>
-      <p:sp>
-        <p:nvSpPr>
-          <p:cNvPr id="12" name="Text 9"/>
-          <p:cNvSpPr txBox="1"/>
-          <p:nvPr/>
-        </p:nvSpPr>
-        <p:spPr>
-          <a:xfrm>
-            <a:off x="9144000" y="4663440"/>
-            <a:ext cx="2286000" cy="1371600"/>
-          </a:xfrm>
-          <a:prstGeom prst="rect">
-            <a:avLst/>
-          </a:prstGeom>
-          <a:noFill/>
-          <a:ln/>
-        </p:spPr>
-        <p:txBody>
-          <a:bodyPr wrap="square" lIns="0" tIns="0" rIns="0" bIns="0" rtlCol="0" anchor="ctr"/>
-          <a:lstStyle/>
-          <a:p>
-            <a:pPr indent="0" marL="0">
-              <a:buNone/>
-            </a:pPr>
-            <a:r>
-              <a:rPr lang="en-US" sz="1400" dirty="0">
-                <a:solidFill>
-                  <a:schemeClr val="tx1"/>
-                </a:solidFill>
-              </a:rPr>
-              <a:t>A 20% attacker is almost never caught: her QBER (about 5%) stays under 11%</a:t>
-            </a:r>
-            <a:endParaRPr lang="en-US" sz="1400" dirty="0"/>
-          </a:p>
-        </p:txBody>
-      </p:sp>
-      <p:sp>
-        <p:nvSpPr>
-          <p:cNvPr id="25" name="Slide Number Placeholder 0"/>
-          <p:cNvSpPr>
-            <a:spLocks noGrp="1"/>
-          </p:cNvSpPr>
-          <p:nvPr>
-            <p:ph type="sldNum" sz="quarter" idx="4294967295"/>
-          </p:nvPr>
-        </p:nvSpPr>
-        <p:spPr>
-          <a:xfrm>
-            <a:off x="10972800" y="6382512"/>
-            <a:ext cx="640080" cy="274320"/>
-          </a:xfrm>
-          <a:prstGeom prst="rect">
-            <a:avLst/>
-          </a:prstGeom>
-          <a:extLst>
-            <a:ext uri="{C572A759-6A51-4108-AA02-DFA0A04FC94B}">
-              <ma14:wrappingTextBoxFlag xmlns:ma14="http://schemas.microsoft.com/office/mac/drawingml/2011/main" val="0"/>
-            </a:ext>
-          </a:extLst>
-        </p:spPr>
-        <p:txBody>
-          <a:bodyPr/>
-          <a:lstStyle>
-            <a:lvl1pPr>
-              <a:defRPr sz="1000">
-                <a:solidFill>
-                  <a:schemeClr val="accent6"/>
-                </a:solidFill>
-              </a:defRPr>
-            </a:lvl1pPr>
-          </a:lstStyle>
-          <a:p>
-            <a:pPr algn="r"/>
-            <a:fld id="{F7021451-1387-4CA6-816F-3879F97B5CBC}" type="slidenum">
-              <a:rPr b="0" lang="en-US"/>
-              <a:t>10</a:t>
-            </a:fld>
-            <a:endParaRPr lang="en-US"/>
-          </a:p>
-        </p:txBody>
-      </p:sp>
-    </p:spTree>
-  </p:cSld>
-  <p:clrMapOvr>
-    <a:masterClrMapping/>
-  </p:clrMapOvr>
-</p:sld>
-</file>
-
-<file path=ppt/slides/slide11.xml><?xml version="1.0" encoding="utf-8"?>
-<p:sld xmlns:a="http://schemas.openxmlformats.org/drawingml/2006/main" xmlns:r="http://schemas.openxmlformats.org/officeDocument/2006/relationships" xmlns:p="http://schemas.openxmlformats.org/presentationml/2006/main">
-  <p:cSld name="Slide 11">
-    <p:spTree>
-      <p:nvGrpSpPr>
-        <p:cNvPr id="1" name=""/>
-        <p:cNvGrpSpPr/>
-        <p:nvPr/>
-      </p:nvGrpSpPr>
-      <p:grpSpPr>
-        <a:xfrm>
-          <a:off x="0" y="0"/>
-          <a:ext cx="0" cy="0"/>
-          <a:chOff x="0" y="0"/>
-          <a:chExt cx="0" cy="0"/>
-        </a:xfrm>
-      </p:grpSpPr>
-      <p:sp>
-        <p:nvSpPr>
-          <p:cNvPr id="2" name="Text 0"/>
-          <p:cNvSpPr/>
-          <p:nvPr>
-            <p:ph idx="100" type="title" hasCustomPrompt="1"/>
-          </p:nvPr>
-        </p:nvSpPr>
-        <p:spPr>
-          <a:xfrm>
-            <a:off x="548640" y="411480"/>
-            <a:ext cx="11064240" cy="822960"/>
-          </a:xfrm>
-          <a:prstGeom prst="rect">
-            <a:avLst/>
-          </a:prstGeom>
-          <a:noFill/>
-          <a:ln/>
-        </p:spPr>
-        <p:txBody>
-          <a:bodyPr wrap="square" lIns="0" tIns="0" rIns="0" bIns="0" rtlCol="0" anchor="ctr"/>
-          <a:lstStyle/>
-          <a:p>
-            <a:pPr algn="l" indent="0" marL="0">
-              <a:buNone/>
-            </a:pPr>
-            <a:r>
-              <a:rPr lang="en-US" sz="3400" b="1" dirty="0">
-                <a:solidFill>
-                  <a:schemeClr val="tx2"/>
-                </a:solidFill>
-              </a:rPr>
-              <a:t>Eve's hiding zone</a:t>
-            </a:r>
-            <a:endParaRPr lang="en-US" sz="3400" dirty="0"/>
-          </a:p>
-        </p:txBody>
-      </p:sp>
-      <p:pic>
-        <p:nvPicPr>
-          <p:cNvPr id="3" name="Hiding zone heatmap" descr="Heatmap of attack detection rate against channel noise and the share of qubits Eve intercepts">    </p:cNvPr>
-          <p:cNvPicPr>
-            <a:picLocks noChangeAspect="1"/>
-          </p:cNvPicPr>
-          <p:nvPr/>
-        </p:nvPicPr>
-        <p:blipFill>
-          <a:blip r:embed="rId1"/>
-          <a:stretch>
-            <a:fillRect/>
-          </a:stretch>
-        </p:blipFill>
-        <p:spPr>
-          <a:xfrm>
-            <a:off x="548640" y="1554480"/>
-            <a:ext cx="6766560" cy="4330598"/>
-          </a:xfrm>
-          <a:prstGeom prst="rect">
-            <a:avLst/>
-          </a:prstGeom>
-        </p:spPr>
-      </p:pic>
-      <p:sp>
-        <p:nvSpPr>
-          <p:cNvPr id="4" name="Hiding card 1"/>
-          <p:cNvSpPr/>
-          <p:nvPr/>
-        </p:nvSpPr>
-        <p:spPr>
-          <a:xfrm>
-            <a:off x="7589520" y="1554480"/>
-            <a:ext cx="4023360" cy="1371600"/>
-          </a:xfrm>
-          <a:prstGeom prst="roundRect">
-            <a:avLst>
-              <a:gd name="adj" fmla="val 8000"/>
-            </a:avLst>
-          </a:prstGeom>
-          <a:solidFill>
-            <a:schemeClr val="bg2"/>
-          </a:solidFill>
-          <a:ln/>
-          <a:effectLst>
-            <a:outerShdw sx="100000" sy="100000" kx="0" ky="0" algn="bl" rotWithShape="0" blurRad="101600" dist="25400" dir="5400000">
-              <a:srgbClr val="1B2A5C">
-                <a:alpha val="12000"/>
-              </a:srgbClr>
-            </a:outerShdw>
-          </a:effectLst>
-        </p:spPr>
-      </p:sp>
-      <p:sp>
-        <p:nvSpPr>
-          <p:cNvPr id="5" name="Text 2"/>
-          <p:cNvSpPr txBox="1"/>
-          <p:nvPr/>
-        </p:nvSpPr>
-        <p:spPr>
-          <a:xfrm>
-            <a:off x="7818120" y="1554480"/>
-            <a:ext cx="1463040" cy="1371600"/>
-          </a:xfrm>
-          <a:prstGeom prst="rect">
-            <a:avLst/>
-          </a:prstGeom>
-          <a:noFill/>
-          <a:ln/>
-        </p:spPr>
-        <p:txBody>
-          <a:bodyPr wrap="square" lIns="0" tIns="0" rIns="0" bIns="0" rtlCol="0" anchor="ctr"/>
-          <a:lstStyle/>
-          <a:p>
-            <a:pPr indent="0" marL="0">
-              <a:buNone/>
-            </a:pPr>
-            <a:r>
-              <a:rPr lang="en-US" sz="3200" b="1" dirty="0">
-                <a:solidFill>
-                  <a:schemeClr val="accent4"/>
-                </a:solidFill>
-              </a:rPr>
-              <a:t>40%</a:t>
-            </a:r>
-            <a:endParaRPr lang="en-US" sz="3200" dirty="0"/>
-          </a:p>
-        </p:txBody>
-      </p:sp>
-      <p:sp>
-        <p:nvSpPr>
-          <p:cNvPr id="6" name="Text 3"/>
-          <p:cNvSpPr txBox="1"/>
-          <p:nvPr/>
-        </p:nvSpPr>
-        <p:spPr>
-          <a:xfrm>
-            <a:off x="9326880" y="1554480"/>
-            <a:ext cx="2103120" cy="1371600"/>
-          </a:xfrm>
-          <a:prstGeom prst="rect">
-            <a:avLst/>
-          </a:prstGeom>
-          <a:noFill/>
-          <a:ln/>
-        </p:spPr>
-        <p:txBody>
-          <a:bodyPr wrap="square" lIns="0" tIns="0" rIns="0" bIns="0" rtlCol="0" anchor="ctr"/>
-          <a:lstStyle/>
-          <a:p>
-            <a:pPr indent="0" marL="0">
-              <a:buNone/>
-            </a:pPr>
-            <a:r>
-              <a:rPr lang="en-US" sz="1400" dirty="0">
-                <a:solidFill>
-                  <a:schemeClr val="tx1"/>
-                </a:solidFill>
-              </a:rPr>
-              <a:t>Clean channel: Eve can intercept this share and still be caught in under half the runs</a:t>
-            </a:r>
-            <a:endParaRPr lang="en-US" sz="1400" dirty="0"/>
-          </a:p>
-        </p:txBody>
-      </p:sp>
-      <p:sp>
-        <p:nvSpPr>
-          <p:cNvPr id="7" name="Hiding card 2"/>
-          <p:cNvSpPr/>
-          <p:nvPr/>
-        </p:nvSpPr>
-        <p:spPr>
-          <a:xfrm>
-            <a:off x="7589520" y="3108960"/>
-            <a:ext cx="4023360" cy="1371600"/>
-          </a:xfrm>
-          <a:prstGeom prst="roundRect">
-            <a:avLst>
-              <a:gd name="adj" fmla="val 8000"/>
-            </a:avLst>
-          </a:prstGeom>
-          <a:solidFill>
-            <a:schemeClr val="bg2"/>
-          </a:solidFill>
-          <a:ln/>
-          <a:effectLst>
-            <a:outerShdw sx="100000" sy="100000" kx="0" ky="0" algn="bl" rotWithShape="0" blurRad="101600" dist="25400" dir="5400000">
-              <a:srgbClr val="1B2A5C">
-                <a:alpha val="12000"/>
-              </a:srgbClr>
-            </a:outerShdw>
-          </a:effectLst>
-        </p:spPr>
-      </p:sp>
-      <p:sp>
-        <p:nvSpPr>
-          <p:cNvPr id="8" name="Text 5"/>
-          <p:cNvSpPr txBox="1"/>
-          <p:nvPr/>
-        </p:nvSpPr>
-        <p:spPr>
-          <a:xfrm>
-            <a:off x="7818120" y="3108960"/>
-            <a:ext cx="1463040" cy="1371600"/>
-          </a:xfrm>
-          <a:prstGeom prst="rect">
-            <a:avLst/>
-          </a:prstGeom>
-          <a:noFill/>
-          <a:ln/>
-        </p:spPr>
-        <p:txBody>
-          <a:bodyPr wrap="square" lIns="0" tIns="0" rIns="0" bIns="0" rtlCol="0" anchor="ctr"/>
-          <a:lstStyle/>
-          <a:p>
-            <a:pPr indent="0" marL="0">
-              <a:buNone/>
-            </a:pPr>
-            <a:r>
-              <a:rPr lang="en-US" sz="3200" b="1" dirty="0">
-                <a:solidFill>
-                  <a:schemeClr val="accent1"/>
-                </a:solidFill>
-              </a:rPr>
-              <a:t>20%</a:t>
-            </a:r>
-            <a:endParaRPr lang="en-US" sz="3200" dirty="0"/>
-          </a:p>
-        </p:txBody>
-      </p:sp>
-      <p:sp>
-        <p:nvSpPr>
-          <p:cNvPr id="9" name="Text 6"/>
-          <p:cNvSpPr txBox="1"/>
-          <p:nvPr/>
-        </p:nvSpPr>
-        <p:spPr>
-          <a:xfrm>
-            <a:off x="9326880" y="3108960"/>
-            <a:ext cx="2103120" cy="1371600"/>
-          </a:xfrm>
-          <a:prstGeom prst="rect">
-            <a:avLst/>
-          </a:prstGeom>
-          <a:noFill/>
-          <a:ln/>
-        </p:spPr>
-        <p:txBody>
-          <a:bodyPr wrap="square" lIns="0" tIns="0" rIns="0" bIns="0" rtlCol="0" anchor="ctr"/>
-          <a:lstStyle/>
-          <a:p>
-            <a:pPr indent="0" marL="0">
-              <a:buNone/>
-            </a:pPr>
-            <a:r>
-              <a:rPr lang="en-US" sz="1400" dirty="0">
-                <a:solidFill>
-                  <a:schemeClr val="tx1"/>
-                </a:solidFill>
-              </a:rPr>
-              <a:t>At 4-6% noise her unnoticed share shrinks, since noise already uses up the error budget</a:t>
-            </a:r>
-            <a:endParaRPr lang="en-US" sz="1400" dirty="0"/>
-          </a:p>
-        </p:txBody>
-      </p:sp>
-      <p:sp>
-        <p:nvSpPr>
-          <p:cNvPr id="10" name="Hiding card 3"/>
-          <p:cNvSpPr/>
-          <p:nvPr/>
-        </p:nvSpPr>
-        <p:spPr>
-          <a:xfrm>
-            <a:off x="7589520" y="4663440"/>
-            <a:ext cx="4023360" cy="1371600"/>
-          </a:xfrm>
-          <a:prstGeom prst="roundRect">
-            <a:avLst>
-              <a:gd name="adj" fmla="val 8000"/>
-            </a:avLst>
-          </a:prstGeom>
-          <a:solidFill>
-            <a:schemeClr val="bg2"/>
-          </a:solidFill>
-          <a:ln/>
-          <a:effectLst>
-            <a:outerShdw sx="100000" sy="100000" kx="0" ky="0" algn="bl" rotWithShape="0" blurRad="101600" dist="25400" dir="5400000">
-              <a:srgbClr val="1B2A5C">
-                <a:alpha val="12000"/>
-              </a:srgbClr>
-            </a:outerShdw>
-          </a:effectLst>
-        </p:spPr>
-      </p:sp>
-      <p:sp>
-        <p:nvSpPr>
-          <p:cNvPr id="11" name="Text 8"/>
-          <p:cNvSpPr txBox="1"/>
-          <p:nvPr/>
-        </p:nvSpPr>
-        <p:spPr>
-          <a:xfrm>
-            <a:off x="7818120" y="4663440"/>
-            <a:ext cx="1463040" cy="1371600"/>
-          </a:xfrm>
-          <a:prstGeom prst="rect">
-            <a:avLst/>
-          </a:prstGeom>
-          <a:noFill/>
-          <a:ln/>
-        </p:spPr>
-        <p:txBody>
-          <a:bodyPr wrap="square" lIns="0" tIns="0" rIns="0" bIns="0" rtlCol="0" anchor="ctr"/>
-          <a:lstStyle/>
-          <a:p>
-            <a:pPr indent="0" marL="0">
-              <a:buNone/>
-            </a:pPr>
-            <a:r>
-              <a:rPr lang="en-US" sz="3200" b="1" dirty="0">
-                <a:solidFill>
-                  <a:schemeClr val="accent2"/>
-                </a:solidFill>
-              </a:rPr>
-              <a:t>10%</a:t>
-            </a:r>
-            <a:endParaRPr lang="en-US" sz="3200" dirty="0"/>
-          </a:p>
-        </p:txBody>
-      </p:sp>
-      <p:sp>
-        <p:nvSpPr>
-          <p:cNvPr id="12" name="Text 9"/>
-          <p:cNvSpPr txBox="1"/>
-          <p:nvPr/>
-        </p:nvSpPr>
-        <p:spPr>
-          <a:xfrm>
-            <a:off x="9326880" y="4663440"/>
-            <a:ext cx="2103120" cy="1371600"/>
-          </a:xfrm>
-          <a:prstGeom prst="rect">
-            <a:avLst/>
-          </a:prstGeom>
-          <a:noFill/>
-          <a:ln/>
-        </p:spPr>
-        <p:txBody>
-          <a:bodyPr wrap="square" lIns="0" tIns="0" rIns="0" bIns="0" rtlCol="0" anchor="ctr"/>
-          <a:lstStyle/>
-          <a:p>
-            <a:pPr indent="0" marL="0">
-              <a:buNone/>
-            </a:pPr>
-            <a:r>
-              <a:rPr lang="en-US" sz="1400" dirty="0">
-                <a:solidFill>
-                  <a:schemeClr val="tx1"/>
-                </a:solidFill>
-              </a:rPr>
-              <a:t>At 7-8% noise she can hide only a little, but honest users are already flagged up to 20% of the time</a:t>
-            </a:r>
-            <a:endParaRPr lang="en-US" sz="1400" dirty="0"/>
-          </a:p>
-        </p:txBody>
-      </p:sp>
-      <p:sp>
-        <p:nvSpPr>
-          <p:cNvPr id="25" name="Slide Number Placeholder 0"/>
-          <p:cNvSpPr>
-            <a:spLocks noGrp="1"/>
-          </p:cNvSpPr>
-          <p:nvPr>
-            <p:ph type="sldNum" sz="quarter" idx="4294967295"/>
-          </p:nvPr>
-        </p:nvSpPr>
-        <p:spPr>
-          <a:xfrm>
-            <a:off x="10972800" y="6382512"/>
-            <a:ext cx="640080" cy="274320"/>
-          </a:xfrm>
-          <a:prstGeom prst="rect">
-            <a:avLst/>
-          </a:prstGeom>
-          <a:extLst>
-            <a:ext uri="{C572A759-6A51-4108-AA02-DFA0A04FC94B}">
-              <ma14:wrappingTextBoxFlag xmlns:ma14="http://schemas.microsoft.com/office/mac/drawingml/2011/main" val="0"/>
-            </a:ext>
-          </a:extLst>
-        </p:spPr>
-        <p:txBody>
-          <a:bodyPr/>
-          <a:lstStyle>
-            <a:lvl1pPr>
-              <a:defRPr sz="1000">
-                <a:solidFill>
-                  <a:schemeClr val="accent6"/>
-                </a:solidFill>
-              </a:defRPr>
-            </a:lvl1pPr>
-          </a:lstStyle>
-          <a:p>
-            <a:pPr algn="r"/>
-            <a:fld id="{F7021451-1387-4CA6-816F-3879F97B5CBC}" type="slidenum">
-              <a:rPr b="0" lang="en-US"/>
-              <a:t>11</a:t>
-            </a:fld>
-            <a:endParaRPr lang="en-US"/>
-          </a:p>
-        </p:txBody>
-      </p:sp>
-    </p:spTree>
-  </p:cSld>
-  <p:clrMapOvr>
-    <a:masterClrMapping/>
-  </p:clrMapOvr>
-</p:sld>
-</file>
-
-<file path=ppt/slides/slide12.xml><?xml version="1.0" encoding="utf-8"?>
-<p:sld xmlns:a="http://schemas.openxmlformats.org/drawingml/2006/main" xmlns:r="http://schemas.openxmlformats.org/officeDocument/2006/relationships" xmlns:p="http://schemas.openxmlformats.org/presentationml/2006/main">
-  <p:cSld name="Slide 12">
-    <p:spTree>
-      <p:nvGrpSpPr>
-        <p:cNvPr id="1" name=""/>
-        <p:cNvGrpSpPr/>
-        <p:nvPr/>
-      </p:nvGrpSpPr>
-      <p:grpSpPr>
-        <a:xfrm>
-          <a:off x="0" y="0"/>
-          <a:ext cx="0" cy="0"/>
-          <a:chOff x="0" y="0"/>
-          <a:chExt cx="0" cy="0"/>
-        </a:xfrm>
-      </p:grpSpPr>
-      <p:sp>
-        <p:nvSpPr>
-          <p:cNvPr id="2" name="Text 0"/>
-          <p:cNvSpPr/>
-          <p:nvPr>
-            <p:ph idx="100" type="title" hasCustomPrompt="1"/>
-          </p:nvPr>
-        </p:nvSpPr>
-        <p:spPr>
-          <a:xfrm>
-            <a:off x="548640" y="411480"/>
-            <a:ext cx="11064240" cy="822960"/>
-          </a:xfrm>
-          <a:prstGeom prst="rect">
-            <a:avLst/>
-          </a:prstGeom>
-          <a:noFill/>
-          <a:ln/>
-        </p:spPr>
-        <p:txBody>
-          <a:bodyPr wrap="square" lIns="0" tIns="0" rIns="0" bIns="0" rtlCol="0" anchor="ctr"/>
-          <a:lstStyle/>
-          <a:p>
-            <a:pPr algn="l" indent="0" marL="0">
-              <a:buNone/>
-            </a:pPr>
-            <a:r>
-              <a:rPr lang="en-US" sz="3400" b="1" dirty="0">
-                <a:solidFill>
-                  <a:schemeClr val="tx2"/>
-                </a:solidFill>
-              </a:rPr>
-              <a:t>Limitations and future scope</a:t>
-            </a:r>
-            <a:endParaRPr lang="en-US" sz="3400" dirty="0"/>
-          </a:p>
-        </p:txBody>
-      </p:sp>
-      <p:sp>
-        <p:nvSpPr>
-          <p:cNvPr id="3" name="Column card 1"/>
-          <p:cNvSpPr/>
-          <p:nvPr/>
-        </p:nvSpPr>
-        <p:spPr>
-          <a:xfrm>
-            <a:off x="548640" y="1554480"/>
-            <a:ext cx="5394960" cy="4480560"/>
-          </a:xfrm>
-          <a:prstGeom prst="roundRect">
-            <a:avLst>
-              <a:gd name="adj" fmla="val 2449"/>
-            </a:avLst>
-          </a:prstGeom>
-          <a:solidFill>
-            <a:schemeClr val="bg2"/>
-          </a:solidFill>
-          <a:ln/>
-          <a:effectLst>
-            <a:outerShdw sx="100000" sy="100000" kx="0" ky="0" algn="bl" rotWithShape="0" blurRad="101600" dist="25400" dir="5400000">
-              <a:srgbClr val="1B2A5C">
-                <a:alpha val="12000"/>
-              </a:srgbClr>
-            </a:outerShdw>
-          </a:effectLst>
-        </p:spPr>
-      </p:sp>
-      <p:sp>
-        <p:nvSpPr>
-          <p:cNvPr id="4" name="Limitations circle"/>
-          <p:cNvSpPr/>
-          <p:nvPr/>
-        </p:nvSpPr>
-        <p:spPr>
-          <a:xfrm>
-            <a:off x="914400" y="1920240"/>
-            <a:ext cx="822960" cy="822960"/>
-          </a:xfrm>
-          <a:prstGeom prst="ellipse">
-            <a:avLst/>
-          </a:prstGeom>
-          <a:solidFill>
-            <a:schemeClr val="accent2"/>
-          </a:solidFill>
-          <a:ln/>
-        </p:spPr>
-      </p:sp>
-      <p:pic>
-        <p:nvPicPr>
-          <p:cNvPr id="5" name="Limitations icon" descr="Limitations">    </p:cNvPr>
-          <p:cNvPicPr>
-            <a:picLocks noChangeAspect="1"/>
-          </p:cNvPicPr>
-          <p:nvPr/>
-        </p:nvPicPr>
-        <p:blipFill>
-          <a:blip r:embed="rId1"/>
-          <a:stretch>
-            <a:fillRect/>
-          </a:stretch>
-        </p:blipFill>
-        <p:spPr>
-          <a:xfrm>
-            <a:off x="1120140" y="2125980"/>
-            <a:ext cx="411480" cy="411480"/>
-          </a:xfrm>
-          <a:prstGeom prst="rect">
-            <a:avLst/>
-          </a:prstGeom>
-        </p:spPr>
-      </p:pic>
-      <p:sp>
-        <p:nvSpPr>
-          <p:cNvPr id="6" name="Text 3"/>
-          <p:cNvSpPr txBox="1"/>
-          <p:nvPr/>
-        </p:nvSpPr>
-        <p:spPr>
-          <a:xfrm>
-            <a:off x="1965960" y="1920240"/>
-            <a:ext cx="3657600" cy="822960"/>
-          </a:xfrm>
-          <a:prstGeom prst="rect">
-            <a:avLst/>
-          </a:prstGeom>
-          <a:noFill/>
-          <a:ln/>
-        </p:spPr>
-        <p:txBody>
-          <a:bodyPr wrap="square" lIns="0" tIns="0" rIns="0" bIns="0" rtlCol="0" anchor="ctr"/>
-          <a:lstStyle/>
-          <a:p>
-            <a:pPr indent="0" marL="0">
-              <a:buNone/>
-            </a:pPr>
-            <a:r>
-              <a:rPr lang="en-US" sz="2400" b="1" dirty="0">
-                <a:solidFill>
-                  <a:schemeClr val="tx2"/>
-                </a:solidFill>
-              </a:rPr>
-              <a:t>Limitations</a:t>
-            </a:r>
-            <a:endParaRPr lang="en-US" sz="2400" dirty="0"/>
-          </a:p>
-        </p:txBody>
-      </p:sp>
-      <p:sp>
-        <p:nvSpPr>
-          <p:cNvPr id="7" name="Text 4"/>
-          <p:cNvSpPr txBox="1"/>
-          <p:nvPr/>
-        </p:nvSpPr>
-        <p:spPr>
-          <a:xfrm>
-            <a:off x="914400" y="3108960"/>
-            <a:ext cx="4663440" cy="2743200"/>
-          </a:xfrm>
-          <a:prstGeom prst="rect">
-            <a:avLst/>
-          </a:prstGeom>
-          <a:noFill/>
-          <a:ln/>
-        </p:spPr>
-        <p:txBody>
-          <a:bodyPr wrap="square" lIns="0" tIns="0" rIns="0" bIns="0" rtlCol="0" anchor="t"/>
-          <a:lstStyle/>
-          <a:p>
-            <a:pPr marL="342900" indent="-342900">
-              <a:spcAft>
-                <a:spcPts val="1200"/>
-              </a:spcAft>
-              <a:buSzPct val="100000"/>
-              <a:buChar char="•"/>
-            </a:pPr>
-            <a:r>
-              <a:rPr lang="en-US" sz="1600" dirty="0">
-                <a:solidFill>
-                  <a:schemeClr val="tx1"/>
-                </a:solidFill>
-              </a:rPr>
-              <a:t>Simulation only: noise is a simple bit-flip model, not hardware</a:t>
-            </a:r>
-            <a:endParaRPr lang="en-US" sz="1600" dirty="0"/>
-          </a:p>
-          <a:p>
-            <a:pPr marL="342900" indent="-342900">
-              <a:spcAft>
-                <a:spcPts val="1200"/>
-              </a:spcAft>
-              <a:buSzPct val="100000"/>
-              <a:buChar char="•"/>
-            </a:pPr>
-            <a:r>
-              <a:rPr lang="en-US" sz="1600" dirty="0">
-                <a:solidFill>
-                  <a:schemeClr val="tx1"/>
-                </a:solidFill>
-              </a:rPr>
-              <a:t>Only the intercept-resend attack is tested</a:t>
-            </a:r>
-            <a:endParaRPr lang="en-US" sz="1600" dirty="0"/>
-          </a:p>
-          <a:p>
-            <a:pPr marL="342900" indent="-342900">
-              <a:spcAft>
-                <a:spcPts val="1200"/>
-              </a:spcAft>
-              <a:buSzPct val="100000"/>
-              <a:buChar char="•"/>
-            </a:pPr>
-            <a:r>
-              <a:rPr lang="en-US" sz="1600" dirty="0">
-                <a:solidFill>
-                  <a:schemeClr val="tx1"/>
-                </a:solidFill>
-              </a:rPr>
-              <a:t>No error correction or privacy amplification yet</a:t>
-            </a:r>
-            <a:endParaRPr lang="en-US" sz="1600" dirty="0"/>
-          </a:p>
-          <a:p>
-            <a:pPr marL="342900" indent="-342900">
-              <a:spcAft>
-                <a:spcPts val="1200"/>
-              </a:spcAft>
-              <a:buSzPct val="100000"/>
-              <a:buChar char="•"/>
-            </a:pPr>
-            <a:r>
-              <a:rPr lang="en-US" sz="1600" dirty="0">
-                <a:solidFill>
-                  <a:schemeClr val="tx1"/>
-                </a:solidFill>
-              </a:rPr>
-              <a:t>QBER from small samples varies from run to run</a:t>
-            </a:r>
-            <a:endParaRPr lang="en-US" sz="1600" dirty="0"/>
-          </a:p>
-        </p:txBody>
-      </p:sp>
-      <p:sp>
-        <p:nvSpPr>
-          <p:cNvPr id="8" name="Column card 2"/>
-          <p:cNvSpPr/>
-          <p:nvPr/>
-        </p:nvSpPr>
-        <p:spPr>
-          <a:xfrm>
-            <a:off x="6245352" y="1554480"/>
-            <a:ext cx="5394960" cy="4480560"/>
-          </a:xfrm>
-          <a:prstGeom prst="roundRect">
-            <a:avLst>
-              <a:gd name="adj" fmla="val 2449"/>
-            </a:avLst>
-          </a:prstGeom>
-          <a:solidFill>
-            <a:schemeClr val="bg2"/>
-          </a:solidFill>
-          <a:ln/>
-          <a:effectLst>
-            <a:outerShdw sx="100000" sy="100000" kx="0" ky="0" algn="bl" rotWithShape="0" blurRad="101600" dist="25400" dir="5400000">
-              <a:srgbClr val="1B2A5C">
-                <a:alpha val="12000"/>
-              </a:srgbClr>
-            </a:outerShdw>
-          </a:effectLst>
-        </p:spPr>
-      </p:sp>
-      <p:sp>
-        <p:nvSpPr>
-          <p:cNvPr id="9" name="Future scope circle"/>
-          <p:cNvSpPr/>
-          <p:nvPr/>
-        </p:nvSpPr>
-        <p:spPr>
-          <a:xfrm>
-            <a:off x="6611112" y="1920240"/>
-            <a:ext cx="822960" cy="822960"/>
-          </a:xfrm>
-          <a:prstGeom prst="ellipse">
-            <a:avLst/>
-          </a:prstGeom>
-          <a:solidFill>
-            <a:schemeClr val="accent1"/>
-          </a:solidFill>
-          <a:ln/>
-        </p:spPr>
-      </p:sp>
-      <p:pic>
-        <p:nvPicPr>
-          <p:cNvPr id="10" name="Future scope icon" descr="Future scope">    </p:cNvPr>
-          <p:cNvPicPr>
-            <a:picLocks noChangeAspect="1"/>
-          </p:cNvPicPr>
-          <p:nvPr/>
-        </p:nvPicPr>
-        <p:blipFill>
-          <a:blip r:embed="rId2"/>
-          <a:stretch>
-            <a:fillRect/>
-          </a:stretch>
-        </p:blipFill>
-        <p:spPr>
-          <a:xfrm>
-            <a:off x="6816852" y="2125980"/>
-            <a:ext cx="411480" cy="411480"/>
-          </a:xfrm>
-          <a:prstGeom prst="rect">
-            <a:avLst/>
-          </a:prstGeom>
-        </p:spPr>
-      </p:pic>
-      <p:sp>
-        <p:nvSpPr>
-          <p:cNvPr id="11" name="Text 7"/>
-          <p:cNvSpPr txBox="1"/>
-          <p:nvPr/>
-        </p:nvSpPr>
-        <p:spPr>
-          <a:xfrm>
-            <a:off x="7662672" y="1920240"/>
-            <a:ext cx="3657600" cy="822960"/>
-          </a:xfrm>
-          <a:prstGeom prst="rect">
-            <a:avLst/>
-          </a:prstGeom>
-          <a:noFill/>
-          <a:ln/>
-        </p:spPr>
-        <p:txBody>
-          <a:bodyPr wrap="square" lIns="0" tIns="0" rIns="0" bIns="0" rtlCol="0" anchor="ctr"/>
-          <a:lstStyle/>
-          <a:p>
-            <a:pPr indent="0" marL="0">
-              <a:buNone/>
-            </a:pPr>
-            <a:r>
-              <a:rPr lang="en-US" sz="2400" b="1" dirty="0">
-                <a:solidFill>
-                  <a:schemeClr val="tx2"/>
-                </a:solidFill>
-              </a:rPr>
-              <a:t>Future scope</a:t>
-            </a:r>
-            <a:endParaRPr lang="en-US" sz="2400" dirty="0"/>
-          </a:p>
-        </p:txBody>
-      </p:sp>
-      <p:sp>
-        <p:nvSpPr>
-          <p:cNvPr id="12" name="Text 8"/>
-          <p:cNvSpPr txBox="1"/>
-          <p:nvPr/>
-        </p:nvSpPr>
-        <p:spPr>
-          <a:xfrm>
-            <a:off x="6611112" y="3108960"/>
-            <a:ext cx="4663440" cy="2743200"/>
-          </a:xfrm>
-          <a:prstGeom prst="rect">
-            <a:avLst/>
-          </a:prstGeom>
-          <a:noFill/>
-          <a:ln/>
-        </p:spPr>
-        <p:txBody>
-          <a:bodyPr wrap="square" lIns="0" tIns="0" rIns="0" bIns="0" rtlCol="0" anchor="t"/>
-          <a:lstStyle/>
-          <a:p>
-            <a:pPr marL="342900" indent="-342900">
-              <a:spcAft>
-                <a:spcPts val="1200"/>
-              </a:spcAft>
-              <a:buSzPct val="100000"/>
-              <a:buChar char="•"/>
-            </a:pPr>
-            <a:r>
-              <a:rPr lang="en-US" sz="1600" dirty="0">
-                <a:solidFill>
-                  <a:schemeClr val="tx1"/>
-                </a:solidFill>
-              </a:rPr>
-              <a:t>Run the protocol on real IBM quantum hardware</a:t>
-            </a:r>
-            <a:endParaRPr lang="en-US" sz="1600" dirty="0"/>
-          </a:p>
-          <a:p>
-            <a:pPr marL="342900" indent="-342900">
-              <a:spcAft>
-                <a:spcPts val="1200"/>
-              </a:spcAft>
-              <a:buSzPct val="100000"/>
-              <a:buChar char="•"/>
-            </a:pPr>
-            <a:r>
-              <a:rPr lang="en-US" sz="1600" dirty="0">
-                <a:solidFill>
-                  <a:schemeClr val="tx1"/>
-                </a:solidFill>
-              </a:rPr>
-              <a:t>Add error correction and privacy amplification</a:t>
-            </a:r>
-            <a:endParaRPr lang="en-US" sz="1600" dirty="0"/>
-          </a:p>
-          <a:p>
-            <a:pPr marL="342900" indent="-342900">
-              <a:spcAft>
-                <a:spcPts val="1200"/>
-              </a:spcAft>
-              <a:buSzPct val="100000"/>
-              <a:buChar char="•"/>
-            </a:pPr>
-            <a:r>
-              <a:rPr lang="en-US" sz="1600" dirty="0">
-                <a:solidFill>
-                  <a:schemeClr val="tx1"/>
-                </a:solidFill>
-              </a:rPr>
-              <a:t>Try other protocols such as E91 and decoy-state BB84</a:t>
-            </a:r>
-            <a:endParaRPr lang="en-US" sz="1600" dirty="0"/>
-          </a:p>
-          <a:p>
-            <a:pPr marL="342900" indent="-342900">
-              <a:spcAft>
-                <a:spcPts val="1200"/>
-              </a:spcAft>
-              <a:buSzPct val="100000"/>
-              <a:buChar char="•"/>
-            </a:pPr>
-            <a:r>
-              <a:rPr lang="en-US" sz="1600" dirty="0">
-                <a:solidFill>
-                  <a:schemeClr val="tx1"/>
-                </a:solidFill>
-              </a:rPr>
-              <a:t>Combine with post-quantum cryptography in a hybrid scheme</a:t>
-            </a:r>
-            <a:endParaRPr lang="en-US" sz="1600" dirty="0"/>
-          </a:p>
-        </p:txBody>
-      </p:sp>
-      <p:sp>
-        <p:nvSpPr>
-          <p:cNvPr id="25" name="Slide Number Placeholder 0"/>
-          <p:cNvSpPr>
-            <a:spLocks noGrp="1"/>
-          </p:cNvSpPr>
-          <p:nvPr>
-            <p:ph type="sldNum" sz="quarter" idx="4294967295"/>
-          </p:nvPr>
-        </p:nvSpPr>
-        <p:spPr>
-          <a:xfrm>
-            <a:off x="10972800" y="6382512"/>
-            <a:ext cx="640080" cy="274320"/>
-          </a:xfrm>
-          <a:prstGeom prst="rect">
-            <a:avLst/>
-          </a:prstGeom>
-          <a:extLst>
-            <a:ext uri="{C572A759-6A51-4108-AA02-DFA0A04FC94B}">
-              <ma14:wrappingTextBoxFlag xmlns:ma14="http://schemas.microsoft.com/office/mac/drawingml/2011/main" val="0"/>
-            </a:ext>
-          </a:extLst>
-        </p:spPr>
-        <p:txBody>
-          <a:bodyPr/>
-          <a:lstStyle>
-            <a:lvl1pPr>
-              <a:defRPr sz="1000">
-                <a:solidFill>
-                  <a:schemeClr val="accent6"/>
-                </a:solidFill>
-              </a:defRPr>
-            </a:lvl1pPr>
-          </a:lstStyle>
-          <a:p>
-            <a:pPr algn="r"/>
-            <a:fld id="{F7021451-1387-4CA6-816F-3879F97B5CBC}" type="slidenum">
-              <a:rPr b="0" lang="en-US"/>
-              <a:t>12</a:t>
-            </a:fld>
-            <a:endParaRPr lang="en-US"/>
-          </a:p>
-        </p:txBody>
-      </p:sp>
-    </p:spTree>
-  </p:cSld>
-  <p:clrMapOvr>
-    <a:masterClrMapping/>
-  </p:clrMapOvr>
-</p:sld>
-</file>
-
-<file path=ppt/slides/slide13.xml><?xml version="1.0" encoding="utf-8"?>
 <p:sld xmlns:a="http://schemas.openxmlformats.org/drawingml/2006/main" xmlns:r="http://schemas.openxmlformats.org/officeDocument/2006/relationships" xmlns:p="http://schemas.openxmlformats.org/presentationml/2006/main">
   <p:cSld name="Slide 13">
     <p:spTree>
@@ -6032,9 +2310,11 @@
       <p:sp>
         <p:nvSpPr>
           <p:cNvPr id="2" name="Text 1"/>
-          <p:cNvSpPr/>
+          <p:cNvSpPr>
+            <a:spLocks noGrp="1"/>
+          </p:cNvSpPr>
           <p:nvPr>
-            <p:ph idx="101" type="title" hasCustomPrompt="1"/>
+            <p:ph type="title" idx="101" hasCustomPrompt="1"/>
           </p:nvPr>
         </p:nvSpPr>
         <p:spPr>
@@ -6052,7 +2332,7 @@
           <a:bodyPr wrap="square" lIns="0" tIns="0" rIns="0" bIns="0" rtlCol="0" anchor="ctr"/>
           <a:lstStyle/>
           <a:p>
-            <a:pPr algn="l" indent="0" marL="0">
+            <a:pPr marL="0" indent="0" algn="l">
               <a:buNone/>
             </a:pPr>
             <a:r>
@@ -6070,9 +2350,11 @@
       <p:sp>
         <p:nvSpPr>
           <p:cNvPr id="3" name="Text 1"/>
-          <p:cNvSpPr/>
+          <p:cNvSpPr>
+            <a:spLocks noGrp="1"/>
+          </p:cNvSpPr>
           <p:nvPr>
-            <p:ph idx="102" type="body" hasCustomPrompt="1"/>
+            <p:ph type="body" idx="102" hasCustomPrompt="1"/>
           </p:nvPr>
         </p:nvSpPr>
         <p:spPr>
@@ -6090,7 +2372,7 @@
           <a:bodyPr wrap="square" lIns="0" tIns="0" rIns="0" bIns="0" rtlCol="0" anchor="t"/>
           <a:lstStyle/>
           <a:p>
-            <a:pPr algn="l" marL="342900" indent="-342900">
+            <a:pPr marL="342900" indent="-342900" algn="l">
               <a:spcAft>
                 <a:spcPts val="1400"/>
               </a:spcAft>
@@ -6108,7 +2390,7 @@
             <a:endParaRPr lang="en-US" sz="1800" dirty="0"/>
           </a:p>
           <a:p>
-            <a:pPr algn="l" marL="342900" indent="-342900">
+            <a:pPr marL="342900" indent="-342900" algn="l">
               <a:spcAft>
                 <a:spcPts val="1400"/>
               </a:spcAft>
@@ -6126,7 +2408,7 @@
             <a:endParaRPr lang="en-US" sz="1800" dirty="0"/>
           </a:p>
           <a:p>
-            <a:pPr algn="l" marL="342900" indent="-342900">
+            <a:pPr marL="342900" indent="-342900" algn="l">
               <a:spcAft>
                 <a:spcPts val="1400"/>
               </a:spcAft>
@@ -6144,7 +2426,7 @@
             <a:endParaRPr lang="en-US" sz="1800" dirty="0"/>
           </a:p>
           <a:p>
-            <a:pPr algn="l" marL="342900" indent="-342900">
+            <a:pPr marL="342900" indent="-342900" algn="l">
               <a:spcAft>
                 <a:spcPts val="1400"/>
               </a:spcAft>
@@ -6185,14 +2467,14 @@
       </p:sp>
       <p:pic>
         <p:nvPicPr>
-          <p:cNvPr id="5" name="GitHub icon" descr="GitHub">    </p:cNvPr>
+          <p:cNvPr id="5" name="GitHub icon" descr="GitHub"/>
           <p:cNvPicPr>
             <a:picLocks noChangeAspect="1"/>
           </p:cNvPicPr>
           <p:nvPr/>
         </p:nvPicPr>
         <p:blipFill>
-          <a:blip r:embed="rId1"/>
+          <a:blip r:embed="rId3"/>
           <a:stretch>
             <a:fillRect/>
           </a:stretch>
@@ -6228,7 +2510,7 @@
           <a:bodyPr wrap="square" lIns="0" tIns="0" rIns="0" bIns="0" rtlCol="0" anchor="t"/>
           <a:lstStyle/>
           <a:p>
-            <a:pPr algn="ctr" indent="0" marL="0">
+            <a:pPr marL="0" indent="0" algn="ctr">
               <a:buNone/>
             </a:pPr>
             <a:r>
@@ -6237,7 +2519,23 @@
                   <a:schemeClr val="bg1"/>
                 </a:solidFill>
               </a:rPr>
-              <a:t>github.com/[your-username]/bb84-qkd</a:t>
+              <a:t>github.com/</a:t>
+            </a:r>
+            <a:r>
+              <a:rPr lang="en-US" sz="1800" b="1" dirty="0" err="1">
+                <a:solidFill>
+                  <a:schemeClr val="bg1"/>
+                </a:solidFill>
+              </a:rPr>
+              <a:t>srishtishewale</a:t>
+            </a:r>
+            <a:r>
+              <a:rPr lang="en-US" sz="1800" b="1" dirty="0">
+                <a:solidFill>
+                  <a:schemeClr val="bg1"/>
+                </a:solidFill>
+              </a:rPr>
+              <a:t>/bb84-qkd</a:t>
             </a:r>
             <a:endParaRPr lang="en-US" sz="1800" dirty="0"/>
           </a:p>
@@ -6264,7 +2562,7 @@
           <a:bodyPr wrap="square" lIns="0" tIns="0" rIns="0" bIns="0" rtlCol="0" anchor="t"/>
           <a:lstStyle/>
           <a:p>
-            <a:pPr algn="ctr" indent="0" marL="0">
+            <a:pPr marL="0" indent="0" algn="ctr">
               <a:buNone/>
             </a:pPr>
             <a:r>
@@ -6307,9 +2605,11 @@
       <p:sp>
         <p:nvSpPr>
           <p:cNvPr id="2" name="Text 0"/>
-          <p:cNvSpPr/>
+          <p:cNvSpPr>
+            <a:spLocks noGrp="1"/>
+          </p:cNvSpPr>
           <p:nvPr>
-            <p:ph idx="100" type="title" hasCustomPrompt="1"/>
+            <p:ph type="title" idx="100" hasCustomPrompt="1"/>
           </p:nvPr>
         </p:nvSpPr>
         <p:spPr>
@@ -6327,7 +2627,7 @@
           <a:bodyPr wrap="square" lIns="0" tIns="0" rIns="0" bIns="0" rtlCol="0" anchor="ctr"/>
           <a:lstStyle/>
           <a:p>
-            <a:pPr algn="l" indent="0" marL="0">
+            <a:pPr marL="0" indent="0" algn="l">
               <a:buNone/>
             </a:pPr>
             <a:r>
@@ -6363,7 +2663,7 @@
           </a:solidFill>
           <a:ln/>
           <a:effectLst>
-            <a:outerShdw sx="100000" sy="100000" kx="0" ky="0" algn="bl" rotWithShape="0" blurRad="101600" dist="25400" dir="5400000">
+            <a:outerShdw blurRad="101600" dist="25400" dir="5400000" algn="bl" rotWithShape="0">
               <a:srgbClr val="1B2A5C">
                 <a:alpha val="12000"/>
               </a:srgbClr>
@@ -6393,14 +2693,14 @@
       </p:sp>
       <p:pic>
         <p:nvPicPr>
-          <p:cNvPr id="5" name="Maths-based key exchange icon" descr="Maths-based key exchange">    </p:cNvPr>
+          <p:cNvPr id="5" name="Maths-based key exchange icon" descr="Maths-based key exchange"/>
           <p:cNvPicPr>
             <a:picLocks noChangeAspect="1"/>
           </p:cNvPicPr>
           <p:nvPr/>
         </p:nvPicPr>
         <p:blipFill>
-          <a:blip r:embed="rId1"/>
+          <a:blip r:embed="rId3"/>
           <a:stretch>
             <a:fillRect/>
           </a:stretch>
@@ -6436,7 +2736,7 @@
           <a:bodyPr wrap="square" lIns="0" tIns="0" rIns="0" bIns="0" rtlCol="0" anchor="ctr"/>
           <a:lstStyle/>
           <a:p>
-            <a:pPr indent="0" marL="0">
+            <a:pPr marL="0" indent="0">
               <a:buNone/>
             </a:pPr>
             <a:r>
@@ -6472,7 +2772,7 @@
           <a:bodyPr wrap="square" lIns="0" tIns="0" rIns="0" bIns="0" rtlCol="0" anchor="t"/>
           <a:lstStyle/>
           <a:p>
-            <a:pPr indent="0" marL="0">
+            <a:pPr marL="0" indent="0">
               <a:buNone/>
             </a:pPr>
             <a:r>
@@ -6508,7 +2808,7 @@
           </a:solidFill>
           <a:ln/>
           <a:effectLst>
-            <a:outerShdw sx="100000" sy="100000" kx="0" ky="0" algn="bl" rotWithShape="0" blurRad="101600" dist="25400" dir="5400000">
+            <a:outerShdw blurRad="101600" dist="25400" dir="5400000" algn="bl" rotWithShape="0">
               <a:srgbClr val="1B2A5C">
                 <a:alpha val="12000"/>
               </a:srgbClr>
@@ -6538,14 +2838,14 @@
       </p:sp>
       <p:pic>
         <p:nvPicPr>
-          <p:cNvPr id="10" name="Eavesdropping is invisible icon" descr="Eavesdropping is invisible">    </p:cNvPr>
+          <p:cNvPr id="10" name="Eavesdropping is invisible icon" descr="Eavesdropping is invisible"/>
           <p:cNvPicPr>
             <a:picLocks noChangeAspect="1"/>
           </p:cNvPicPr>
           <p:nvPr/>
         </p:nvPicPr>
         <p:blipFill>
-          <a:blip r:embed="rId2"/>
+          <a:blip r:embed="rId4"/>
           <a:stretch>
             <a:fillRect/>
           </a:stretch>
@@ -6581,7 +2881,7 @@
           <a:bodyPr wrap="square" lIns="0" tIns="0" rIns="0" bIns="0" rtlCol="0" anchor="ctr"/>
           <a:lstStyle/>
           <a:p>
-            <a:pPr indent="0" marL="0">
+            <a:pPr marL="0" indent="0">
               <a:buNone/>
             </a:pPr>
             <a:r>
@@ -6617,7 +2917,7 @@
           <a:bodyPr wrap="square" lIns="0" tIns="0" rIns="0" bIns="0" rtlCol="0" anchor="t"/>
           <a:lstStyle/>
           <a:p>
-            <a:pPr indent="0" marL="0">
+            <a:pPr marL="0" indent="0">
               <a:buNone/>
             </a:pPr>
             <a:r>
@@ -6675,7 +2975,7 @@
           <a:bodyPr wrap="square" lIns="0" tIns="0" rIns="0" bIns="0" rtlCol="0" anchor="ctr"/>
           <a:lstStyle/>
           <a:p>
-            <a:pPr indent="0" marL="0">
+            <a:pPr marL="0" indent="0">
               <a:buNone/>
             </a:pPr>
             <a:r>
@@ -6710,7 +3010,7 @@
           </a:prstGeom>
           <a:extLst>
             <a:ext uri="{C572A759-6A51-4108-AA02-DFA0A04FC94B}">
-              <ma14:wrappingTextBoxFlag xmlns:ma14="http://schemas.microsoft.com/office/mac/drawingml/2011/main" val="0"/>
+              <ma14:wrappingTextBoxFlag xmlns="" xmlns:ma14="http://schemas.microsoft.com/office/mac/drawingml/2011/main" val="0"/>
             </a:ext>
           </a:extLst>
         </p:spPr>
@@ -6728,7 +3028,7 @@
           <a:p>
             <a:pPr algn="r"/>
             <a:fld id="{F7021451-1387-4CA6-816F-3879F97B5CBC}" type="slidenum">
-              <a:rPr b="0" lang="en-US"/>
+              <a:rPr lang="en-US" b="0"/>
               <a:t>2</a:t>
             </a:fld>
             <a:endParaRPr lang="en-US"/>
@@ -6763,9 +3063,11 @@
       <p:sp>
         <p:nvSpPr>
           <p:cNvPr id="2" name="Text 0"/>
-          <p:cNvSpPr/>
+          <p:cNvSpPr>
+            <a:spLocks noGrp="1"/>
+          </p:cNvSpPr>
           <p:nvPr>
-            <p:ph idx="100" type="title" hasCustomPrompt="1"/>
+            <p:ph type="title" idx="100" hasCustomPrompt="1"/>
           </p:nvPr>
         </p:nvSpPr>
         <p:spPr>
@@ -6783,7 +3085,7 @@
           <a:bodyPr wrap="square" lIns="0" tIns="0" rIns="0" bIns="0" rtlCol="0" anchor="ctr"/>
           <a:lstStyle/>
           <a:p>
-            <a:pPr algn="l" indent="0" marL="0">
+            <a:pPr marL="0" indent="0" algn="l">
               <a:buNone/>
             </a:pPr>
             <a:r>
@@ -6820,239 +3122,7 @@
       </p:sp>
       <p:pic>
         <p:nvPicPr>
-          <p:cNvPr id="4" name="Superposition and bases icon" descr="Superposition and bases">    </p:cNvPr>
-          <p:cNvPicPr>
-            <a:picLocks noChangeAspect="1"/>
-          </p:cNvPicPr>
-          <p:nvPr/>
-        </p:nvPicPr>
-        <p:blipFill>
-          <a:blip r:embed="rId1"/>
-          <a:stretch>
-            <a:fillRect/>
-          </a:stretch>
-        </p:blipFill>
-        <p:spPr>
-          <a:xfrm>
-            <a:off x="754380" y="1988820"/>
-            <a:ext cx="411480" cy="411480"/>
-          </a:xfrm>
-          <a:prstGeom prst="rect">
-            <a:avLst/>
-          </a:prstGeom>
-        </p:spPr>
-      </p:pic>
-      <p:sp>
-        <p:nvSpPr>
-          <p:cNvPr id="5" name="Text 2"/>
-          <p:cNvSpPr txBox="1"/>
-          <p:nvPr/>
-        </p:nvSpPr>
-        <p:spPr>
-          <a:xfrm>
-            <a:off x="1645920" y="1554480"/>
-            <a:ext cx="5669280" cy="457200"/>
-          </a:xfrm>
-          <a:prstGeom prst="rect">
-            <a:avLst/>
-          </a:prstGeom>
-          <a:noFill/>
-          <a:ln/>
-        </p:spPr>
-        <p:txBody>
-          <a:bodyPr wrap="square" lIns="0" tIns="0" rIns="0" bIns="0" rtlCol="0" anchor="t"/>
-          <a:lstStyle/>
-          <a:p>
-            <a:pPr indent="0" marL="0">
-              <a:buNone/>
-            </a:pPr>
-            <a:r>
-              <a:rPr lang="en-US" sz="2000" b="1" dirty="0">
-                <a:solidFill>
-                  <a:schemeClr val="tx2"/>
-                </a:solidFill>
-              </a:rPr>
-              <a:t>Superposition and bases</a:t>
-            </a:r>
-            <a:endParaRPr lang="en-US" sz="2000" dirty="0"/>
-          </a:p>
-        </p:txBody>
-      </p:sp>
-      <p:sp>
-        <p:nvSpPr>
-          <p:cNvPr id="6" name="Text 3"/>
-          <p:cNvSpPr txBox="1"/>
-          <p:nvPr/>
-        </p:nvSpPr>
-        <p:spPr>
-          <a:xfrm>
-            <a:off x="1645920" y="2057400"/>
-            <a:ext cx="5669280" cy="868680"/>
-          </a:xfrm>
-          <a:prstGeom prst="rect">
-            <a:avLst/>
-          </a:prstGeom>
-          <a:noFill/>
-          <a:ln/>
-        </p:spPr>
-        <p:txBody>
-          <a:bodyPr wrap="square" lIns="0" tIns="0" rIns="0" bIns="0" rtlCol="0" anchor="t"/>
-          <a:lstStyle/>
-          <a:p>
-            <a:pPr indent="0" marL="0">
-              <a:buNone/>
-            </a:pPr>
-            <a:r>
-              <a:rPr lang="en-US" sz="1500" dirty="0">
-                <a:solidFill>
-                  <a:schemeClr val="tx1"/>
-                </a:solidFill>
-              </a:rPr>
-              <a:t>A qubit prepared in the X basis has no definite Z value. Measuring in the wrong basis gives a random result.</a:t>
-            </a:r>
-            <a:endParaRPr lang="en-US" sz="1500" dirty="0"/>
-          </a:p>
-        </p:txBody>
-      </p:sp>
-      <p:sp>
-        <p:nvSpPr>
-          <p:cNvPr id="7" name="Measurement disturbs the state circle"/>
-          <p:cNvSpPr/>
-          <p:nvPr/>
-        </p:nvSpPr>
-        <p:spPr>
-          <a:xfrm>
-            <a:off x="548640" y="3337560"/>
-            <a:ext cx="822960" cy="822960"/>
-          </a:xfrm>
-          <a:prstGeom prst="ellipse">
-            <a:avLst/>
-          </a:prstGeom>
-          <a:solidFill>
-            <a:schemeClr val="accent1"/>
-          </a:solidFill>
-          <a:ln/>
-        </p:spPr>
-      </p:sp>
-      <p:pic>
-        <p:nvPicPr>
-          <p:cNvPr id="8" name="Measurement disturbs the state icon" descr="Measurement disturbs the state">    </p:cNvPr>
-          <p:cNvPicPr>
-            <a:picLocks noChangeAspect="1"/>
-          </p:cNvPicPr>
-          <p:nvPr/>
-        </p:nvPicPr>
-        <p:blipFill>
-          <a:blip r:embed="rId2"/>
-          <a:stretch>
-            <a:fillRect/>
-          </a:stretch>
-        </p:blipFill>
-        <p:spPr>
-          <a:xfrm>
-            <a:off x="754380" y="3543300"/>
-            <a:ext cx="411480" cy="411480"/>
-          </a:xfrm>
-          <a:prstGeom prst="rect">
-            <a:avLst/>
-          </a:prstGeom>
-        </p:spPr>
-      </p:pic>
-      <p:sp>
-        <p:nvSpPr>
-          <p:cNvPr id="9" name="Text 5"/>
-          <p:cNvSpPr txBox="1"/>
-          <p:nvPr/>
-        </p:nvSpPr>
-        <p:spPr>
-          <a:xfrm>
-            <a:off x="1645920" y="3108960"/>
-            <a:ext cx="5669280" cy="457200"/>
-          </a:xfrm>
-          <a:prstGeom prst="rect">
-            <a:avLst/>
-          </a:prstGeom>
-          <a:noFill/>
-          <a:ln/>
-        </p:spPr>
-        <p:txBody>
-          <a:bodyPr wrap="square" lIns="0" tIns="0" rIns="0" bIns="0" rtlCol="0" anchor="t"/>
-          <a:lstStyle/>
-          <a:p>
-            <a:pPr indent="0" marL="0">
-              <a:buNone/>
-            </a:pPr>
-            <a:r>
-              <a:rPr lang="en-US" sz="2000" b="1" dirty="0">
-                <a:solidFill>
-                  <a:schemeClr val="tx2"/>
-                </a:solidFill>
-              </a:rPr>
-              <a:t>Measurement disturbs the state</a:t>
-            </a:r>
-            <a:endParaRPr lang="en-US" sz="2000" dirty="0"/>
-          </a:p>
-        </p:txBody>
-      </p:sp>
-      <p:sp>
-        <p:nvSpPr>
-          <p:cNvPr id="10" name="Text 6"/>
-          <p:cNvSpPr txBox="1"/>
-          <p:nvPr/>
-        </p:nvSpPr>
-        <p:spPr>
-          <a:xfrm>
-            <a:off x="1645920" y="3611880"/>
-            <a:ext cx="5669280" cy="868680"/>
-          </a:xfrm>
-          <a:prstGeom prst="rect">
-            <a:avLst/>
-          </a:prstGeom>
-          <a:noFill/>
-          <a:ln/>
-        </p:spPr>
-        <p:txBody>
-          <a:bodyPr wrap="square" lIns="0" tIns="0" rIns="0" bIns="0" rtlCol="0" anchor="t"/>
-          <a:lstStyle/>
-          <a:p>
-            <a:pPr indent="0" marL="0">
-              <a:buNone/>
-            </a:pPr>
-            <a:r>
-              <a:rPr lang="en-US" sz="1500" dirty="0">
-                <a:solidFill>
-                  <a:schemeClr val="tx1"/>
-                </a:solidFill>
-              </a:rPr>
-              <a:t>Measuring collapses the qubit. After a wrong-basis measurement the original information is lost.</a:t>
-            </a:r>
-            <a:endParaRPr lang="en-US" sz="1500" dirty="0"/>
-          </a:p>
-        </p:txBody>
-      </p:sp>
-      <p:sp>
-        <p:nvSpPr>
-          <p:cNvPr id="11" name="No-cloning theorem circle"/>
-          <p:cNvSpPr/>
-          <p:nvPr/>
-        </p:nvSpPr>
-        <p:spPr>
-          <a:xfrm>
-            <a:off x="548640" y="4892040"/>
-            <a:ext cx="822960" cy="822960"/>
-          </a:xfrm>
-          <a:prstGeom prst="ellipse">
-            <a:avLst/>
-          </a:prstGeom>
-          <a:solidFill>
-            <a:schemeClr val="accent1"/>
-          </a:solidFill>
-          <a:ln/>
-        </p:spPr>
-      </p:sp>
-      <p:pic>
-        <p:nvPicPr>
-          <p:cNvPr id="12" name="No-cloning theorem icon" descr="No-cloning theorem">    </p:cNvPr>
+          <p:cNvPr id="4" name="Superposition and bases icon" descr="Superposition and bases"/>
           <p:cNvPicPr>
             <a:picLocks noChangeAspect="1"/>
           </p:cNvPicPr>
@@ -7066,6 +3136,238 @@
         </p:blipFill>
         <p:spPr>
           <a:xfrm>
+            <a:off x="754380" y="1988820"/>
+            <a:ext cx="411480" cy="411480"/>
+          </a:xfrm>
+          <a:prstGeom prst="rect">
+            <a:avLst/>
+          </a:prstGeom>
+        </p:spPr>
+      </p:pic>
+      <p:sp>
+        <p:nvSpPr>
+          <p:cNvPr id="5" name="Text 2"/>
+          <p:cNvSpPr txBox="1"/>
+          <p:nvPr/>
+        </p:nvSpPr>
+        <p:spPr>
+          <a:xfrm>
+            <a:off x="1645920" y="1554480"/>
+            <a:ext cx="5669280" cy="457200"/>
+          </a:xfrm>
+          <a:prstGeom prst="rect">
+            <a:avLst/>
+          </a:prstGeom>
+          <a:noFill/>
+          <a:ln/>
+        </p:spPr>
+        <p:txBody>
+          <a:bodyPr wrap="square" lIns="0" tIns="0" rIns="0" bIns="0" rtlCol="0" anchor="t"/>
+          <a:lstStyle/>
+          <a:p>
+            <a:pPr marL="0" indent="0">
+              <a:buNone/>
+            </a:pPr>
+            <a:r>
+              <a:rPr lang="en-US" sz="2000" b="1" dirty="0">
+                <a:solidFill>
+                  <a:schemeClr val="tx2"/>
+                </a:solidFill>
+              </a:rPr>
+              <a:t>Superposition and bases</a:t>
+            </a:r>
+            <a:endParaRPr lang="en-US" sz="2000" dirty="0"/>
+          </a:p>
+        </p:txBody>
+      </p:sp>
+      <p:sp>
+        <p:nvSpPr>
+          <p:cNvPr id="6" name="Text 3"/>
+          <p:cNvSpPr txBox="1"/>
+          <p:nvPr/>
+        </p:nvSpPr>
+        <p:spPr>
+          <a:xfrm>
+            <a:off x="1645920" y="2057400"/>
+            <a:ext cx="5669280" cy="868680"/>
+          </a:xfrm>
+          <a:prstGeom prst="rect">
+            <a:avLst/>
+          </a:prstGeom>
+          <a:noFill/>
+          <a:ln/>
+        </p:spPr>
+        <p:txBody>
+          <a:bodyPr wrap="square" lIns="0" tIns="0" rIns="0" bIns="0" rtlCol="0" anchor="t"/>
+          <a:lstStyle/>
+          <a:p>
+            <a:pPr marL="0" indent="0">
+              <a:buNone/>
+            </a:pPr>
+            <a:r>
+              <a:rPr lang="en-US" sz="1500" dirty="0">
+                <a:solidFill>
+                  <a:schemeClr val="tx1"/>
+                </a:solidFill>
+              </a:rPr>
+              <a:t>A qubit prepared in the X basis has no definite Z value. Measuring in the wrong basis gives a random result.</a:t>
+            </a:r>
+            <a:endParaRPr lang="en-US" sz="1500" dirty="0"/>
+          </a:p>
+        </p:txBody>
+      </p:sp>
+      <p:sp>
+        <p:nvSpPr>
+          <p:cNvPr id="7" name="Measurement disturbs the state circle"/>
+          <p:cNvSpPr/>
+          <p:nvPr/>
+        </p:nvSpPr>
+        <p:spPr>
+          <a:xfrm>
+            <a:off x="548640" y="3337560"/>
+            <a:ext cx="822960" cy="822960"/>
+          </a:xfrm>
+          <a:prstGeom prst="ellipse">
+            <a:avLst/>
+          </a:prstGeom>
+          <a:solidFill>
+            <a:schemeClr val="accent1"/>
+          </a:solidFill>
+          <a:ln/>
+        </p:spPr>
+      </p:sp>
+      <p:pic>
+        <p:nvPicPr>
+          <p:cNvPr id="8" name="Measurement disturbs the state icon" descr="Measurement disturbs the state"/>
+          <p:cNvPicPr>
+            <a:picLocks noChangeAspect="1"/>
+          </p:cNvPicPr>
+          <p:nvPr/>
+        </p:nvPicPr>
+        <p:blipFill>
+          <a:blip r:embed="rId4"/>
+          <a:stretch>
+            <a:fillRect/>
+          </a:stretch>
+        </p:blipFill>
+        <p:spPr>
+          <a:xfrm>
+            <a:off x="754380" y="3543300"/>
+            <a:ext cx="411480" cy="411480"/>
+          </a:xfrm>
+          <a:prstGeom prst="rect">
+            <a:avLst/>
+          </a:prstGeom>
+        </p:spPr>
+      </p:pic>
+      <p:sp>
+        <p:nvSpPr>
+          <p:cNvPr id="9" name="Text 5"/>
+          <p:cNvSpPr txBox="1"/>
+          <p:nvPr/>
+        </p:nvSpPr>
+        <p:spPr>
+          <a:xfrm>
+            <a:off x="1645920" y="3108960"/>
+            <a:ext cx="5669280" cy="457200"/>
+          </a:xfrm>
+          <a:prstGeom prst="rect">
+            <a:avLst/>
+          </a:prstGeom>
+          <a:noFill/>
+          <a:ln/>
+        </p:spPr>
+        <p:txBody>
+          <a:bodyPr wrap="square" lIns="0" tIns="0" rIns="0" bIns="0" rtlCol="0" anchor="t"/>
+          <a:lstStyle/>
+          <a:p>
+            <a:pPr marL="0" indent="0">
+              <a:buNone/>
+            </a:pPr>
+            <a:r>
+              <a:rPr lang="en-US" sz="2000" b="1" dirty="0">
+                <a:solidFill>
+                  <a:schemeClr val="tx2"/>
+                </a:solidFill>
+              </a:rPr>
+              <a:t>Measurement disturbs the state</a:t>
+            </a:r>
+            <a:endParaRPr lang="en-US" sz="2000" dirty="0"/>
+          </a:p>
+        </p:txBody>
+      </p:sp>
+      <p:sp>
+        <p:nvSpPr>
+          <p:cNvPr id="10" name="Text 6"/>
+          <p:cNvSpPr txBox="1"/>
+          <p:nvPr/>
+        </p:nvSpPr>
+        <p:spPr>
+          <a:xfrm>
+            <a:off x="1645920" y="3611880"/>
+            <a:ext cx="5669280" cy="868680"/>
+          </a:xfrm>
+          <a:prstGeom prst="rect">
+            <a:avLst/>
+          </a:prstGeom>
+          <a:noFill/>
+          <a:ln/>
+        </p:spPr>
+        <p:txBody>
+          <a:bodyPr wrap="square" lIns="0" tIns="0" rIns="0" bIns="0" rtlCol="0" anchor="t"/>
+          <a:lstStyle/>
+          <a:p>
+            <a:pPr marL="0" indent="0">
+              <a:buNone/>
+            </a:pPr>
+            <a:r>
+              <a:rPr lang="en-US" sz="1500" dirty="0">
+                <a:solidFill>
+                  <a:schemeClr val="tx1"/>
+                </a:solidFill>
+              </a:rPr>
+              <a:t>Measuring collapses the qubit. After a wrong-basis measurement the original information is lost.</a:t>
+            </a:r>
+            <a:endParaRPr lang="en-US" sz="1500" dirty="0"/>
+          </a:p>
+        </p:txBody>
+      </p:sp>
+      <p:sp>
+        <p:nvSpPr>
+          <p:cNvPr id="11" name="No-cloning theorem circle"/>
+          <p:cNvSpPr/>
+          <p:nvPr/>
+        </p:nvSpPr>
+        <p:spPr>
+          <a:xfrm>
+            <a:off x="548640" y="4892040"/>
+            <a:ext cx="822960" cy="822960"/>
+          </a:xfrm>
+          <a:prstGeom prst="ellipse">
+            <a:avLst/>
+          </a:prstGeom>
+          <a:solidFill>
+            <a:schemeClr val="accent1"/>
+          </a:solidFill>
+          <a:ln/>
+        </p:spPr>
+      </p:sp>
+      <p:pic>
+        <p:nvPicPr>
+          <p:cNvPr id="12" name="No-cloning theorem icon" descr="No-cloning theorem"/>
+          <p:cNvPicPr>
+            <a:picLocks noChangeAspect="1"/>
+          </p:cNvPicPr>
+          <p:nvPr/>
+        </p:nvPicPr>
+        <p:blipFill>
+          <a:blip r:embed="rId5"/>
+          <a:stretch>
+            <a:fillRect/>
+          </a:stretch>
+        </p:blipFill>
+        <p:spPr>
+          <a:xfrm>
             <a:off x="754380" y="5097780"/>
             <a:ext cx="411480" cy="411480"/>
           </a:xfrm>
@@ -7095,7 +3397,7 @@
           <a:bodyPr wrap="square" lIns="0" tIns="0" rIns="0" bIns="0" rtlCol="0" anchor="t"/>
           <a:lstStyle/>
           <a:p>
-            <a:pPr indent="0" marL="0">
+            <a:pPr marL="0" indent="0">
               <a:buNone/>
             </a:pPr>
             <a:r>
@@ -7131,7 +3433,7 @@
           <a:bodyPr wrap="square" lIns="0" tIns="0" rIns="0" bIns="0" rtlCol="0" anchor="t"/>
           <a:lstStyle/>
           <a:p>
-            <a:pPr indent="0" marL="0">
+            <a:pPr marL="0" indent="0">
               <a:buNone/>
             </a:pPr>
             <a:r>
@@ -7167,7 +3469,7 @@
           </a:solidFill>
           <a:ln/>
           <a:effectLst>
-            <a:outerShdw sx="100000" sy="100000" kx="0" ky="0" algn="bl" rotWithShape="0" blurRad="101600" dist="25400" dir="5400000">
+            <a:outerShdw blurRad="101600" dist="25400" dir="5400000" algn="bl" rotWithShape="0">
               <a:srgbClr val="1B2A5C">
                 <a:alpha val="12000"/>
               </a:srgbClr>
@@ -7196,7 +3498,7 @@
           <a:bodyPr wrap="square" lIns="0" tIns="0" rIns="0" bIns="0" rtlCol="0" anchor="t"/>
           <a:lstStyle/>
           <a:p>
-            <a:pPr indent="0" marL="0">
+            <a:pPr marL="0" indent="0">
               <a:buNone/>
             </a:pPr>
             <a:r>
@@ -7232,7 +3534,7 @@
           <a:bodyPr wrap="square" lIns="0" tIns="0" rIns="0" bIns="0" rtlCol="0" anchor="t"/>
           <a:lstStyle/>
           <a:p>
-            <a:pPr indent="0" marL="0">
+            <a:pPr marL="0" indent="0">
               <a:buNone/>
             </a:pPr>
             <a:r>
@@ -7268,7 +3570,7 @@
           <a:bodyPr wrap="square" lIns="0" tIns="0" rIns="0" bIns="0" rtlCol="0" anchor="t"/>
           <a:lstStyle/>
           <a:p>
-            <a:pPr indent="0" marL="0">
+            <a:pPr marL="0" indent="0">
               <a:buNone/>
             </a:pPr>
             <a:r>
@@ -7304,7 +3606,7 @@
           <a:bodyPr wrap="square" lIns="0" tIns="0" rIns="0" bIns="0" rtlCol="0" anchor="t"/>
           <a:lstStyle/>
           <a:p>
-            <a:pPr indent="0" marL="0">
+            <a:pPr marL="0" indent="0">
               <a:buNone/>
             </a:pPr>
             <a:r>
@@ -7340,7 +3642,7 @@
           <a:bodyPr wrap="square" lIns="0" tIns="0" rIns="0" bIns="0" rtlCol="0" anchor="t"/>
           <a:lstStyle/>
           <a:p>
-            <a:pPr indent="0" marL="0">
+            <a:pPr marL="0" indent="0">
               <a:buNone/>
             </a:pPr>
             <a:r>
@@ -7375,7 +3677,7 @@
           </a:prstGeom>
           <a:extLst>
             <a:ext uri="{C572A759-6A51-4108-AA02-DFA0A04FC94B}">
-              <ma14:wrappingTextBoxFlag xmlns:ma14="http://schemas.microsoft.com/office/mac/drawingml/2011/main" val="0"/>
+              <ma14:wrappingTextBoxFlag xmlns="" xmlns:ma14="http://schemas.microsoft.com/office/mac/drawingml/2011/main" val="0"/>
             </a:ext>
           </a:extLst>
         </p:spPr>
@@ -7393,7 +3695,7 @@
           <a:p>
             <a:pPr algn="r"/>
             <a:fld id="{F7021451-1387-4CA6-816F-3879F97B5CBC}" type="slidenum">
-              <a:rPr b="0" lang="en-US"/>
+              <a:rPr lang="en-US" b="0"/>
               <a:t>3</a:t>
             </a:fld>
             <a:endParaRPr lang="en-US"/>
@@ -7428,9 +3730,11 @@
       <p:sp>
         <p:nvSpPr>
           <p:cNvPr id="2" name="Text 0"/>
-          <p:cNvSpPr/>
+          <p:cNvSpPr>
+            <a:spLocks noGrp="1"/>
+          </p:cNvSpPr>
           <p:nvPr>
-            <p:ph idx="100" type="title" hasCustomPrompt="1"/>
+            <p:ph type="title" idx="100" hasCustomPrompt="1"/>
           </p:nvPr>
         </p:nvSpPr>
         <p:spPr>
@@ -7448,7 +3752,7 @@
           <a:bodyPr wrap="square" lIns="0" tIns="0" rIns="0" bIns="0" rtlCol="0" anchor="ctr"/>
           <a:lstStyle/>
           <a:p>
-            <a:pPr algn="l" indent="0" marL="0">
+            <a:pPr marL="0" indent="0" algn="l">
               <a:buNone/>
             </a:pPr>
             <a:r>
@@ -7484,7 +3788,7 @@
           </a:solidFill>
           <a:ln/>
           <a:effectLst>
-            <a:outerShdw sx="100000" sy="100000" kx="0" ky="0" algn="bl" rotWithShape="0" blurRad="101600" dist="25400" dir="5400000">
+            <a:outerShdw blurRad="101600" dist="25400" dir="5400000" algn="bl" rotWithShape="0">
               <a:srgbClr val="1B2A5C">
                 <a:alpha val="12000"/>
               </a:srgbClr>
@@ -7515,7 +3819,7 @@
           <a:bodyPr wrap="square" lIns="0" tIns="0" rIns="0" bIns="0" rtlCol="0" anchor="ctr"/>
           <a:lstStyle/>
           <a:p>
-            <a:pPr algn="ctr" indent="0" marL="0">
+            <a:pPr marL="0" indent="0" algn="ctr">
               <a:buNone/>
             </a:pPr>
             <a:r>
@@ -7551,7 +3855,7 @@
           <a:bodyPr wrap="square" lIns="0" tIns="0" rIns="0" bIns="0" rtlCol="0" anchor="t"/>
           <a:lstStyle/>
           <a:p>
-            <a:pPr indent="0" marL="0">
+            <a:pPr marL="0" indent="0">
               <a:buNone/>
             </a:pPr>
             <a:r>
@@ -7587,7 +3891,7 @@
           <a:bodyPr wrap="square" lIns="0" tIns="0" rIns="0" bIns="0" rtlCol="0" anchor="t"/>
           <a:lstStyle/>
           <a:p>
-            <a:pPr indent="0" marL="0">
+            <a:pPr marL="0" indent="0">
               <a:buNone/>
             </a:pPr>
             <a:r>
@@ -7623,7 +3927,7 @@
           </a:solidFill>
           <a:ln/>
           <a:effectLst>
-            <a:outerShdw sx="100000" sy="100000" kx="0" ky="0" algn="bl" rotWithShape="0" blurRad="101600" dist="25400" dir="5400000">
+            <a:outerShdw blurRad="101600" dist="25400" dir="5400000" algn="bl" rotWithShape="0">
               <a:srgbClr val="1B2A5C">
                 <a:alpha val="12000"/>
               </a:srgbClr>
@@ -7654,7 +3958,7 @@
           <a:bodyPr wrap="square" lIns="0" tIns="0" rIns="0" bIns="0" rtlCol="0" anchor="ctr"/>
           <a:lstStyle/>
           <a:p>
-            <a:pPr algn="ctr" indent="0" marL="0">
+            <a:pPr marL="0" indent="0" algn="ctr">
               <a:buNone/>
             </a:pPr>
             <a:r>
@@ -7690,7 +3994,7 @@
           <a:bodyPr wrap="square" lIns="0" tIns="0" rIns="0" bIns="0" rtlCol="0" anchor="t"/>
           <a:lstStyle/>
           <a:p>
-            <a:pPr indent="0" marL="0">
+            <a:pPr marL="0" indent="0">
               <a:buNone/>
             </a:pPr>
             <a:r>
@@ -7726,7 +4030,7 @@
           <a:bodyPr wrap="square" lIns="0" tIns="0" rIns="0" bIns="0" rtlCol="0" anchor="t"/>
           <a:lstStyle/>
           <a:p>
-            <a:pPr indent="0" marL="0">
+            <a:pPr marL="0" indent="0">
               <a:buNone/>
             </a:pPr>
             <a:r>
@@ -7762,7 +4066,7 @@
           </a:solidFill>
           <a:ln/>
           <a:effectLst>
-            <a:outerShdw sx="100000" sy="100000" kx="0" ky="0" algn="bl" rotWithShape="0" blurRad="101600" dist="25400" dir="5400000">
+            <a:outerShdw blurRad="101600" dist="25400" dir="5400000" algn="bl" rotWithShape="0">
               <a:srgbClr val="1B2A5C">
                 <a:alpha val="12000"/>
               </a:srgbClr>
@@ -7793,7 +4097,7 @@
           <a:bodyPr wrap="square" lIns="0" tIns="0" rIns="0" bIns="0" rtlCol="0" anchor="ctr"/>
           <a:lstStyle/>
           <a:p>
-            <a:pPr algn="ctr" indent="0" marL="0">
+            <a:pPr marL="0" indent="0" algn="ctr">
               <a:buNone/>
             </a:pPr>
             <a:r>
@@ -7829,7 +4133,7 @@
           <a:bodyPr wrap="square" lIns="0" tIns="0" rIns="0" bIns="0" rtlCol="0" anchor="t"/>
           <a:lstStyle/>
           <a:p>
-            <a:pPr indent="0" marL="0">
+            <a:pPr marL="0" indent="0">
               <a:buNone/>
             </a:pPr>
             <a:r>
@@ -7865,7 +4169,7 @@
           <a:bodyPr wrap="square" lIns="0" tIns="0" rIns="0" bIns="0" rtlCol="0" anchor="t"/>
           <a:lstStyle/>
           <a:p>
-            <a:pPr indent="0" marL="0">
+            <a:pPr marL="0" indent="0">
               <a:buNone/>
             </a:pPr>
             <a:r>
@@ -7901,7 +4205,7 @@
           </a:solidFill>
           <a:ln/>
           <a:effectLst>
-            <a:outerShdw sx="100000" sy="100000" kx="0" ky="0" algn="bl" rotWithShape="0" blurRad="101600" dist="25400" dir="5400000">
+            <a:outerShdw blurRad="101600" dist="25400" dir="5400000" algn="bl" rotWithShape="0">
               <a:srgbClr val="1B2A5C">
                 <a:alpha val="12000"/>
               </a:srgbClr>
@@ -7932,7 +4236,7 @@
           <a:bodyPr wrap="square" lIns="0" tIns="0" rIns="0" bIns="0" rtlCol="0" anchor="ctr"/>
           <a:lstStyle/>
           <a:p>
-            <a:pPr algn="ctr" indent="0" marL="0">
+            <a:pPr marL="0" indent="0" algn="ctr">
               <a:buNone/>
             </a:pPr>
             <a:r>
@@ -7968,7 +4272,7 @@
           <a:bodyPr wrap="square" lIns="0" tIns="0" rIns="0" bIns="0" rtlCol="0" anchor="t"/>
           <a:lstStyle/>
           <a:p>
-            <a:pPr indent="0" marL="0">
+            <a:pPr marL="0" indent="0">
               <a:buNone/>
             </a:pPr>
             <a:r>
@@ -8004,7 +4308,7 @@
           <a:bodyPr wrap="square" lIns="0" tIns="0" rIns="0" bIns="0" rtlCol="0" anchor="t"/>
           <a:lstStyle/>
           <a:p>
-            <a:pPr indent="0" marL="0">
+            <a:pPr marL="0" indent="0">
               <a:buNone/>
             </a:pPr>
             <a:r>
@@ -8040,7 +4344,7 @@
           </a:solidFill>
           <a:ln/>
           <a:effectLst>
-            <a:outerShdw sx="100000" sy="100000" kx="0" ky="0" algn="bl" rotWithShape="0" blurRad="101600" dist="25400" dir="5400000">
+            <a:outerShdw blurRad="101600" dist="25400" dir="5400000" algn="bl" rotWithShape="0">
               <a:srgbClr val="1B2A5C">
                 <a:alpha val="12000"/>
               </a:srgbClr>
@@ -8071,7 +4375,7 @@
           <a:bodyPr wrap="square" lIns="0" tIns="0" rIns="0" bIns="0" rtlCol="0" anchor="ctr"/>
           <a:lstStyle/>
           <a:p>
-            <a:pPr algn="ctr" indent="0" marL="0">
+            <a:pPr marL="0" indent="0" algn="ctr">
               <a:buNone/>
             </a:pPr>
             <a:r>
@@ -8107,7 +4411,7 @@
           <a:bodyPr wrap="square" lIns="0" tIns="0" rIns="0" bIns="0" rtlCol="0" anchor="t"/>
           <a:lstStyle/>
           <a:p>
-            <a:pPr indent="0" marL="0">
+            <a:pPr marL="0" indent="0">
               <a:buNone/>
             </a:pPr>
             <a:r>
@@ -8143,7 +4447,7 @@
           <a:bodyPr wrap="square" lIns="0" tIns="0" rIns="0" bIns="0" rtlCol="0" anchor="t"/>
           <a:lstStyle/>
           <a:p>
-            <a:pPr indent="0" marL="0">
+            <a:pPr marL="0" indent="0">
               <a:buNone/>
             </a:pPr>
             <a:r>
@@ -8179,7 +4483,7 @@
           </a:solidFill>
           <a:ln/>
           <a:effectLst>
-            <a:outerShdw sx="100000" sy="100000" kx="0" ky="0" algn="bl" rotWithShape="0" blurRad="101600" dist="25400" dir="5400000">
+            <a:outerShdw blurRad="101600" dist="25400" dir="5400000" algn="bl" rotWithShape="0">
               <a:srgbClr val="1B2A5C">
                 <a:alpha val="12000"/>
               </a:srgbClr>
@@ -8208,7 +4512,7 @@
           <a:bodyPr wrap="square" lIns="0" tIns="0" rIns="0" bIns="0" rtlCol="0" anchor="ctr"/>
           <a:lstStyle/>
           <a:p>
-            <a:pPr indent="0" marL="0">
+            <a:pPr marL="0" indent="0">
               <a:buNone/>
             </a:pPr>
             <a:r>
@@ -8243,7 +4547,7 @@
           </a:prstGeom>
           <a:extLst>
             <a:ext uri="{C572A759-6A51-4108-AA02-DFA0A04FC94B}">
-              <ma14:wrappingTextBoxFlag xmlns:ma14="http://schemas.microsoft.com/office/mac/drawingml/2011/main" val="0"/>
+              <ma14:wrappingTextBoxFlag xmlns="" xmlns:ma14="http://schemas.microsoft.com/office/mac/drawingml/2011/main" val="0"/>
             </a:ext>
           </a:extLst>
         </p:spPr>
@@ -8261,7 +4565,7 @@
           <a:p>
             <a:pPr algn="r"/>
             <a:fld id="{F7021451-1387-4CA6-816F-3879F97B5CBC}" type="slidenum">
-              <a:rPr b="0" lang="en-US"/>
+              <a:rPr lang="en-US" b="0"/>
               <a:t>4</a:t>
             </a:fld>
             <a:endParaRPr lang="en-US"/>
@@ -8296,9 +4600,11 @@
       <p:sp>
         <p:nvSpPr>
           <p:cNvPr id="2" name="Text 0"/>
-          <p:cNvSpPr/>
+          <p:cNvSpPr>
+            <a:spLocks noGrp="1"/>
+          </p:cNvSpPr>
           <p:nvPr>
-            <p:ph idx="100" type="title" hasCustomPrompt="1"/>
+            <p:ph type="title" idx="100" hasCustomPrompt="1"/>
           </p:nvPr>
         </p:nvSpPr>
         <p:spPr>
@@ -8316,7 +4622,7 @@
           <a:bodyPr wrap="square" lIns="0" tIns="0" rIns="0" bIns="0" rtlCol="0" anchor="ctr"/>
           <a:lstStyle/>
           <a:p>
-            <a:pPr algn="l" indent="0" marL="0">
+            <a:pPr marL="0" indent="0" algn="l">
               <a:buNone/>
             </a:pPr>
             <a:r>
@@ -8354,15 +4660,69 @@
             <a:tbl>
               <a:tblPr/>
               <a:tblGrid>
-                <a:gridCol w="2286000"/>
-                <a:gridCol w="1097280"/>
-                <a:gridCol w="1097280"/>
-                <a:gridCol w="1097280"/>
-                <a:gridCol w="1097280"/>
-                <a:gridCol w="1097280"/>
-                <a:gridCol w="1097280"/>
-                <a:gridCol w="1097280"/>
-                <a:gridCol w="1097280"/>
+                <a:gridCol w="2286000">
+                  <a:extLst>
+                    <a:ext uri="{9D8B030D-6E8A-4147-A177-3AD203B41FA5}">
+                      <a16:colId xmlns:a16="http://schemas.microsoft.com/office/drawing/2014/main" val="20000"/>
+                    </a:ext>
+                  </a:extLst>
+                </a:gridCol>
+                <a:gridCol w="1097280">
+                  <a:extLst>
+                    <a:ext uri="{9D8B030D-6E8A-4147-A177-3AD203B41FA5}">
+                      <a16:colId xmlns:a16="http://schemas.microsoft.com/office/drawing/2014/main" val="20001"/>
+                    </a:ext>
+                  </a:extLst>
+                </a:gridCol>
+                <a:gridCol w="1097280">
+                  <a:extLst>
+                    <a:ext uri="{9D8B030D-6E8A-4147-A177-3AD203B41FA5}">
+                      <a16:colId xmlns:a16="http://schemas.microsoft.com/office/drawing/2014/main" val="20002"/>
+                    </a:ext>
+                  </a:extLst>
+                </a:gridCol>
+                <a:gridCol w="1097280">
+                  <a:extLst>
+                    <a:ext uri="{9D8B030D-6E8A-4147-A177-3AD203B41FA5}">
+                      <a16:colId xmlns:a16="http://schemas.microsoft.com/office/drawing/2014/main" val="20003"/>
+                    </a:ext>
+                  </a:extLst>
+                </a:gridCol>
+                <a:gridCol w="1097280">
+                  <a:extLst>
+                    <a:ext uri="{9D8B030D-6E8A-4147-A177-3AD203B41FA5}">
+                      <a16:colId xmlns:a16="http://schemas.microsoft.com/office/drawing/2014/main" val="20004"/>
+                    </a:ext>
+                  </a:extLst>
+                </a:gridCol>
+                <a:gridCol w="1097280">
+                  <a:extLst>
+                    <a:ext uri="{9D8B030D-6E8A-4147-A177-3AD203B41FA5}">
+                      <a16:colId xmlns:a16="http://schemas.microsoft.com/office/drawing/2014/main" val="20005"/>
+                    </a:ext>
+                  </a:extLst>
+                </a:gridCol>
+                <a:gridCol w="1097280">
+                  <a:extLst>
+                    <a:ext uri="{9D8B030D-6E8A-4147-A177-3AD203B41FA5}">
+                      <a16:colId xmlns:a16="http://schemas.microsoft.com/office/drawing/2014/main" val="20006"/>
+                    </a:ext>
+                  </a:extLst>
+                </a:gridCol>
+                <a:gridCol w="1097280">
+                  <a:extLst>
+                    <a:ext uri="{9D8B030D-6E8A-4147-A177-3AD203B41FA5}">
+                      <a16:colId xmlns:a16="http://schemas.microsoft.com/office/drawing/2014/main" val="20007"/>
+                    </a:ext>
+                  </a:extLst>
+                </a:gridCol>
+                <a:gridCol w="1097280">
+                  <a:extLst>
+                    <a:ext uri="{9D8B030D-6E8A-4147-A177-3AD203B41FA5}">
+                      <a16:colId xmlns:a16="http://schemas.microsoft.com/office/drawing/2014/main" val="20008"/>
+                    </a:ext>
+                  </a:extLst>
+                </a:gridCol>
               </a:tblGrid>
               <a:tr h="548640">
                 <a:tc>
@@ -8370,7 +4730,7 @@
                     <a:bodyPr/>
                     <a:lstStyle/>
                     <a:p>
-                      <a:pPr algn="l" indent="0" marL="0">
+                      <a:pPr marL="0" indent="0" algn="l">
                         <a:buNone/>
                       </a:pPr>
                       <a:r>
@@ -8384,7 +4744,7 @@
                       <a:endParaRPr lang="en-US" sz="1600" dirty="0"/>
                     </a:p>
                   </a:txBody>
-                  <a:tcPr marL="91440" marR="91440" marT="45720" marB="45720" anchor="ctr">
+                  <a:tcPr anchor="ctr">
                     <a:lnL w="12700" cap="flat" cmpd="sng" algn="ctr">
                       <a:solidFill>
                         <a:srgbClr val="D5DBEA"/>
@@ -8431,7 +4791,7 @@
                     <a:bodyPr/>
                     <a:lstStyle/>
                     <a:p>
-                      <a:pPr algn="ctr" indent="0" marL="0">
+                      <a:pPr marL="0" indent="0" algn="ctr">
                         <a:buNone/>
                       </a:pPr>
                       <a:r>
@@ -8445,7 +4805,7 @@
                       <a:endParaRPr lang="en-US" sz="1600" dirty="0"/>
                     </a:p>
                   </a:txBody>
-                  <a:tcPr marL="91440" marR="91440" marT="45720" marB="45720" anchor="ctr">
+                  <a:tcPr anchor="ctr">
                     <a:lnL w="12700" cap="flat" cmpd="sng" algn="ctr">
                       <a:solidFill>
                         <a:srgbClr val="D5DBEA"/>
@@ -8492,7 +4852,7 @@
                     <a:bodyPr/>
                     <a:lstStyle/>
                     <a:p>
-                      <a:pPr algn="ctr" indent="0" marL="0">
+                      <a:pPr marL="0" indent="0" algn="ctr">
                         <a:buNone/>
                       </a:pPr>
                       <a:r>
@@ -8506,7 +4866,7 @@
                       <a:endParaRPr lang="en-US" sz="1600" dirty="0"/>
                     </a:p>
                   </a:txBody>
-                  <a:tcPr marL="91440" marR="91440" marT="45720" marB="45720" anchor="ctr">
+                  <a:tcPr anchor="ctr">
                     <a:lnL w="12700" cap="flat" cmpd="sng" algn="ctr">
                       <a:solidFill>
                         <a:srgbClr val="D5DBEA"/>
@@ -8553,7 +4913,7 @@
                     <a:bodyPr/>
                     <a:lstStyle/>
                     <a:p>
-                      <a:pPr algn="ctr" indent="0" marL="0">
+                      <a:pPr marL="0" indent="0" algn="ctr">
                         <a:buNone/>
                       </a:pPr>
                       <a:r>
@@ -8567,7 +4927,7 @@
                       <a:endParaRPr lang="en-US" sz="1600" dirty="0"/>
                     </a:p>
                   </a:txBody>
-                  <a:tcPr marL="91440" marR="91440" marT="45720" marB="45720" anchor="ctr">
+                  <a:tcPr anchor="ctr">
                     <a:lnL w="12700" cap="flat" cmpd="sng" algn="ctr">
                       <a:solidFill>
                         <a:srgbClr val="D5DBEA"/>
@@ -8614,7 +4974,7 @@
                     <a:bodyPr/>
                     <a:lstStyle/>
                     <a:p>
-                      <a:pPr algn="ctr" indent="0" marL="0">
+                      <a:pPr marL="0" indent="0" algn="ctr">
                         <a:buNone/>
                       </a:pPr>
                       <a:r>
@@ -8628,7 +4988,7 @@
                       <a:endParaRPr lang="en-US" sz="1600" dirty="0"/>
                     </a:p>
                   </a:txBody>
-                  <a:tcPr marL="91440" marR="91440" marT="45720" marB="45720" anchor="ctr">
+                  <a:tcPr anchor="ctr">
                     <a:lnL w="12700" cap="flat" cmpd="sng" algn="ctr">
                       <a:solidFill>
                         <a:srgbClr val="D5DBEA"/>
@@ -8675,7 +5035,7 @@
                     <a:bodyPr/>
                     <a:lstStyle/>
                     <a:p>
-                      <a:pPr algn="ctr" indent="0" marL="0">
+                      <a:pPr marL="0" indent="0" algn="ctr">
                         <a:buNone/>
                       </a:pPr>
                       <a:r>
@@ -8689,7 +5049,7 @@
                       <a:endParaRPr lang="en-US" sz="1600" dirty="0"/>
                     </a:p>
                   </a:txBody>
-                  <a:tcPr marL="91440" marR="91440" marT="45720" marB="45720" anchor="ctr">
+                  <a:tcPr anchor="ctr">
                     <a:lnL w="12700" cap="flat" cmpd="sng" algn="ctr">
                       <a:solidFill>
                         <a:srgbClr val="D5DBEA"/>
@@ -8736,7 +5096,7 @@
                     <a:bodyPr/>
                     <a:lstStyle/>
                     <a:p>
-                      <a:pPr algn="ctr" indent="0" marL="0">
+                      <a:pPr marL="0" indent="0" algn="ctr">
                         <a:buNone/>
                       </a:pPr>
                       <a:r>
@@ -8750,7 +5110,7 @@
                       <a:endParaRPr lang="en-US" sz="1600" dirty="0"/>
                     </a:p>
                   </a:txBody>
-                  <a:tcPr marL="91440" marR="91440" marT="45720" marB="45720" anchor="ctr">
+                  <a:tcPr anchor="ctr">
                     <a:lnL w="12700" cap="flat" cmpd="sng" algn="ctr">
                       <a:solidFill>
                         <a:srgbClr val="D5DBEA"/>
@@ -8797,7 +5157,7 @@
                     <a:bodyPr/>
                     <a:lstStyle/>
                     <a:p>
-                      <a:pPr algn="ctr" indent="0" marL="0">
+                      <a:pPr marL="0" indent="0" algn="ctr">
                         <a:buNone/>
                       </a:pPr>
                       <a:r>
@@ -8811,7 +5171,7 @@
                       <a:endParaRPr lang="en-US" sz="1600" dirty="0"/>
                     </a:p>
                   </a:txBody>
-                  <a:tcPr marL="91440" marR="91440" marT="45720" marB="45720" anchor="ctr">
+                  <a:tcPr anchor="ctr">
                     <a:lnL w="12700" cap="flat" cmpd="sng" algn="ctr">
                       <a:solidFill>
                         <a:srgbClr val="D5DBEA"/>
@@ -8858,7 +5218,7 @@
                     <a:bodyPr/>
                     <a:lstStyle/>
                     <a:p>
-                      <a:pPr algn="ctr" indent="0" marL="0">
+                      <a:pPr marL="0" indent="0" algn="ctr">
                         <a:buNone/>
                       </a:pPr>
                       <a:r>
@@ -8872,7 +5232,7 @@
                       <a:endParaRPr lang="en-US" sz="1600" dirty="0"/>
                     </a:p>
                   </a:txBody>
-                  <a:tcPr marL="91440" marR="91440" marT="45720" marB="45720" anchor="ctr">
+                  <a:tcPr anchor="ctr">
                     <a:lnL w="12700" cap="flat" cmpd="sng" algn="ctr">
                       <a:solidFill>
                         <a:srgbClr val="D5DBEA"/>
@@ -8914,6 +5274,11 @@
                     </a:solidFill>
                   </a:tcPr>
                 </a:tc>
+                <a:extLst>
+                  <a:ext uri="{0D108BD9-81ED-4DB2-BD59-A6C34878D82A}">
+                    <a16:rowId xmlns:a16="http://schemas.microsoft.com/office/drawing/2014/main" val="10000"/>
+                  </a:ext>
+                </a:extLst>
               </a:tr>
               <a:tr h="548640">
                 <a:tc>
@@ -8921,7 +5286,7 @@
                     <a:bodyPr/>
                     <a:lstStyle/>
                     <a:p>
-                      <a:pPr algn="l" indent="0" marL="0">
+                      <a:pPr marL="0" indent="0" algn="l">
                         <a:buNone/>
                       </a:pPr>
                       <a:r>
@@ -8935,7 +5300,7 @@
                       <a:endParaRPr lang="en-US" sz="1600" dirty="0"/>
                     </a:p>
                   </a:txBody>
-                  <a:tcPr marL="91440" marR="91440" marT="45720" marB="45720" anchor="ctr">
+                  <a:tcPr anchor="ctr">
                     <a:lnL w="12700" cap="flat" cmpd="sng" algn="ctr">
                       <a:solidFill>
                         <a:srgbClr val="D5DBEA"/>
@@ -8982,7 +5347,7 @@
                     <a:bodyPr/>
                     <a:lstStyle/>
                     <a:p>
-                      <a:pPr algn="ctr" indent="0" marL="0">
+                      <a:pPr marL="0" indent="0" algn="ctr">
                         <a:buNone/>
                       </a:pPr>
                       <a:r>
@@ -8996,7 +5361,7 @@
                       <a:endParaRPr lang="en-US" sz="1600" dirty="0"/>
                     </a:p>
                   </a:txBody>
-                  <a:tcPr marL="91440" marR="91440" marT="45720" marB="45720" anchor="ctr">
+                  <a:tcPr anchor="ctr">
                     <a:lnL w="12700" cap="flat" cmpd="sng" algn="ctr">
                       <a:solidFill>
                         <a:srgbClr val="D5DBEA"/>
@@ -9043,7 +5408,7 @@
                     <a:bodyPr/>
                     <a:lstStyle/>
                     <a:p>
-                      <a:pPr algn="ctr" indent="0" marL="0">
+                      <a:pPr marL="0" indent="0" algn="ctr">
                         <a:buNone/>
                       </a:pPr>
                       <a:r>
@@ -9057,7 +5422,7 @@
                       <a:endParaRPr lang="en-US" sz="1600" dirty="0"/>
                     </a:p>
                   </a:txBody>
-                  <a:tcPr marL="91440" marR="91440" marT="45720" marB="45720" anchor="ctr">
+                  <a:tcPr anchor="ctr">
                     <a:lnL w="12700" cap="flat" cmpd="sng" algn="ctr">
                       <a:solidFill>
                         <a:srgbClr val="D5DBEA"/>
@@ -9104,7 +5469,7 @@
                     <a:bodyPr/>
                     <a:lstStyle/>
                     <a:p>
-                      <a:pPr algn="ctr" indent="0" marL="0">
+                      <a:pPr marL="0" indent="0" algn="ctr">
                         <a:buNone/>
                       </a:pPr>
                       <a:r>
@@ -9118,7 +5483,7 @@
                       <a:endParaRPr lang="en-US" sz="1600" dirty="0"/>
                     </a:p>
                   </a:txBody>
-                  <a:tcPr marL="91440" marR="91440" marT="45720" marB="45720" anchor="ctr">
+                  <a:tcPr anchor="ctr">
                     <a:lnL w="12700" cap="flat" cmpd="sng" algn="ctr">
                       <a:solidFill>
                         <a:srgbClr val="D5DBEA"/>
@@ -9165,7 +5530,7 @@
                     <a:bodyPr/>
                     <a:lstStyle/>
                     <a:p>
-                      <a:pPr algn="ctr" indent="0" marL="0">
+                      <a:pPr marL="0" indent="0" algn="ctr">
                         <a:buNone/>
                       </a:pPr>
                       <a:r>
@@ -9179,7 +5544,7 @@
                       <a:endParaRPr lang="en-US" sz="1600" dirty="0"/>
                     </a:p>
                   </a:txBody>
-                  <a:tcPr marL="91440" marR="91440" marT="45720" marB="45720" anchor="ctr">
+                  <a:tcPr anchor="ctr">
                     <a:lnL w="12700" cap="flat" cmpd="sng" algn="ctr">
                       <a:solidFill>
                         <a:srgbClr val="D5DBEA"/>
@@ -9226,7 +5591,7 @@
                     <a:bodyPr/>
                     <a:lstStyle/>
                     <a:p>
-                      <a:pPr algn="ctr" indent="0" marL="0">
+                      <a:pPr marL="0" indent="0" algn="ctr">
                         <a:buNone/>
                       </a:pPr>
                       <a:r>
@@ -9240,7 +5605,7 @@
                       <a:endParaRPr lang="en-US" sz="1600" dirty="0"/>
                     </a:p>
                   </a:txBody>
-                  <a:tcPr marL="91440" marR="91440" marT="45720" marB="45720" anchor="ctr">
+                  <a:tcPr anchor="ctr">
                     <a:lnL w="12700" cap="flat" cmpd="sng" algn="ctr">
                       <a:solidFill>
                         <a:srgbClr val="D5DBEA"/>
@@ -9287,7 +5652,7 @@
                     <a:bodyPr/>
                     <a:lstStyle/>
                     <a:p>
-                      <a:pPr algn="ctr" indent="0" marL="0">
+                      <a:pPr marL="0" indent="0" algn="ctr">
                         <a:buNone/>
                       </a:pPr>
                       <a:r>
@@ -9301,7 +5666,7 @@
                       <a:endParaRPr lang="en-US" sz="1600" dirty="0"/>
                     </a:p>
                   </a:txBody>
-                  <a:tcPr marL="91440" marR="91440" marT="45720" marB="45720" anchor="ctr">
+                  <a:tcPr anchor="ctr">
                     <a:lnL w="12700" cap="flat" cmpd="sng" algn="ctr">
                       <a:solidFill>
                         <a:srgbClr val="D5DBEA"/>
@@ -9348,7 +5713,7 @@
                     <a:bodyPr/>
                     <a:lstStyle/>
                     <a:p>
-                      <a:pPr algn="ctr" indent="0" marL="0">
+                      <a:pPr marL="0" indent="0" algn="ctr">
                         <a:buNone/>
                       </a:pPr>
                       <a:r>
@@ -9362,7 +5727,7 @@
                       <a:endParaRPr lang="en-US" sz="1600" dirty="0"/>
                     </a:p>
                   </a:txBody>
-                  <a:tcPr marL="91440" marR="91440" marT="45720" marB="45720" anchor="ctr">
+                  <a:tcPr anchor="ctr">
                     <a:lnL w="12700" cap="flat" cmpd="sng" algn="ctr">
                       <a:solidFill>
                         <a:srgbClr val="D5DBEA"/>
@@ -9409,7 +5774,7 @@
                     <a:bodyPr/>
                     <a:lstStyle/>
                     <a:p>
-                      <a:pPr algn="ctr" indent="0" marL="0">
+                      <a:pPr marL="0" indent="0" algn="ctr">
                         <a:buNone/>
                       </a:pPr>
                       <a:r>
@@ -9423,7 +5788,7 @@
                       <a:endParaRPr lang="en-US" sz="1600" dirty="0"/>
                     </a:p>
                   </a:txBody>
-                  <a:tcPr marL="91440" marR="91440" marT="45720" marB="45720" anchor="ctr">
+                  <a:tcPr anchor="ctr">
                     <a:lnL w="12700" cap="flat" cmpd="sng" algn="ctr">
                       <a:solidFill>
                         <a:srgbClr val="D5DBEA"/>
@@ -9465,6 +5830,11 @@
                     </a:solidFill>
                   </a:tcPr>
                 </a:tc>
+                <a:extLst>
+                  <a:ext uri="{0D108BD9-81ED-4DB2-BD59-A6C34878D82A}">
+                    <a16:rowId xmlns:a16="http://schemas.microsoft.com/office/drawing/2014/main" val="10001"/>
+                  </a:ext>
+                </a:extLst>
               </a:tr>
               <a:tr h="548640">
                 <a:tc>
@@ -9472,7 +5842,7 @@
                     <a:bodyPr/>
                     <a:lstStyle/>
                     <a:p>
-                      <a:pPr algn="l" indent="0" marL="0">
+                      <a:pPr marL="0" indent="0" algn="l">
                         <a:buNone/>
                       </a:pPr>
                       <a:r>
@@ -9486,7 +5856,7 @@
                       <a:endParaRPr lang="en-US" sz="1600" dirty="0"/>
                     </a:p>
                   </a:txBody>
-                  <a:tcPr marL="91440" marR="91440" marT="45720" marB="45720" anchor="ctr">
+                  <a:tcPr anchor="ctr">
                     <a:lnL w="12700" cap="flat" cmpd="sng" algn="ctr">
                       <a:solidFill>
                         <a:srgbClr val="D5DBEA"/>
@@ -9533,7 +5903,7 @@
                     <a:bodyPr/>
                     <a:lstStyle/>
                     <a:p>
-                      <a:pPr algn="ctr" indent="0" marL="0">
+                      <a:pPr marL="0" indent="0" algn="ctr">
                         <a:buNone/>
                       </a:pPr>
                       <a:r>
@@ -9547,7 +5917,7 @@
                       <a:endParaRPr lang="en-US" sz="1600" dirty="0"/>
                     </a:p>
                   </a:txBody>
-                  <a:tcPr marL="91440" marR="91440" marT="45720" marB="45720" anchor="ctr">
+                  <a:tcPr anchor="ctr">
                     <a:lnL w="12700" cap="flat" cmpd="sng" algn="ctr">
                       <a:solidFill>
                         <a:srgbClr val="D5DBEA"/>
@@ -9594,7 +5964,7 @@
                     <a:bodyPr/>
                     <a:lstStyle/>
                     <a:p>
-                      <a:pPr algn="ctr" indent="0" marL="0">
+                      <a:pPr marL="0" indent="0" algn="ctr">
                         <a:buNone/>
                       </a:pPr>
                       <a:r>
@@ -9608,7 +5978,7 @@
                       <a:endParaRPr lang="en-US" sz="1600" dirty="0"/>
                     </a:p>
                   </a:txBody>
-                  <a:tcPr marL="91440" marR="91440" marT="45720" marB="45720" anchor="ctr">
+                  <a:tcPr anchor="ctr">
                     <a:lnL w="12700" cap="flat" cmpd="sng" algn="ctr">
                       <a:solidFill>
                         <a:srgbClr val="D5DBEA"/>
@@ -9655,7 +6025,7 @@
                     <a:bodyPr/>
                     <a:lstStyle/>
                     <a:p>
-                      <a:pPr algn="ctr" indent="0" marL="0">
+                      <a:pPr marL="0" indent="0" algn="ctr">
                         <a:buNone/>
                       </a:pPr>
                       <a:r>
@@ -9669,7 +6039,7 @@
                       <a:endParaRPr lang="en-US" sz="1600" dirty="0"/>
                     </a:p>
                   </a:txBody>
-                  <a:tcPr marL="91440" marR="91440" marT="45720" marB="45720" anchor="ctr">
+                  <a:tcPr anchor="ctr">
                     <a:lnL w="12700" cap="flat" cmpd="sng" algn="ctr">
                       <a:solidFill>
                         <a:srgbClr val="D5DBEA"/>
@@ -9716,7 +6086,7 @@
                     <a:bodyPr/>
                     <a:lstStyle/>
                     <a:p>
-                      <a:pPr algn="ctr" indent="0" marL="0">
+                      <a:pPr marL="0" indent="0" algn="ctr">
                         <a:buNone/>
                       </a:pPr>
                       <a:r>
@@ -9730,7 +6100,7 @@
                       <a:endParaRPr lang="en-US" sz="1600" dirty="0"/>
                     </a:p>
                   </a:txBody>
-                  <a:tcPr marL="91440" marR="91440" marT="45720" marB="45720" anchor="ctr">
+                  <a:tcPr anchor="ctr">
                     <a:lnL w="12700" cap="flat" cmpd="sng" algn="ctr">
                       <a:solidFill>
                         <a:srgbClr val="D5DBEA"/>
@@ -9777,7 +6147,7 @@
                     <a:bodyPr/>
                     <a:lstStyle/>
                     <a:p>
-                      <a:pPr algn="ctr" indent="0" marL="0">
+                      <a:pPr marL="0" indent="0" algn="ctr">
                         <a:buNone/>
                       </a:pPr>
                       <a:r>
@@ -9791,7 +6161,7 @@
                       <a:endParaRPr lang="en-US" sz="1600" dirty="0"/>
                     </a:p>
                   </a:txBody>
-                  <a:tcPr marL="91440" marR="91440" marT="45720" marB="45720" anchor="ctr">
+                  <a:tcPr anchor="ctr">
                     <a:lnL w="12700" cap="flat" cmpd="sng" algn="ctr">
                       <a:solidFill>
                         <a:srgbClr val="D5DBEA"/>
@@ -9838,7 +6208,7 @@
                     <a:bodyPr/>
                     <a:lstStyle/>
                     <a:p>
-                      <a:pPr algn="ctr" indent="0" marL="0">
+                      <a:pPr marL="0" indent="0" algn="ctr">
                         <a:buNone/>
                       </a:pPr>
                       <a:r>
@@ -9852,7 +6222,7 @@
                       <a:endParaRPr lang="en-US" sz="1600" dirty="0"/>
                     </a:p>
                   </a:txBody>
-                  <a:tcPr marL="91440" marR="91440" marT="45720" marB="45720" anchor="ctr">
+                  <a:tcPr anchor="ctr">
                     <a:lnL w="12700" cap="flat" cmpd="sng" algn="ctr">
                       <a:solidFill>
                         <a:srgbClr val="D5DBEA"/>
@@ -9899,7 +6269,7 @@
                     <a:bodyPr/>
                     <a:lstStyle/>
                     <a:p>
-                      <a:pPr algn="ctr" indent="0" marL="0">
+                      <a:pPr marL="0" indent="0" algn="ctr">
                         <a:buNone/>
                       </a:pPr>
                       <a:r>
@@ -9913,7 +6283,7 @@
                       <a:endParaRPr lang="en-US" sz="1600" dirty="0"/>
                     </a:p>
                   </a:txBody>
-                  <a:tcPr marL="91440" marR="91440" marT="45720" marB="45720" anchor="ctr">
+                  <a:tcPr anchor="ctr">
                     <a:lnL w="12700" cap="flat" cmpd="sng" algn="ctr">
                       <a:solidFill>
                         <a:srgbClr val="D5DBEA"/>
@@ -9960,7 +6330,7 @@
                     <a:bodyPr/>
                     <a:lstStyle/>
                     <a:p>
-                      <a:pPr algn="ctr" indent="0" marL="0">
+                      <a:pPr marL="0" indent="0" algn="ctr">
                         <a:buNone/>
                       </a:pPr>
                       <a:r>
@@ -9974,7 +6344,7 @@
                       <a:endParaRPr lang="en-US" sz="1600" dirty="0"/>
                     </a:p>
                   </a:txBody>
-                  <a:tcPr marL="91440" marR="91440" marT="45720" marB="45720" anchor="ctr">
+                  <a:tcPr anchor="ctr">
                     <a:lnL w="12700" cap="flat" cmpd="sng" algn="ctr">
                       <a:solidFill>
                         <a:srgbClr val="D5DBEA"/>
@@ -10016,6 +6386,11 @@
                     </a:solidFill>
                   </a:tcPr>
                 </a:tc>
+                <a:extLst>
+                  <a:ext uri="{0D108BD9-81ED-4DB2-BD59-A6C34878D82A}">
+                    <a16:rowId xmlns:a16="http://schemas.microsoft.com/office/drawing/2014/main" val="10002"/>
+                  </a:ext>
+                </a:extLst>
               </a:tr>
               <a:tr h="548640">
                 <a:tc>
@@ -10023,7 +6398,7 @@
                     <a:bodyPr/>
                     <a:lstStyle/>
                     <a:p>
-                      <a:pPr algn="l" indent="0" marL="0">
+                      <a:pPr marL="0" indent="0" algn="l">
                         <a:buNone/>
                       </a:pPr>
                       <a:r>
@@ -10037,7 +6412,7 @@
                       <a:endParaRPr lang="en-US" sz="1600" dirty="0"/>
                     </a:p>
                   </a:txBody>
-                  <a:tcPr marL="91440" marR="91440" marT="45720" marB="45720" anchor="ctr">
+                  <a:tcPr anchor="ctr">
                     <a:lnL w="12700" cap="flat" cmpd="sng" algn="ctr">
                       <a:solidFill>
                         <a:srgbClr val="D5DBEA"/>
@@ -10084,7 +6459,7 @@
                     <a:bodyPr/>
                     <a:lstStyle/>
                     <a:p>
-                      <a:pPr algn="ctr" indent="0" marL="0">
+                      <a:pPr marL="0" indent="0" algn="ctr">
                         <a:buNone/>
                       </a:pPr>
                       <a:r>
@@ -10098,7 +6473,7 @@
                       <a:endParaRPr lang="en-US" sz="1600" dirty="0"/>
                     </a:p>
                   </a:txBody>
-                  <a:tcPr marL="91440" marR="91440" marT="45720" marB="45720" anchor="ctr">
+                  <a:tcPr anchor="ctr">
                     <a:lnL w="12700" cap="flat" cmpd="sng" algn="ctr">
                       <a:solidFill>
                         <a:srgbClr val="D5DBEA"/>
@@ -10145,7 +6520,7 @@
                     <a:bodyPr/>
                     <a:lstStyle/>
                     <a:p>
-                      <a:pPr algn="ctr" indent="0" marL="0">
+                      <a:pPr marL="0" indent="0" algn="ctr">
                         <a:buNone/>
                       </a:pPr>
                       <a:r>
@@ -10159,7 +6534,7 @@
                       <a:endParaRPr lang="en-US" sz="1600" dirty="0"/>
                     </a:p>
                   </a:txBody>
-                  <a:tcPr marL="91440" marR="91440" marT="45720" marB="45720" anchor="ctr">
+                  <a:tcPr anchor="ctr">
                     <a:lnL w="12700" cap="flat" cmpd="sng" algn="ctr">
                       <a:solidFill>
                         <a:srgbClr val="D5DBEA"/>
@@ -10206,7 +6581,7 @@
                     <a:bodyPr/>
                     <a:lstStyle/>
                     <a:p>
-                      <a:pPr algn="ctr" indent="0" marL="0">
+                      <a:pPr marL="0" indent="0" algn="ctr">
                         <a:buNone/>
                       </a:pPr>
                       <a:r>
@@ -10220,7 +6595,7 @@
                       <a:endParaRPr lang="en-US" sz="1600" dirty="0"/>
                     </a:p>
                   </a:txBody>
-                  <a:tcPr marL="91440" marR="91440" marT="45720" marB="45720" anchor="ctr">
+                  <a:tcPr anchor="ctr">
                     <a:lnL w="12700" cap="flat" cmpd="sng" algn="ctr">
                       <a:solidFill>
                         <a:srgbClr val="D5DBEA"/>
@@ -10267,7 +6642,7 @@
                     <a:bodyPr/>
                     <a:lstStyle/>
                     <a:p>
-                      <a:pPr algn="ctr" indent="0" marL="0">
+                      <a:pPr marL="0" indent="0" algn="ctr">
                         <a:buNone/>
                       </a:pPr>
                       <a:r>
@@ -10281,7 +6656,7 @@
                       <a:endParaRPr lang="en-US" sz="1600" dirty="0"/>
                     </a:p>
                   </a:txBody>
-                  <a:tcPr marL="91440" marR="91440" marT="45720" marB="45720" anchor="ctr">
+                  <a:tcPr anchor="ctr">
                     <a:lnL w="12700" cap="flat" cmpd="sng" algn="ctr">
                       <a:solidFill>
                         <a:srgbClr val="D5DBEA"/>
@@ -10328,7 +6703,7 @@
                     <a:bodyPr/>
                     <a:lstStyle/>
                     <a:p>
-                      <a:pPr algn="ctr" indent="0" marL="0">
+                      <a:pPr marL="0" indent="0" algn="ctr">
                         <a:buNone/>
                       </a:pPr>
                       <a:r>
@@ -10342,7 +6717,7 @@
                       <a:endParaRPr lang="en-US" sz="1600" dirty="0"/>
                     </a:p>
                   </a:txBody>
-                  <a:tcPr marL="91440" marR="91440" marT="45720" marB="45720" anchor="ctr">
+                  <a:tcPr anchor="ctr">
                     <a:lnL w="12700" cap="flat" cmpd="sng" algn="ctr">
                       <a:solidFill>
                         <a:srgbClr val="D5DBEA"/>
@@ -10389,7 +6764,7 @@
                     <a:bodyPr/>
                     <a:lstStyle/>
                     <a:p>
-                      <a:pPr algn="ctr" indent="0" marL="0">
+                      <a:pPr marL="0" indent="0" algn="ctr">
                         <a:buNone/>
                       </a:pPr>
                       <a:r>
@@ -10403,7 +6778,7 @@
                       <a:endParaRPr lang="en-US" sz="1600" dirty="0"/>
                     </a:p>
                   </a:txBody>
-                  <a:tcPr marL="91440" marR="91440" marT="45720" marB="45720" anchor="ctr">
+                  <a:tcPr anchor="ctr">
                     <a:lnL w="12700" cap="flat" cmpd="sng" algn="ctr">
                       <a:solidFill>
                         <a:srgbClr val="D5DBEA"/>
@@ -10450,7 +6825,7 @@
                     <a:bodyPr/>
                     <a:lstStyle/>
                     <a:p>
-                      <a:pPr algn="ctr" indent="0" marL="0">
+                      <a:pPr marL="0" indent="0" algn="ctr">
                         <a:buNone/>
                       </a:pPr>
                       <a:r>
@@ -10464,7 +6839,7 @@
                       <a:endParaRPr lang="en-US" sz="1600" dirty="0"/>
                     </a:p>
                   </a:txBody>
-                  <a:tcPr marL="91440" marR="91440" marT="45720" marB="45720" anchor="ctr">
+                  <a:tcPr anchor="ctr">
                     <a:lnL w="12700" cap="flat" cmpd="sng" algn="ctr">
                       <a:solidFill>
                         <a:srgbClr val="D5DBEA"/>
@@ -10511,7 +6886,7 @@
                     <a:bodyPr/>
                     <a:lstStyle/>
                     <a:p>
-                      <a:pPr algn="ctr" indent="0" marL="0">
+                      <a:pPr marL="0" indent="0" algn="ctr">
                         <a:buNone/>
                       </a:pPr>
                       <a:r>
@@ -10525,7 +6900,7 @@
                       <a:endParaRPr lang="en-US" sz="1600" dirty="0"/>
                     </a:p>
                   </a:txBody>
-                  <a:tcPr marL="91440" marR="91440" marT="45720" marB="45720" anchor="ctr">
+                  <a:tcPr anchor="ctr">
                     <a:lnL w="12700" cap="flat" cmpd="sng" algn="ctr">
                       <a:solidFill>
                         <a:srgbClr val="D5DBEA"/>
@@ -10567,6 +6942,11 @@
                     </a:solidFill>
                   </a:tcPr>
                 </a:tc>
+                <a:extLst>
+                  <a:ext uri="{0D108BD9-81ED-4DB2-BD59-A6C34878D82A}">
+                    <a16:rowId xmlns:a16="http://schemas.microsoft.com/office/drawing/2014/main" val="10003"/>
+                  </a:ext>
+                </a:extLst>
               </a:tr>
               <a:tr h="548640">
                 <a:tc>
@@ -10574,7 +6954,7 @@
                     <a:bodyPr/>
                     <a:lstStyle/>
                     <a:p>
-                      <a:pPr algn="l" indent="0" marL="0">
+                      <a:pPr marL="0" indent="0" algn="l">
                         <a:buNone/>
                       </a:pPr>
                       <a:r>
@@ -10588,7 +6968,7 @@
                       <a:endParaRPr lang="en-US" sz="1600" dirty="0"/>
                     </a:p>
                   </a:txBody>
-                  <a:tcPr marL="91440" marR="91440" marT="45720" marB="45720" anchor="ctr">
+                  <a:tcPr anchor="ctr">
                     <a:lnL w="12700" cap="flat" cmpd="sng" algn="ctr">
                       <a:solidFill>
                         <a:srgbClr val="D5DBEA"/>
@@ -10635,7 +7015,7 @@
                     <a:bodyPr/>
                     <a:lstStyle/>
                     <a:p>
-                      <a:pPr algn="ctr" indent="0" marL="0">
+                      <a:pPr marL="0" indent="0" algn="ctr">
                         <a:buNone/>
                       </a:pPr>
                       <a:r>
@@ -10649,7 +7029,7 @@
                       <a:endParaRPr lang="en-US" sz="1600" dirty="0"/>
                     </a:p>
                   </a:txBody>
-                  <a:tcPr marL="91440" marR="91440" marT="45720" marB="45720" anchor="ctr">
+                  <a:tcPr anchor="ctr">
                     <a:lnL w="12700" cap="flat" cmpd="sng" algn="ctr">
                       <a:solidFill>
                         <a:srgbClr val="D5DBEA"/>
@@ -10696,7 +7076,7 @@
                     <a:bodyPr/>
                     <a:lstStyle/>
                     <a:p>
-                      <a:pPr algn="ctr" indent="0" marL="0">
+                      <a:pPr marL="0" indent="0" algn="ctr">
                         <a:buNone/>
                       </a:pPr>
                       <a:r>
@@ -10710,7 +7090,7 @@
                       <a:endParaRPr lang="en-US" sz="1600" dirty="0"/>
                     </a:p>
                   </a:txBody>
-                  <a:tcPr marL="91440" marR="91440" marT="45720" marB="45720" anchor="ctr">
+                  <a:tcPr anchor="ctr">
                     <a:lnL w="12700" cap="flat" cmpd="sng" algn="ctr">
                       <a:solidFill>
                         <a:srgbClr val="D5DBEA"/>
@@ -10757,7 +7137,7 @@
                     <a:bodyPr/>
                     <a:lstStyle/>
                     <a:p>
-                      <a:pPr algn="ctr" indent="0" marL="0">
+                      <a:pPr marL="0" indent="0" algn="ctr">
                         <a:buNone/>
                       </a:pPr>
                       <a:r>
@@ -10771,7 +7151,7 @@
                       <a:endParaRPr lang="en-US" sz="1600" dirty="0"/>
                     </a:p>
                   </a:txBody>
-                  <a:tcPr marL="91440" marR="91440" marT="45720" marB="45720" anchor="ctr">
+                  <a:tcPr anchor="ctr">
                     <a:lnL w="12700" cap="flat" cmpd="sng" algn="ctr">
                       <a:solidFill>
                         <a:srgbClr val="D5DBEA"/>
@@ -10818,7 +7198,7 @@
                     <a:bodyPr/>
                     <a:lstStyle/>
                     <a:p>
-                      <a:pPr algn="ctr" indent="0" marL="0">
+                      <a:pPr marL="0" indent="0" algn="ctr">
                         <a:buNone/>
                       </a:pPr>
                       <a:r>
@@ -10832,7 +7212,7 @@
                       <a:endParaRPr lang="en-US" sz="1600" dirty="0"/>
                     </a:p>
                   </a:txBody>
-                  <a:tcPr marL="91440" marR="91440" marT="45720" marB="45720" anchor="ctr">
+                  <a:tcPr anchor="ctr">
                     <a:lnL w="12700" cap="flat" cmpd="sng" algn="ctr">
                       <a:solidFill>
                         <a:srgbClr val="D5DBEA"/>
@@ -10879,7 +7259,7 @@
                     <a:bodyPr/>
                     <a:lstStyle/>
                     <a:p>
-                      <a:pPr algn="ctr" indent="0" marL="0">
+                      <a:pPr marL="0" indent="0" algn="ctr">
                         <a:buNone/>
                       </a:pPr>
                       <a:r>
@@ -10893,7 +7273,7 @@
                       <a:endParaRPr lang="en-US" sz="1600" dirty="0"/>
                     </a:p>
                   </a:txBody>
-                  <a:tcPr marL="91440" marR="91440" marT="45720" marB="45720" anchor="ctr">
+                  <a:tcPr anchor="ctr">
                     <a:lnL w="12700" cap="flat" cmpd="sng" algn="ctr">
                       <a:solidFill>
                         <a:srgbClr val="D5DBEA"/>
@@ -10940,7 +7320,7 @@
                     <a:bodyPr/>
                     <a:lstStyle/>
                     <a:p>
-                      <a:pPr algn="ctr" indent="0" marL="0">
+                      <a:pPr marL="0" indent="0" algn="ctr">
                         <a:buNone/>
                       </a:pPr>
                       <a:r>
@@ -10954,7 +7334,7 @@
                       <a:endParaRPr lang="en-US" sz="1600" dirty="0"/>
                     </a:p>
                   </a:txBody>
-                  <a:tcPr marL="91440" marR="91440" marT="45720" marB="45720" anchor="ctr">
+                  <a:tcPr anchor="ctr">
                     <a:lnL w="12700" cap="flat" cmpd="sng" algn="ctr">
                       <a:solidFill>
                         <a:srgbClr val="D5DBEA"/>
@@ -11001,7 +7381,7 @@
                     <a:bodyPr/>
                     <a:lstStyle/>
                     <a:p>
-                      <a:pPr algn="ctr" indent="0" marL="0">
+                      <a:pPr marL="0" indent="0" algn="ctr">
                         <a:buNone/>
                       </a:pPr>
                       <a:r>
@@ -11015,7 +7395,7 @@
                       <a:endParaRPr lang="en-US" sz="1600" dirty="0"/>
                     </a:p>
                   </a:txBody>
-                  <a:tcPr marL="91440" marR="91440" marT="45720" marB="45720" anchor="ctr">
+                  <a:tcPr anchor="ctr">
                     <a:lnL w="12700" cap="flat" cmpd="sng" algn="ctr">
                       <a:solidFill>
                         <a:srgbClr val="D5DBEA"/>
@@ -11062,7 +7442,7 @@
                     <a:bodyPr/>
                     <a:lstStyle/>
                     <a:p>
-                      <a:pPr algn="ctr" indent="0" marL="0">
+                      <a:pPr marL="0" indent="0" algn="ctr">
                         <a:buNone/>
                       </a:pPr>
                       <a:r>
@@ -11076,7 +7456,7 @@
                       <a:endParaRPr lang="en-US" sz="1600" dirty="0"/>
                     </a:p>
                   </a:txBody>
-                  <a:tcPr marL="91440" marR="91440" marT="45720" marB="45720" anchor="ctr">
+                  <a:tcPr anchor="ctr">
                     <a:lnL w="12700" cap="flat" cmpd="sng" algn="ctr">
                       <a:solidFill>
                         <a:srgbClr val="D5DBEA"/>
@@ -11118,6 +7498,11 @@
                     </a:solidFill>
                   </a:tcPr>
                 </a:tc>
+                <a:extLst>
+                  <a:ext uri="{0D108BD9-81ED-4DB2-BD59-A6C34878D82A}">
+                    <a16:rowId xmlns:a16="http://schemas.microsoft.com/office/drawing/2014/main" val="10004"/>
+                  </a:ext>
+                </a:extLst>
               </a:tr>
               <a:tr h="548640">
                 <a:tc>
@@ -11125,7 +7510,7 @@
                     <a:bodyPr/>
                     <a:lstStyle/>
                     <a:p>
-                      <a:pPr algn="l" indent="0" marL="0">
+                      <a:pPr marL="0" indent="0" algn="l">
                         <a:buNone/>
                       </a:pPr>
                       <a:r>
@@ -11139,7 +7524,7 @@
                       <a:endParaRPr lang="en-US" sz="1600" dirty="0"/>
                     </a:p>
                   </a:txBody>
-                  <a:tcPr marL="91440" marR="91440" marT="45720" marB="45720" anchor="ctr">
+                  <a:tcPr anchor="ctr">
                     <a:lnL w="12700" cap="flat" cmpd="sng" algn="ctr">
                       <a:solidFill>
                         <a:srgbClr val="D5DBEA"/>
@@ -11186,7 +7571,7 @@
                     <a:bodyPr/>
                     <a:lstStyle/>
                     <a:p>
-                      <a:pPr algn="ctr" indent="0" marL="0">
+                      <a:pPr marL="0" indent="0" algn="ctr">
                         <a:buNone/>
                       </a:pPr>
                       <a:r>
@@ -11200,7 +7585,7 @@
                       <a:endParaRPr lang="en-US" sz="1600" dirty="0"/>
                     </a:p>
                   </a:txBody>
-                  <a:tcPr marL="91440" marR="91440" marT="45720" marB="45720" anchor="ctr">
+                  <a:tcPr anchor="ctr">
                     <a:lnL w="12700" cap="flat" cmpd="sng" algn="ctr">
                       <a:solidFill>
                         <a:srgbClr val="D5DBEA"/>
@@ -11247,7 +7632,7 @@
                     <a:bodyPr/>
                     <a:lstStyle/>
                     <a:p>
-                      <a:pPr algn="ctr" indent="0" marL="0">
+                      <a:pPr marL="0" indent="0" algn="ctr">
                         <a:buNone/>
                       </a:pPr>
                       <a:r>
@@ -11261,7 +7646,7 @@
                       <a:endParaRPr lang="en-US" sz="1600" dirty="0"/>
                     </a:p>
                   </a:txBody>
-                  <a:tcPr marL="91440" marR="91440" marT="45720" marB="45720" anchor="ctr">
+                  <a:tcPr anchor="ctr">
                     <a:lnL w="12700" cap="flat" cmpd="sng" algn="ctr">
                       <a:solidFill>
                         <a:srgbClr val="D5DBEA"/>
@@ -11308,7 +7693,7 @@
                     <a:bodyPr/>
                     <a:lstStyle/>
                     <a:p>
-                      <a:pPr algn="ctr" indent="0" marL="0">
+                      <a:pPr marL="0" indent="0" algn="ctr">
                         <a:buNone/>
                       </a:pPr>
                       <a:r>
@@ -11322,7 +7707,7 @@
                       <a:endParaRPr lang="en-US" sz="1600" dirty="0"/>
                     </a:p>
                   </a:txBody>
-                  <a:tcPr marL="91440" marR="91440" marT="45720" marB="45720" anchor="ctr">
+                  <a:tcPr anchor="ctr">
                     <a:lnL w="12700" cap="flat" cmpd="sng" algn="ctr">
                       <a:solidFill>
                         <a:srgbClr val="D5DBEA"/>
@@ -11369,7 +7754,7 @@
                     <a:bodyPr/>
                     <a:lstStyle/>
                     <a:p>
-                      <a:pPr algn="ctr" indent="0" marL="0">
+                      <a:pPr marL="0" indent="0" algn="ctr">
                         <a:buNone/>
                       </a:pPr>
                       <a:r>
@@ -11383,7 +7768,7 @@
                       <a:endParaRPr lang="en-US" sz="1600" dirty="0"/>
                     </a:p>
                   </a:txBody>
-                  <a:tcPr marL="91440" marR="91440" marT="45720" marB="45720" anchor="ctr">
+                  <a:tcPr anchor="ctr">
                     <a:lnL w="12700" cap="flat" cmpd="sng" algn="ctr">
                       <a:solidFill>
                         <a:srgbClr val="D5DBEA"/>
@@ -11430,7 +7815,7 @@
                     <a:bodyPr/>
                     <a:lstStyle/>
                     <a:p>
-                      <a:pPr algn="ctr" indent="0" marL="0">
+                      <a:pPr marL="0" indent="0" algn="ctr">
                         <a:buNone/>
                       </a:pPr>
                       <a:r>
@@ -11444,7 +7829,7 @@
                       <a:endParaRPr lang="en-US" sz="1600" dirty="0"/>
                     </a:p>
                   </a:txBody>
-                  <a:tcPr marL="91440" marR="91440" marT="45720" marB="45720" anchor="ctr">
+                  <a:tcPr anchor="ctr">
                     <a:lnL w="12700" cap="flat" cmpd="sng" algn="ctr">
                       <a:solidFill>
                         <a:srgbClr val="D5DBEA"/>
@@ -11491,7 +7876,7 @@
                     <a:bodyPr/>
                     <a:lstStyle/>
                     <a:p>
-                      <a:pPr algn="ctr" indent="0" marL="0">
+                      <a:pPr marL="0" indent="0" algn="ctr">
                         <a:buNone/>
                       </a:pPr>
                       <a:r>
@@ -11505,7 +7890,7 @@
                       <a:endParaRPr lang="en-US" sz="1600" dirty="0"/>
                     </a:p>
                   </a:txBody>
-                  <a:tcPr marL="91440" marR="91440" marT="45720" marB="45720" anchor="ctr">
+                  <a:tcPr anchor="ctr">
                     <a:lnL w="12700" cap="flat" cmpd="sng" algn="ctr">
                       <a:solidFill>
                         <a:srgbClr val="D5DBEA"/>
@@ -11552,7 +7937,7 @@
                     <a:bodyPr/>
                     <a:lstStyle/>
                     <a:p>
-                      <a:pPr algn="ctr" indent="0" marL="0">
+                      <a:pPr marL="0" indent="0" algn="ctr">
                         <a:buNone/>
                       </a:pPr>
                       <a:r>
@@ -11566,7 +7951,7 @@
                       <a:endParaRPr lang="en-US" sz="1600" dirty="0"/>
                     </a:p>
                   </a:txBody>
-                  <a:tcPr marL="91440" marR="91440" marT="45720" marB="45720" anchor="ctr">
+                  <a:tcPr anchor="ctr">
                     <a:lnL w="12700" cap="flat" cmpd="sng" algn="ctr">
                       <a:solidFill>
                         <a:srgbClr val="D5DBEA"/>
@@ -11613,7 +7998,7 @@
                     <a:bodyPr/>
                     <a:lstStyle/>
                     <a:p>
-                      <a:pPr algn="ctr" indent="0" marL="0">
+                      <a:pPr marL="0" indent="0" algn="ctr">
                         <a:buNone/>
                       </a:pPr>
                       <a:r>
@@ -11627,7 +8012,7 @@
                       <a:endParaRPr lang="en-US" sz="1600" dirty="0"/>
                     </a:p>
                   </a:txBody>
-                  <a:tcPr marL="91440" marR="91440" marT="45720" marB="45720" anchor="ctr">
+                  <a:tcPr anchor="ctr">
                     <a:lnL w="12700" cap="flat" cmpd="sng" algn="ctr">
                       <a:solidFill>
                         <a:srgbClr val="D5DBEA"/>
@@ -11669,6 +8054,11 @@
                     </a:solidFill>
                   </a:tcPr>
                 </a:tc>
+                <a:extLst>
+                  <a:ext uri="{0D108BD9-81ED-4DB2-BD59-A6C34878D82A}">
+                    <a16:rowId xmlns:a16="http://schemas.microsoft.com/office/drawing/2014/main" val="10005"/>
+                  </a:ext>
+                </a:extLst>
               </a:tr>
             </a:tbl>
           </a:graphicData>
@@ -11717,7 +8107,7 @@
           <a:bodyPr wrap="square" lIns="0" tIns="0" rIns="0" bIns="0" rtlCol="0" anchor="ctr"/>
           <a:lstStyle/>
           <a:p>
-            <a:pPr indent="0" marL="0">
+            <a:pPr marL="0" indent="0">
               <a:buNone/>
             </a:pPr>
             <a:r>
@@ -11752,7 +8142,7 @@
           </a:prstGeom>
           <a:extLst>
             <a:ext uri="{C572A759-6A51-4108-AA02-DFA0A04FC94B}">
-              <ma14:wrappingTextBoxFlag xmlns:ma14="http://schemas.microsoft.com/office/mac/drawingml/2011/main" val="0"/>
+              <ma14:wrappingTextBoxFlag xmlns="" xmlns:ma14="http://schemas.microsoft.com/office/mac/drawingml/2011/main" val="0"/>
             </a:ext>
           </a:extLst>
         </p:spPr>
@@ -11770,7 +8160,7 @@
           <a:p>
             <a:pPr algn="r"/>
             <a:fld id="{F7021451-1387-4CA6-816F-3879F97B5CBC}" type="slidenum">
-              <a:rPr b="0" lang="en-US"/>
+              <a:rPr lang="en-US" b="0"/>
               <a:t>5</a:t>
             </a:fld>
             <a:endParaRPr lang="en-US"/>
@@ -11805,9 +8195,11 @@
       <p:sp>
         <p:nvSpPr>
           <p:cNvPr id="2" name="Text 0"/>
-          <p:cNvSpPr/>
+          <p:cNvSpPr>
+            <a:spLocks noGrp="1"/>
+          </p:cNvSpPr>
           <p:nvPr>
-            <p:ph idx="100" type="title" hasCustomPrompt="1"/>
+            <p:ph type="title" idx="100" hasCustomPrompt="1"/>
           </p:nvPr>
         </p:nvSpPr>
         <p:spPr>
@@ -11825,7 +8217,7 @@
           <a:bodyPr wrap="square" lIns="0" tIns="0" rIns="0" bIns="0" rtlCol="0" anchor="ctr"/>
           <a:lstStyle/>
           <a:p>
-            <a:pPr algn="l" indent="0" marL="0">
+            <a:pPr marL="0" indent="0" algn="l">
               <a:buNone/>
             </a:pPr>
             <a:r>
@@ -11865,7 +8257,7 @@
           <a:bodyPr wrap="square" lIns="1016" tIns="1016" rIns="1016" bIns="1016" rtlCol="0" anchor="ctr"/>
           <a:lstStyle/>
           <a:p>
-            <a:pPr algn="ctr" indent="0" marL="0">
+            <a:pPr marL="0" indent="0" algn="ctr">
               <a:buNone/>
             </a:pPr>
             <a:r>
@@ -11925,7 +8317,7 @@
           <a:bodyPr wrap="square" lIns="1016" tIns="1016" rIns="1016" bIns="1016" rtlCol="0" anchor="ctr"/>
           <a:lstStyle/>
           <a:p>
-            <a:pPr algn="ctr" indent="0" marL="0">
+            <a:pPr marL="0" indent="0" algn="ctr">
               <a:buNone/>
             </a:pPr>
             <a:r>
@@ -11985,7 +8377,7 @@
           <a:bodyPr wrap="square" lIns="1016" tIns="1016" rIns="1016" bIns="1016" rtlCol="0" anchor="ctr"/>
           <a:lstStyle/>
           <a:p>
-            <a:pPr algn="ctr" indent="0" marL="0">
+            <a:pPr marL="0" indent="0" algn="ctr">
               <a:buNone/>
             </a:pPr>
             <a:r>
@@ -12045,7 +8437,7 @@
           <a:bodyPr wrap="square" lIns="1016" tIns="1016" rIns="1016" bIns="1016" rtlCol="0" anchor="ctr"/>
           <a:lstStyle/>
           <a:p>
-            <a:pPr algn="ctr" indent="0" marL="0">
+            <a:pPr marL="0" indent="0" algn="ctr">
               <a:buNone/>
             </a:pPr>
             <a:r>
@@ -12105,7 +8497,7 @@
           <a:bodyPr wrap="square" lIns="1016" tIns="1016" rIns="1016" bIns="1016" rtlCol="0" anchor="ctr"/>
           <a:lstStyle/>
           <a:p>
-            <a:pPr algn="ctr" indent="0" marL="0">
+            <a:pPr marL="0" indent="0" algn="ctr">
               <a:buNone/>
             </a:pPr>
             <a:r>
@@ -12165,7 +8557,7 @@
           <a:bodyPr wrap="square" lIns="1016" tIns="1016" rIns="1016" bIns="1016" rtlCol="0" anchor="ctr"/>
           <a:lstStyle/>
           <a:p>
-            <a:pPr algn="ctr" indent="0" marL="0">
+            <a:pPr marL="0" indent="0" algn="ctr">
               <a:buNone/>
             </a:pPr>
             <a:r>
@@ -12201,7 +8593,7 @@
           <a:bodyPr wrap="square" lIns="0" tIns="0" rIns="0" bIns="0" rtlCol="0" anchor="t"/>
           <a:lstStyle/>
           <a:p>
-            <a:pPr algn="ctr" indent="0" marL="0">
+            <a:pPr marL="0" indent="0" algn="ctr">
               <a:buNone/>
             </a:pPr>
             <a:r>
@@ -12237,7 +8629,7 @@
           <a:bodyPr wrap="square" lIns="0" tIns="0" rIns="0" bIns="0" rtlCol="0" anchor="t"/>
           <a:lstStyle/>
           <a:p>
-            <a:pPr algn="ctr" indent="0" marL="0">
+            <a:pPr marL="0" indent="0" algn="ctr">
               <a:buNone/>
             </a:pPr>
             <a:r>
@@ -12273,7 +8665,7 @@
           <a:bodyPr wrap="square" lIns="0" tIns="0" rIns="0" bIns="0" rtlCol="0" anchor="t"/>
           <a:lstStyle/>
           <a:p>
-            <a:pPr algn="ctr" indent="0" marL="0">
+            <a:pPr marL="0" indent="0" algn="ctr">
               <a:buNone/>
             </a:pPr>
             <a:r>
@@ -12309,7 +8701,7 @@
           </a:solidFill>
           <a:ln/>
           <a:effectLst>
-            <a:outerShdw sx="100000" sy="100000" kx="0" ky="0" algn="bl" rotWithShape="0" blurRad="101600" dist="25400" dir="5400000">
+            <a:outerShdw blurRad="101600" dist="25400" dir="5400000" algn="bl" rotWithShape="0">
               <a:srgbClr val="1B2A5C">
                 <a:alpha val="12000"/>
               </a:srgbClr>
@@ -12338,7 +8730,7 @@
           <a:bodyPr wrap="square" lIns="0" tIns="0" rIns="0" bIns="0" rtlCol="0" anchor="t"/>
           <a:lstStyle/>
           <a:p>
-            <a:pPr indent="0" marL="0">
+            <a:pPr marL="0" indent="0">
               <a:buNone/>
             </a:pPr>
             <a:r>
@@ -12486,7 +8878,7 @@
           </a:solidFill>
           <a:ln/>
           <a:effectLst>
-            <a:outerShdw sx="100000" sy="100000" kx="0" ky="0" algn="bl" rotWithShape="0" blurRad="101600" dist="25400" dir="5400000">
+            <a:outerShdw blurRad="101600" dist="25400" dir="5400000" algn="bl" rotWithShape="0">
               <a:srgbClr val="1B2A5C">
                 <a:alpha val="12000"/>
               </a:srgbClr>
@@ -12515,7 +8907,7 @@
           <a:bodyPr wrap="square" lIns="0" tIns="0" rIns="0" bIns="0" rtlCol="0" anchor="ctr"/>
           <a:lstStyle/>
           <a:p>
-            <a:pPr indent="0" marL="0">
+            <a:pPr marL="0" indent="0">
               <a:buNone/>
             </a:pPr>
             <a:r>
@@ -12551,7 +8943,7 @@
           <a:bodyPr wrap="square" lIns="0" tIns="0" rIns="0" bIns="0" rtlCol="0" anchor="ctr"/>
           <a:lstStyle/>
           <a:p>
-            <a:pPr indent="0" marL="0">
+            <a:pPr marL="0" indent="0">
               <a:buNone/>
             </a:pPr>
             <a:r>
@@ -12587,7 +8979,7 @@
           <a:bodyPr wrap="square" lIns="0" tIns="0" rIns="0" bIns="0" rtlCol="0" anchor="ctr"/>
           <a:lstStyle/>
           <a:p>
-            <a:pPr indent="0" marL="0">
+            <a:pPr marL="0" indent="0">
               <a:buNone/>
             </a:pPr>
             <a:r>
@@ -12623,7 +9015,7 @@
           <a:bodyPr wrap="square" lIns="0" tIns="0" rIns="0" bIns="0" rtlCol="0" anchor="ctr"/>
           <a:lstStyle/>
           <a:p>
-            <a:pPr indent="0" marL="0">
+            <a:pPr marL="0" indent="0">
               <a:buNone/>
             </a:pPr>
             <a:r>
@@ -12659,7 +9051,7 @@
           <a:bodyPr wrap="square" lIns="0" tIns="0" rIns="0" bIns="0" rtlCol="0" anchor="ctr"/>
           <a:lstStyle/>
           <a:p>
-            <a:pPr indent="0" marL="0">
+            <a:pPr marL="0" indent="0">
               <a:buNone/>
             </a:pPr>
             <a:r>
@@ -12695,7 +9087,7 @@
           <a:bodyPr wrap="square" lIns="0" tIns="0" rIns="0" bIns="0" rtlCol="0" anchor="ctr"/>
           <a:lstStyle/>
           <a:p>
-            <a:pPr indent="0" marL="0">
+            <a:pPr marL="0" indent="0">
               <a:buNone/>
             </a:pPr>
             <a:r>
@@ -12712,7 +9104,7 @@
       </p:sp>
       <p:sp>
         <p:nvSpPr>
-          <p:cNvPr id="25" name="Slide Number Placeholder 0"/>
+          <p:cNvPr id="27" name="Slide Number Placeholder 0"/>
           <p:cNvSpPr>
             <a:spLocks noGrp="1"/>
           </p:cNvSpPr>
@@ -12730,7 +9122,7 @@
           </a:prstGeom>
           <a:extLst>
             <a:ext uri="{C572A759-6A51-4108-AA02-DFA0A04FC94B}">
-              <ma14:wrappingTextBoxFlag xmlns:ma14="http://schemas.microsoft.com/office/mac/drawingml/2011/main" val="0"/>
+              <ma14:wrappingTextBoxFlag xmlns="" xmlns:ma14="http://schemas.microsoft.com/office/mac/drawingml/2011/main" val="0"/>
             </a:ext>
           </a:extLst>
         </p:spPr>
@@ -12748,7 +9140,7 @@
           <a:p>
             <a:pPr algn="r"/>
             <a:fld id="{F7021451-1387-4CA6-816F-3879F97B5CBC}" type="slidenum">
-              <a:rPr b="0" lang="en-US"/>
+              <a:rPr lang="en-US" b="0"/>
               <a:t>6</a:t>
             </a:fld>
             <a:endParaRPr lang="en-US"/>
@@ -12783,9 +9175,11 @@
       <p:sp>
         <p:nvSpPr>
           <p:cNvPr id="2" name="Text 0"/>
-          <p:cNvSpPr/>
+          <p:cNvSpPr>
+            <a:spLocks noGrp="1"/>
+          </p:cNvSpPr>
           <p:nvPr>
-            <p:ph idx="100" type="title" hasCustomPrompt="1"/>
+            <p:ph type="title" idx="100" hasCustomPrompt="1"/>
           </p:nvPr>
         </p:nvSpPr>
         <p:spPr>
@@ -12803,7 +9197,7 @@
           <a:bodyPr wrap="square" lIns="0" tIns="0" rIns="0" bIns="0" rtlCol="0" anchor="ctr"/>
           <a:lstStyle/>
           <a:p>
-            <a:pPr algn="l" indent="0" marL="0">
+            <a:pPr marL="0" indent="0" algn="l">
               <a:buNone/>
             </a:pPr>
             <a:r>
@@ -12839,7 +9233,7 @@
           </a:solidFill>
           <a:ln/>
           <a:effectLst>
-            <a:outerShdw sx="100000" sy="100000" kx="0" ky="0" algn="bl" rotWithShape="0" blurRad="101600" dist="25400" dir="5400000">
+            <a:outerShdw blurRad="101600" dist="25400" dir="5400000" algn="bl" rotWithShape="0">
               <a:srgbClr val="1B2A5C">
                 <a:alpha val="12000"/>
               </a:srgbClr>
@@ -12868,7 +9262,7 @@
           <a:bodyPr wrap="square" lIns="0" tIns="0" rIns="0" bIns="0" rtlCol="0" anchor="ctr"/>
           <a:lstStyle/>
           <a:p>
-            <a:pPr algn="ctr" indent="0" marL="0">
+            <a:pPr marL="0" indent="0" algn="ctr">
               <a:buNone/>
             </a:pPr>
             <a:r>
@@ -12904,7 +9298,7 @@
           <a:bodyPr wrap="square" lIns="0" tIns="0" rIns="0" bIns="0" rtlCol="0" anchor="t"/>
           <a:lstStyle/>
           <a:p>
-            <a:pPr algn="ctr" indent="0" marL="0">
+            <a:pPr marL="0" indent="0" algn="ctr">
               <a:buNone/>
             </a:pPr>
             <a:r>
@@ -12940,7 +9334,7 @@
           </a:solidFill>
           <a:ln/>
           <a:effectLst>
-            <a:outerShdw sx="100000" sy="100000" kx="0" ky="0" algn="bl" rotWithShape="0" blurRad="101600" dist="25400" dir="5400000">
+            <a:outerShdw blurRad="101600" dist="25400" dir="5400000" algn="bl" rotWithShape="0">
               <a:srgbClr val="1B2A5C">
                 <a:alpha val="12000"/>
               </a:srgbClr>
@@ -12969,7 +9363,7 @@
           <a:bodyPr wrap="square" lIns="0" tIns="0" rIns="0" bIns="0" rtlCol="0" anchor="ctr"/>
           <a:lstStyle/>
           <a:p>
-            <a:pPr algn="ctr" indent="0" marL="0">
+            <a:pPr marL="0" indent="0" algn="ctr">
               <a:buNone/>
             </a:pPr>
             <a:r>
@@ -13005,7 +9399,7 @@
           <a:bodyPr wrap="square" lIns="0" tIns="0" rIns="0" bIns="0" rtlCol="0" anchor="t"/>
           <a:lstStyle/>
           <a:p>
-            <a:pPr algn="ctr" indent="0" marL="0">
+            <a:pPr marL="0" indent="0" algn="ctr">
               <a:buNone/>
             </a:pPr>
             <a:r>
@@ -13041,7 +9435,7 @@
           </a:solidFill>
           <a:ln/>
           <a:effectLst>
-            <a:outerShdw sx="100000" sy="100000" kx="0" ky="0" algn="bl" rotWithShape="0" blurRad="101600" dist="25400" dir="5400000">
+            <a:outerShdw blurRad="101600" dist="25400" dir="5400000" algn="bl" rotWithShape="0">
               <a:srgbClr val="1B2A5C">
                 <a:alpha val="12000"/>
               </a:srgbClr>
@@ -13070,7 +9464,7 @@
           <a:bodyPr wrap="square" lIns="0" tIns="0" rIns="0" bIns="0" rtlCol="0" anchor="ctr"/>
           <a:lstStyle/>
           <a:p>
-            <a:pPr algn="ctr" indent="0" marL="0">
+            <a:pPr marL="0" indent="0" algn="ctr">
               <a:buNone/>
             </a:pPr>
             <a:r>
@@ -13106,7 +9500,7 @@
           <a:bodyPr wrap="square" lIns="0" tIns="0" rIns="0" bIns="0" rtlCol="0" anchor="t"/>
           <a:lstStyle/>
           <a:p>
-            <a:pPr algn="ctr" indent="0" marL="0">
+            <a:pPr marL="0" indent="0" algn="ctr">
               <a:buNone/>
             </a:pPr>
             <a:r>
@@ -13142,7 +9536,7 @@
           <a:bodyPr wrap="square" lIns="0" tIns="0" rIns="0" bIns="0" rtlCol="0" anchor="ctr"/>
           <a:lstStyle/>
           <a:p>
-            <a:pPr algn="ctr" indent="0" marL="0">
+            <a:pPr marL="0" indent="0" algn="ctr">
               <a:buNone/>
             </a:pPr>
             <a:r>
@@ -13178,7 +9572,7 @@
           <a:bodyPr wrap="square" lIns="0" tIns="0" rIns="0" bIns="0" rtlCol="0" anchor="ctr"/>
           <a:lstStyle/>
           <a:p>
-            <a:pPr algn="ctr" indent="0" marL="0">
+            <a:pPr marL="0" indent="0" algn="ctr">
               <a:buNone/>
             </a:pPr>
             <a:r>
@@ -13215,14 +9609,14 @@
       </p:sp>
       <p:pic>
         <p:nvPicPr>
-          <p:cNvPr id="15" name="Warning icon" descr="Warning">    </p:cNvPr>
+          <p:cNvPr id="15" name="Warning icon" descr="Warning"/>
           <p:cNvPicPr>
             <a:picLocks noChangeAspect="1"/>
           </p:cNvPicPr>
           <p:nvPr/>
         </p:nvPicPr>
         <p:blipFill>
-          <a:blip r:embed="rId1"/>
+          <a:blip r:embed="rId3"/>
           <a:stretch>
             <a:fillRect/>
           </a:stretch>
@@ -13258,7 +9652,7 @@
           <a:bodyPr wrap="square" lIns="0" tIns="0" rIns="0" bIns="0" rtlCol="0" anchor="ctr"/>
           <a:lstStyle/>
           <a:p>
-            <a:pPr indent="0" marL="0">
+            <a:pPr marL="0" indent="0">
               <a:buNone/>
             </a:pPr>
             <a:r>
@@ -13293,7 +9687,7 @@
           </a:prstGeom>
           <a:extLst>
             <a:ext uri="{C572A759-6A51-4108-AA02-DFA0A04FC94B}">
-              <ma14:wrappingTextBoxFlag xmlns:ma14="http://schemas.microsoft.com/office/mac/drawingml/2011/main" val="0"/>
+              <ma14:wrappingTextBoxFlag xmlns="" xmlns:ma14="http://schemas.microsoft.com/office/mac/drawingml/2011/main" val="0"/>
             </a:ext>
           </a:extLst>
         </p:spPr>
@@ -13311,7 +9705,7 @@
           <a:p>
             <a:pPr algn="r"/>
             <a:fld id="{F7021451-1387-4CA6-816F-3879F97B5CBC}" type="slidenum">
-              <a:rPr b="0" lang="en-US"/>
+              <a:rPr lang="en-US" b="0"/>
               <a:t>7</a:t>
             </a:fld>
             <a:endParaRPr lang="en-US"/>
@@ -13328,7 +9722,7 @@
 
 <file path=ppt/slides/slide8.xml><?xml version="1.0" encoding="utf-8"?>
 <p:sld xmlns:a="http://schemas.openxmlformats.org/drawingml/2006/main" xmlns:r="http://schemas.openxmlformats.org/officeDocument/2006/relationships" xmlns:p="http://schemas.openxmlformats.org/presentationml/2006/main">
-  <p:cSld name="Slide 8">
+  <p:cSld name="Slide 11">
     <p:spTree>
       <p:nvGrpSpPr>
         <p:cNvPr id="1" name=""/>
@@ -13346,9 +9740,11 @@
       <p:sp>
         <p:nvSpPr>
           <p:cNvPr id="2" name="Text 0"/>
-          <p:cNvSpPr/>
+          <p:cNvSpPr>
+            <a:spLocks noGrp="1"/>
+          </p:cNvSpPr>
           <p:nvPr>
-            <p:ph idx="100" type="title" hasCustomPrompt="1"/>
+            <p:ph type="title" idx="100" hasCustomPrompt="1"/>
           </p:nvPr>
         </p:nvSpPr>
         <p:spPr>
@@ -13366,7 +9762,7 @@
           <a:bodyPr wrap="square" lIns="0" tIns="0" rIns="0" bIns="0" rtlCol="0" anchor="ctr"/>
           <a:lstStyle/>
           <a:p>
-            <a:pPr algn="l" indent="0" marL="0">
+            <a:pPr marL="0" indent="0" algn="l">
               <a:buNone/>
             </a:pPr>
             <a:r>
@@ -13375,38 +9771,46 @@
                   <a:schemeClr val="tx2"/>
                 </a:solidFill>
               </a:rPr>
-              <a:t>Results: interception shows up as errors</a:t>
+              <a:t>Eve's hiding zone</a:t>
             </a:r>
             <a:endParaRPr lang="en-US" sz="3400" dirty="0"/>
           </a:p>
         </p:txBody>
       </p:sp>
-      <p:graphicFrame>
-        <p:nvGraphicFramePr>
-          <p:cNvPr id="3" name="Chart 0" descr=""/>
-          <p:cNvGraphicFramePr/>
-          <p:nvPr/>
-        </p:nvGraphicFramePr>
-        <p:xfrm>
-          <a:off x="548640" y="1554480"/>
-          <a:ext cx="6583680" cy="4480560"/>
-        </p:xfrm>
-        <a:graphic xmlns:a="http://schemas.openxmlformats.org/drawingml/2006/main">
-          <a:graphicData uri="http://schemas.openxmlformats.org/drawingml/2006/chart">
-            <c:chart xmlns:c="http://schemas.openxmlformats.org/drawingml/2006/chart" r:id="rId1"/>
-          </a:graphicData>
-        </a:graphic>
-      </p:graphicFrame>
-      <p:sp>
-        <p:nvSpPr>
-          <p:cNvPr id="4" name="Result card 1"/>
+      <p:pic>
+        <p:nvPicPr>
+          <p:cNvPr id="3" name="Hiding zone heatmap" descr="Heatmap of attack detection rate against channel noise and the share of qubits Eve intercepts"/>
+          <p:cNvPicPr>
+            <a:picLocks noChangeAspect="1"/>
+          </p:cNvPicPr>
+          <p:nvPr/>
+        </p:nvPicPr>
+        <p:blipFill>
+          <a:blip r:embed="rId3"/>
+          <a:stretch>
+            <a:fillRect/>
+          </a:stretch>
+        </p:blipFill>
+        <p:spPr>
+          <a:xfrm>
+            <a:off x="548640" y="1554480"/>
+            <a:ext cx="6766560" cy="4330598"/>
+          </a:xfrm>
+          <a:prstGeom prst="rect">
+            <a:avLst/>
+          </a:prstGeom>
+        </p:spPr>
+      </p:pic>
+      <p:sp>
+        <p:nvSpPr>
+          <p:cNvPr id="4" name="Hiding card 1"/>
           <p:cNvSpPr/>
           <p:nvPr/>
         </p:nvSpPr>
         <p:spPr>
           <a:xfrm>
-            <a:off x="7406640" y="1554480"/>
-            <a:ext cx="4206240" cy="1371600"/>
+            <a:off x="7589520" y="1554480"/>
+            <a:ext cx="4023360" cy="1371600"/>
           </a:xfrm>
           <a:prstGeom prst="roundRect">
             <a:avLst>
@@ -13418,7 +9822,7 @@
           </a:solidFill>
           <a:ln/>
           <a:effectLst>
-            <a:outerShdw sx="100000" sy="100000" kx="0" ky="0" algn="bl" rotWithShape="0" blurRad="101600" dist="25400" dir="5400000">
+            <a:outerShdw blurRad="101600" dist="25400" dir="5400000" algn="bl" rotWithShape="0">
               <a:srgbClr val="1B2A5C">
                 <a:alpha val="12000"/>
               </a:srgbClr>
@@ -13434,7 +9838,7 @@
         </p:nvSpPr>
         <p:spPr>
           <a:xfrm>
-            <a:off x="7635240" y="1554480"/>
+            <a:off x="7818120" y="1554480"/>
             <a:ext cx="1463040" cy="1371600"/>
           </a:xfrm>
           <a:prstGeom prst="rect">
@@ -13447,7 +9851,7 @@
           <a:bodyPr wrap="square" lIns="0" tIns="0" rIns="0" bIns="0" rtlCol="0" anchor="ctr"/>
           <a:lstStyle/>
           <a:p>
-            <a:pPr indent="0" marL="0">
+            <a:pPr marL="0" indent="0">
               <a:buNone/>
             </a:pPr>
             <a:r>
@@ -13456,7 +9860,7 @@
                   <a:schemeClr val="accent4"/>
                 </a:solidFill>
               </a:rPr>
-              <a:t>~0%</a:t>
+              <a:t>40%</a:t>
             </a:r>
             <a:endParaRPr lang="en-US" sz="3200" dirty="0"/>
           </a:p>
@@ -13470,8 +9874,8 @@
         </p:nvSpPr>
         <p:spPr>
           <a:xfrm>
-            <a:off x="9144000" y="1554480"/>
-            <a:ext cx="2286000" cy="1371600"/>
+            <a:off x="9326880" y="1554480"/>
+            <a:ext cx="2103120" cy="1371600"/>
           </a:xfrm>
           <a:prstGeom prst="rect">
             <a:avLst/>
@@ -13483,7 +9887,7 @@
           <a:bodyPr wrap="square" lIns="0" tIns="0" rIns="0" bIns="0" rtlCol="0" anchor="ctr"/>
           <a:lstStyle/>
           <a:p>
-            <a:pPr indent="0" marL="0">
+            <a:pPr marL="0" indent="0">
               <a:buNone/>
             </a:pPr>
             <a:r>
@@ -13492,7 +9896,7 @@
                   <a:schemeClr val="tx1"/>
                 </a:solidFill>
               </a:rPr>
-              <a:t>No Eve: keys match and the key is kept</a:t>
+              <a:t>Clean channel: Eve can intercept this share and still be caught in under half the runs</a:t>
             </a:r>
             <a:endParaRPr lang="en-US" sz="1400" dirty="0"/>
           </a:p>
@@ -13500,14 +9904,14 @@
       </p:sp>
       <p:sp>
         <p:nvSpPr>
-          <p:cNvPr id="7" name="Result card 2"/>
+          <p:cNvPr id="7" name="Hiding card 2"/>
           <p:cNvSpPr/>
           <p:nvPr/>
         </p:nvSpPr>
         <p:spPr>
           <a:xfrm>
-            <a:off x="7406640" y="3108960"/>
-            <a:ext cx="4206240" cy="1371600"/>
+            <a:off x="7589520" y="3108960"/>
+            <a:ext cx="4023360" cy="1371600"/>
           </a:xfrm>
           <a:prstGeom prst="roundRect">
             <a:avLst>
@@ -13519,7 +9923,7 @@
           </a:solidFill>
           <a:ln/>
           <a:effectLst>
-            <a:outerShdw sx="100000" sy="100000" kx="0" ky="0" algn="bl" rotWithShape="0" blurRad="101600" dist="25400" dir="5400000">
+            <a:outerShdw blurRad="101600" dist="25400" dir="5400000" algn="bl" rotWithShape="0">
               <a:srgbClr val="1B2A5C">
                 <a:alpha val="12000"/>
               </a:srgbClr>
@@ -13535,7 +9939,7 @@
         </p:nvSpPr>
         <p:spPr>
           <a:xfrm>
-            <a:off x="7635240" y="3108960"/>
+            <a:off x="7818120" y="3108960"/>
             <a:ext cx="1463040" cy="1371600"/>
           </a:xfrm>
           <a:prstGeom prst="rect">
@@ -13548,16 +9952,16 @@
           <a:bodyPr wrap="square" lIns="0" tIns="0" rIns="0" bIns="0" rtlCol="0" anchor="ctr"/>
           <a:lstStyle/>
           <a:p>
-            <a:pPr indent="0" marL="0">
+            <a:pPr marL="0" indent="0">
               <a:buNone/>
             </a:pPr>
             <a:r>
               <a:rPr lang="en-US" sz="3200" b="1" dirty="0">
                 <a:solidFill>
-                  <a:schemeClr val="accent2"/>
+                  <a:schemeClr val="accent1"/>
                 </a:solidFill>
               </a:rPr>
-              <a:t>~25%</a:t>
+              <a:t>20%</a:t>
             </a:r>
             <a:endParaRPr lang="en-US" sz="3200" dirty="0"/>
           </a:p>
@@ -13571,8 +9975,8 @@
         </p:nvSpPr>
         <p:spPr>
           <a:xfrm>
-            <a:off x="9144000" y="3108960"/>
-            <a:ext cx="2286000" cy="1371600"/>
+            <a:off x="9326880" y="3108960"/>
+            <a:ext cx="2103120" cy="1371600"/>
           </a:xfrm>
           <a:prstGeom prst="rect">
             <a:avLst/>
@@ -13584,7 +9988,7 @@
           <a:bodyPr wrap="square" lIns="0" tIns="0" rIns="0" bIns="0" rtlCol="0" anchor="ctr"/>
           <a:lstStyle/>
           <a:p>
-            <a:pPr indent="0" marL="0">
+            <a:pPr marL="0" indent="0">
               <a:buNone/>
             </a:pPr>
             <a:r>
@@ -13593,7 +9997,7 @@
                   <a:schemeClr val="tx1"/>
                 </a:solidFill>
               </a:rPr>
-              <a:t>Eve on every qubit: above the 11% threshold, so she is detected</a:t>
+              <a:t>At 4-6% noise her unnoticed share shrinks, since noise already uses up the error budget</a:t>
             </a:r>
             <a:endParaRPr lang="en-US" sz="1400" dirty="0"/>
           </a:p>
@@ -13601,14 +10005,14 @@
       </p:sp>
       <p:sp>
         <p:nvSpPr>
-          <p:cNvPr id="10" name="Result card 3"/>
+          <p:cNvPr id="10" name="Hiding card 3"/>
           <p:cNvSpPr/>
           <p:nvPr/>
         </p:nvSpPr>
         <p:spPr>
           <a:xfrm>
-            <a:off x="7406640" y="4663440"/>
-            <a:ext cx="4206240" cy="1371600"/>
+            <a:off x="7589520" y="4663440"/>
+            <a:ext cx="4023360" cy="1371600"/>
           </a:xfrm>
           <a:prstGeom prst="roundRect">
             <a:avLst>
@@ -13620,7 +10024,7 @@
           </a:solidFill>
           <a:ln/>
           <a:effectLst>
-            <a:outerShdw sx="100000" sy="100000" kx="0" ky="0" algn="bl" rotWithShape="0" blurRad="101600" dist="25400" dir="5400000">
+            <a:outerShdw blurRad="101600" dist="25400" dir="5400000" algn="bl" rotWithShape="0">
               <a:srgbClr val="1B2A5C">
                 <a:alpha val="12000"/>
               </a:srgbClr>
@@ -13636,7 +10040,7 @@
         </p:nvSpPr>
         <p:spPr>
           <a:xfrm>
-            <a:off x="7635240" y="4663440"/>
+            <a:off x="7818120" y="4663440"/>
             <a:ext cx="1463040" cy="1371600"/>
           </a:xfrm>
           <a:prstGeom prst="rect">
@@ -13649,16 +10053,16 @@
           <a:bodyPr wrap="square" lIns="0" tIns="0" rIns="0" bIns="0" rtlCol="0" anchor="ctr"/>
           <a:lstStyle/>
           <a:p>
-            <a:pPr indent="0" marL="0">
+            <a:pPr marL="0" indent="0">
               <a:buNone/>
             </a:pPr>
             <a:r>
               <a:rPr lang="en-US" sz="3200" b="1" dirty="0">
                 <a:solidFill>
-                  <a:schemeClr val="accent1"/>
+                  <a:schemeClr val="accent2"/>
                 </a:solidFill>
               </a:rPr>
-              <a:t>~3%</a:t>
+              <a:t>10%</a:t>
             </a:r>
             <a:endParaRPr lang="en-US" sz="3200" dirty="0"/>
           </a:p>
@@ -13672,8 +10076,8 @@
         </p:nvSpPr>
         <p:spPr>
           <a:xfrm>
-            <a:off x="9144000" y="4663440"/>
-            <a:ext cx="2286000" cy="1371600"/>
+            <a:off x="9326880" y="4663440"/>
+            <a:ext cx="2103120" cy="1371600"/>
           </a:xfrm>
           <a:prstGeom prst="rect">
             <a:avLst/>
@@ -13685,7 +10089,7 @@
           <a:bodyPr wrap="square" lIns="0" tIns="0" rIns="0" bIns="0" rtlCol="0" anchor="ctr"/>
           <a:lstStyle/>
           <a:p>
-            <a:pPr indent="0" marL="0">
+            <a:pPr marL="0" indent="0">
               <a:buNone/>
             </a:pPr>
             <a:r>
@@ -13694,7 +10098,7 @@
                   <a:schemeClr val="tx1"/>
                 </a:solidFill>
               </a:rPr>
-              <a:t>No Eve, 3% noise: below the threshold, so no false alarm</a:t>
+              <a:t>At 7-8% noise she can hide only a little, but honest users are already flagged up to 20% of the time</a:t>
             </a:r>
             <a:endParaRPr lang="en-US" sz="1400" dirty="0"/>
           </a:p>
@@ -13720,7 +10124,7 @@
           </a:prstGeom>
           <a:extLst>
             <a:ext uri="{C572A759-6A51-4108-AA02-DFA0A04FC94B}">
-              <ma14:wrappingTextBoxFlag xmlns:ma14="http://schemas.microsoft.com/office/mac/drawingml/2011/main" val="0"/>
+              <ma14:wrappingTextBoxFlag xmlns="" xmlns:ma14="http://schemas.microsoft.com/office/mac/drawingml/2011/main" val="0"/>
             </a:ext>
           </a:extLst>
         </p:spPr>
@@ -13738,7 +10142,7 @@
           <a:p>
             <a:pPr algn="r"/>
             <a:fld id="{F7021451-1387-4CA6-816F-3879F97B5CBC}" type="slidenum">
-              <a:rPr b="0" lang="en-US"/>
+              <a:rPr lang="en-US" b="0"/>
               <a:t>8</a:t>
             </a:fld>
             <a:endParaRPr lang="en-US"/>
@@ -13755,7 +10159,7 @@
 
 <file path=ppt/slides/slide9.xml><?xml version="1.0" encoding="utf-8"?>
 <p:sld xmlns:a="http://schemas.openxmlformats.org/drawingml/2006/main" xmlns:r="http://schemas.openxmlformats.org/officeDocument/2006/relationships" xmlns:p="http://schemas.openxmlformats.org/presentationml/2006/main">
-  <p:cSld name="Slide 9">
+  <p:cSld name="Slide 12">
     <p:spTree>
       <p:nvGrpSpPr>
         <p:cNvPr id="1" name=""/>
@@ -13773,9 +10177,11 @@
       <p:sp>
         <p:nvSpPr>
           <p:cNvPr id="2" name="Text 0"/>
-          <p:cNvSpPr/>
+          <p:cNvSpPr>
+            <a:spLocks noGrp="1"/>
+          </p:cNvSpPr>
           <p:nvPr>
-            <p:ph idx="100" type="title" hasCustomPrompt="1"/>
+            <p:ph type="title" idx="100" hasCustomPrompt="1"/>
           </p:nvPr>
         </p:nvSpPr>
         <p:spPr>
@@ -13793,7 +10199,7 @@
           <a:bodyPr wrap="square" lIns="0" tIns="0" rIns="0" bIns="0" rtlCol="0" anchor="ctr"/>
           <a:lstStyle/>
           <a:p>
-            <a:pPr algn="l" indent="0" marL="0">
+            <a:pPr marL="0" indent="0" algn="l">
               <a:buNone/>
             </a:pPr>
             <a:r>
@@ -13802,42 +10208,26 @@
                   <a:schemeClr val="tx2"/>
                 </a:solidFill>
               </a:rPr>
-              <a:t>Can we tell Eve apart from noise?</a:t>
+              <a:t>Limitations and future scope</a:t>
             </a:r>
             <a:endParaRPr lang="en-US" sz="3400" dirty="0"/>
           </a:p>
         </p:txBody>
       </p:sp>
-      <p:graphicFrame>
-        <p:nvGraphicFramePr>
-          <p:cNvPr id="3" name="Chart 0" descr=""/>
-          <p:cNvGraphicFramePr/>
-          <p:nvPr/>
-        </p:nvGraphicFramePr>
-        <p:xfrm>
-          <a:off x="548640" y="1554480"/>
-          <a:ext cx="6583680" cy="4480560"/>
-        </p:xfrm>
-        <a:graphic xmlns:a="http://schemas.openxmlformats.org/drawingml/2006/main">
-          <a:graphicData uri="http://schemas.openxmlformats.org/drawingml/2006/chart">
-            <c:chart xmlns:c="http://schemas.openxmlformats.org/drawingml/2006/chart" r:id="rId1"/>
-          </a:graphicData>
-        </a:graphic>
-      </p:graphicFrame>
-      <p:sp>
-        <p:nvSpPr>
-          <p:cNvPr id="4" name="Noise card 1"/>
+      <p:sp>
+        <p:nvSpPr>
+          <p:cNvPr id="3" name="Column card 1"/>
           <p:cNvSpPr/>
           <p:nvPr/>
         </p:nvSpPr>
         <p:spPr>
           <a:xfrm>
-            <a:off x="7406640" y="1554480"/>
-            <a:ext cx="4206240" cy="1371600"/>
+            <a:off x="548640" y="1554480"/>
+            <a:ext cx="5394960" cy="4480560"/>
           </a:xfrm>
           <a:prstGeom prst="roundRect">
             <a:avLst>
-              <a:gd name="adj" fmla="val 8000"/>
+              <a:gd name="adj" fmla="val 2449"/>
             </a:avLst>
           </a:prstGeom>
           <a:solidFill>
@@ -13845,7 +10235,7 @@
           </a:solidFill>
           <a:ln/>
           <a:effectLst>
-            <a:outerShdw sx="100000" sy="100000" kx="0" ky="0" algn="bl" rotWithShape="0" blurRad="101600" dist="25400" dir="5400000">
+            <a:outerShdw blurRad="101600" dist="25400" dir="5400000" algn="bl" rotWithShape="0">
               <a:srgbClr val="1B2A5C">
                 <a:alpha val="12000"/>
               </a:srgbClr>
@@ -13855,14 +10245,58 @@
       </p:sp>
       <p:sp>
         <p:nvSpPr>
-          <p:cNvPr id="5" name="Text 2"/>
+          <p:cNvPr id="4" name="Limitations circle"/>
+          <p:cNvSpPr/>
+          <p:nvPr/>
+        </p:nvSpPr>
+        <p:spPr>
+          <a:xfrm>
+            <a:off x="914400" y="1920240"/>
+            <a:ext cx="822960" cy="822960"/>
+          </a:xfrm>
+          <a:prstGeom prst="ellipse">
+            <a:avLst/>
+          </a:prstGeom>
+          <a:solidFill>
+            <a:schemeClr val="accent2"/>
+          </a:solidFill>
+          <a:ln/>
+        </p:spPr>
+      </p:sp>
+      <p:pic>
+        <p:nvPicPr>
+          <p:cNvPr id="5" name="Limitations icon" descr="Limitations"/>
+          <p:cNvPicPr>
+            <a:picLocks noChangeAspect="1"/>
+          </p:cNvPicPr>
+          <p:nvPr/>
+        </p:nvPicPr>
+        <p:blipFill>
+          <a:blip r:embed="rId3"/>
+          <a:stretch>
+            <a:fillRect/>
+          </a:stretch>
+        </p:blipFill>
+        <p:spPr>
+          <a:xfrm>
+            <a:off x="1120140" y="2125980"/>
+            <a:ext cx="411480" cy="411480"/>
+          </a:xfrm>
+          <a:prstGeom prst="rect">
+            <a:avLst/>
+          </a:prstGeom>
+        </p:spPr>
+      </p:pic>
+      <p:sp>
+        <p:nvSpPr>
+          <p:cNvPr id="6" name="Text 3"/>
           <p:cNvSpPr txBox="1"/>
           <p:nvPr/>
         </p:nvSpPr>
         <p:spPr>
           <a:xfrm>
-            <a:off x="7635240" y="1554480"/>
-            <a:ext cx="1463040" cy="1371600"/>
+            <a:off x="1965960" y="1920240"/>
+            <a:ext cx="3657600" cy="822960"/>
           </a:xfrm>
           <a:prstGeom prst="rect">
             <a:avLst/>
@@ -13874,31 +10308,31 @@
           <a:bodyPr wrap="square" lIns="0" tIns="0" rIns="0" bIns="0" rtlCol="0" anchor="ctr"/>
           <a:lstStyle/>
           <a:p>
-            <a:pPr indent="0" marL="0">
+            <a:pPr marL="0" indent="0">
               <a:buNone/>
             </a:pPr>
             <a:r>
-              <a:rPr lang="en-US" sz="3200" b="1" dirty="0">
-                <a:solidFill>
-                  <a:schemeClr val="accent4"/>
+              <a:rPr lang="en-US" sz="2400" b="1" dirty="0">
+                <a:solidFill>
+                  <a:schemeClr val="tx2"/>
                 </a:solidFill>
               </a:rPr>
-              <a:t>4%</a:t>
-            </a:r>
-            <a:endParaRPr lang="en-US" sz="3200" dirty="0"/>
-          </a:p>
-        </p:txBody>
-      </p:sp>
-      <p:sp>
-        <p:nvSpPr>
-          <p:cNvPr id="6" name="Text 3"/>
+              <a:t>Limitations</a:t>
+            </a:r>
+            <a:endParaRPr lang="en-US" sz="2400" dirty="0"/>
+          </a:p>
+        </p:txBody>
+      </p:sp>
+      <p:sp>
+        <p:nvSpPr>
+          <p:cNvPr id="7" name="Text 4"/>
           <p:cNvSpPr txBox="1"/>
           <p:nvPr/>
         </p:nvSpPr>
         <p:spPr>
           <a:xfrm>
-            <a:off x="9144000" y="1554480"/>
-            <a:ext cx="2286000" cy="1371600"/>
+            <a:off x="914400" y="3108960"/>
+            <a:ext cx="4663440" cy="2743200"/>
           </a:xfrm>
           <a:prstGeom prst="rect">
             <a:avLst/>
@@ -13907,38 +10341,96 @@
           <a:ln/>
         </p:spPr>
         <p:txBody>
-          <a:bodyPr wrap="square" lIns="0" tIns="0" rIns="0" bIns="0" rtlCol="0" anchor="ctr"/>
+          <a:bodyPr wrap="square" lIns="0" tIns="0" rIns="0" bIns="0" rtlCol="0" anchor="t"/>
           <a:lstStyle/>
           <a:p>
-            <a:pPr indent="0" marL="0">
-              <a:buNone/>
+            <a:pPr marL="342900" indent="-342900">
+              <a:spcAft>
+                <a:spcPts val="1200"/>
+              </a:spcAft>
+              <a:buSzPct val="100000"/>
+              <a:buChar char="•"/>
             </a:pPr>
             <a:r>
-              <a:rPr lang="en-US" sz="1400" dirty="0">
+              <a:rPr lang="en-US" sz="1600" dirty="0">
                 <a:solidFill>
                   <a:schemeClr val="tx1"/>
                 </a:solidFill>
               </a:rPr>
-              <a:t>Noise up to 4%: honest users see only about 1% false alarms</a:t>
-            </a:r>
-            <a:endParaRPr lang="en-US" sz="1400" dirty="0"/>
-          </a:p>
-        </p:txBody>
-      </p:sp>
-      <p:sp>
-        <p:nvSpPr>
-          <p:cNvPr id="7" name="Noise card 2"/>
+              <a:t>Simulation only: noise is a simple bit-flip model, not hardware</a:t>
+            </a:r>
+            <a:endParaRPr lang="en-US" sz="1600" dirty="0"/>
+          </a:p>
+          <a:p>
+            <a:pPr marL="342900" indent="-342900">
+              <a:spcAft>
+                <a:spcPts val="1200"/>
+              </a:spcAft>
+              <a:buSzPct val="100000"/>
+              <a:buChar char="•"/>
+            </a:pPr>
+            <a:r>
+              <a:rPr lang="en-US" sz="1600" dirty="0">
+                <a:solidFill>
+                  <a:schemeClr val="tx1"/>
+                </a:solidFill>
+              </a:rPr>
+              <a:t>Only the intercept-resend attack is tested</a:t>
+            </a:r>
+            <a:endParaRPr lang="en-US" sz="1600" dirty="0"/>
+          </a:p>
+          <a:p>
+            <a:pPr marL="342900" indent="-342900">
+              <a:spcAft>
+                <a:spcPts val="1200"/>
+              </a:spcAft>
+              <a:buSzPct val="100000"/>
+              <a:buChar char="•"/>
+            </a:pPr>
+            <a:r>
+              <a:rPr lang="en-US" sz="1600" dirty="0">
+                <a:solidFill>
+                  <a:schemeClr val="tx1"/>
+                </a:solidFill>
+              </a:rPr>
+              <a:t>No error correction or privacy amplification yet</a:t>
+            </a:r>
+            <a:endParaRPr lang="en-US" sz="1600" dirty="0"/>
+          </a:p>
+          <a:p>
+            <a:pPr marL="342900" indent="-342900">
+              <a:spcAft>
+                <a:spcPts val="1200"/>
+              </a:spcAft>
+              <a:buSzPct val="100000"/>
+              <a:buChar char="•"/>
+            </a:pPr>
+            <a:r>
+              <a:rPr lang="en-US" sz="1600" dirty="0">
+                <a:solidFill>
+                  <a:schemeClr val="tx1"/>
+                </a:solidFill>
+              </a:rPr>
+              <a:t>QBER from small samples varies from run to run</a:t>
+            </a:r>
+            <a:endParaRPr lang="en-US" sz="1600" dirty="0"/>
+          </a:p>
+        </p:txBody>
+      </p:sp>
+      <p:sp>
+        <p:nvSpPr>
+          <p:cNvPr id="8" name="Column card 2"/>
           <p:cNvSpPr/>
           <p:nvPr/>
         </p:nvSpPr>
         <p:spPr>
           <a:xfrm>
-            <a:off x="7406640" y="3108960"/>
-            <a:ext cx="4206240" cy="1371600"/>
+            <a:off x="6245352" y="1554480"/>
+            <a:ext cx="5394960" cy="4480560"/>
           </a:xfrm>
           <a:prstGeom prst="roundRect">
             <a:avLst>
-              <a:gd name="adj" fmla="val 8000"/>
+              <a:gd name="adj" fmla="val 2449"/>
             </a:avLst>
           </a:prstGeom>
           <a:solidFill>
@@ -13946,7 +10438,7 @@
           </a:solidFill>
           <a:ln/>
           <a:effectLst>
-            <a:outerShdw sx="100000" sy="100000" kx="0" ky="0" algn="bl" rotWithShape="0" blurRad="101600" dist="25400" dir="5400000">
+            <a:outerShdw blurRad="101600" dist="25400" dir="5400000" algn="bl" rotWithShape="0">
               <a:srgbClr val="1B2A5C">
                 <a:alpha val="12000"/>
               </a:srgbClr>
@@ -13956,14 +10448,58 @@
       </p:sp>
       <p:sp>
         <p:nvSpPr>
-          <p:cNvPr id="8" name="Text 5"/>
+          <p:cNvPr id="9" name="Future scope circle"/>
+          <p:cNvSpPr/>
+          <p:nvPr/>
+        </p:nvSpPr>
+        <p:spPr>
+          <a:xfrm>
+            <a:off x="6611112" y="1920240"/>
+            <a:ext cx="822960" cy="822960"/>
+          </a:xfrm>
+          <a:prstGeom prst="ellipse">
+            <a:avLst/>
+          </a:prstGeom>
+          <a:solidFill>
+            <a:schemeClr val="accent1"/>
+          </a:solidFill>
+          <a:ln/>
+        </p:spPr>
+      </p:sp>
+      <p:pic>
+        <p:nvPicPr>
+          <p:cNvPr id="10" name="Future scope icon" descr="Future scope"/>
+          <p:cNvPicPr>
+            <a:picLocks noChangeAspect="1"/>
+          </p:cNvPicPr>
+          <p:nvPr/>
+        </p:nvPicPr>
+        <p:blipFill>
+          <a:blip r:embed="rId4"/>
+          <a:stretch>
+            <a:fillRect/>
+          </a:stretch>
+        </p:blipFill>
+        <p:spPr>
+          <a:xfrm>
+            <a:off x="6816852" y="2125980"/>
+            <a:ext cx="411480" cy="411480"/>
+          </a:xfrm>
+          <a:prstGeom prst="rect">
+            <a:avLst/>
+          </a:prstGeom>
+        </p:spPr>
+      </p:pic>
+      <p:sp>
+        <p:nvSpPr>
+          <p:cNvPr id="11" name="Text 7"/>
           <p:cNvSpPr txBox="1"/>
           <p:nvPr/>
         </p:nvSpPr>
         <p:spPr>
           <a:xfrm>
-            <a:off x="7635240" y="3108960"/>
-            <a:ext cx="1463040" cy="1371600"/>
+            <a:off x="7662672" y="1920240"/>
+            <a:ext cx="3657600" cy="822960"/>
           </a:xfrm>
           <a:prstGeom prst="rect">
             <a:avLst/>
@@ -13975,31 +10511,31 @@
           <a:bodyPr wrap="square" lIns="0" tIns="0" rIns="0" bIns="0" rtlCol="0" anchor="ctr"/>
           <a:lstStyle/>
           <a:p>
-            <a:pPr indent="0" marL="0">
+            <a:pPr marL="0" indent="0">
               <a:buNone/>
             </a:pPr>
             <a:r>
-              <a:rPr lang="en-US" sz="3200" b="1" dirty="0">
-                <a:solidFill>
-                  <a:schemeClr val="accent2"/>
+              <a:rPr lang="en-US" sz="2400" b="1" dirty="0">
+                <a:solidFill>
+                  <a:schemeClr val="tx2"/>
                 </a:solidFill>
               </a:rPr>
-              <a:t>8%</a:t>
-            </a:r>
-            <a:endParaRPr lang="en-US" sz="3200" dirty="0"/>
-          </a:p>
-        </p:txBody>
-      </p:sp>
-      <p:sp>
-        <p:nvSpPr>
-          <p:cNvPr id="9" name="Text 6"/>
+              <a:t>Future scope</a:t>
+            </a:r>
+            <a:endParaRPr lang="en-US" sz="2400" dirty="0"/>
+          </a:p>
+        </p:txBody>
+      </p:sp>
+      <p:sp>
+        <p:nvSpPr>
+          <p:cNvPr id="12" name="Text 8"/>
           <p:cNvSpPr txBox="1"/>
           <p:nvPr/>
         </p:nvSpPr>
         <p:spPr>
           <a:xfrm>
-            <a:off x="9144000" y="3108960"/>
-            <a:ext cx="2286000" cy="1371600"/>
+            <a:off x="6611112" y="3108960"/>
+            <a:ext cx="4663440" cy="2743200"/>
           </a:xfrm>
           <a:prstGeom prst="rect">
             <a:avLst/>
@@ -14008,122 +10544,79 @@
           <a:ln/>
         </p:spPr>
         <p:txBody>
-          <a:bodyPr wrap="square" lIns="0" tIns="0" rIns="0" bIns="0" rtlCol="0" anchor="ctr"/>
+          <a:bodyPr wrap="square" lIns="0" tIns="0" rIns="0" bIns="0" rtlCol="0" anchor="t"/>
           <a:lstStyle/>
           <a:p>
-            <a:pPr indent="0" marL="0">
-              <a:buNone/>
+            <a:pPr marL="342900" indent="-342900">
+              <a:spcAft>
+                <a:spcPts val="1200"/>
+              </a:spcAft>
+              <a:buSzPct val="100000"/>
+              <a:buChar char="•"/>
             </a:pPr>
             <a:r>
-              <a:rPr lang="en-US" sz="1400" dirty="0">
+              <a:rPr lang="en-US" sz="1600" dirty="0">
                 <a:solidFill>
                   <a:schemeClr val="tx1"/>
                 </a:solidFill>
               </a:rPr>
-              <a:t>At 8% noise, 20% of honest runs are wrongly flagged as attacks</a:t>
-            </a:r>
-            <a:endParaRPr lang="en-US" sz="1400" dirty="0"/>
-          </a:p>
-        </p:txBody>
-      </p:sp>
-      <p:sp>
-        <p:nvSpPr>
-          <p:cNvPr id="10" name="Noise card 3"/>
-          <p:cNvSpPr/>
-          <p:nvPr/>
-        </p:nvSpPr>
-        <p:spPr>
-          <a:xfrm>
-            <a:off x="7406640" y="4663440"/>
-            <a:ext cx="4206240" cy="1371600"/>
-          </a:xfrm>
-          <a:prstGeom prst="roundRect">
-            <a:avLst>
-              <a:gd name="adj" fmla="val 8000"/>
-            </a:avLst>
-          </a:prstGeom>
-          <a:solidFill>
-            <a:schemeClr val="bg2"/>
-          </a:solidFill>
-          <a:ln/>
-          <a:effectLst>
-            <a:outerShdw sx="100000" sy="100000" kx="0" ky="0" algn="bl" rotWithShape="0" blurRad="101600" dist="25400" dir="5400000">
-              <a:srgbClr val="1B2A5C">
-                <a:alpha val="12000"/>
-              </a:srgbClr>
-            </a:outerShdw>
-          </a:effectLst>
-        </p:spPr>
-      </p:sp>
-      <p:sp>
-        <p:nvSpPr>
-          <p:cNvPr id="11" name="Text 8"/>
-          <p:cNvSpPr txBox="1"/>
-          <p:nvPr/>
-        </p:nvSpPr>
-        <p:spPr>
-          <a:xfrm>
-            <a:off x="7635240" y="4663440"/>
-            <a:ext cx="1463040" cy="1371600"/>
-          </a:xfrm>
-          <a:prstGeom prst="rect">
-            <a:avLst/>
-          </a:prstGeom>
-          <a:noFill/>
-          <a:ln/>
-        </p:spPr>
-        <p:txBody>
-          <a:bodyPr wrap="square" lIns="0" tIns="0" rIns="0" bIns="0" rtlCol="0" anchor="ctr"/>
-          <a:lstStyle/>
-          <a:p>
-            <a:pPr indent="0" marL="0">
-              <a:buNone/>
+              <a:t>Run the protocol on real IBM quantum hardware</a:t>
+            </a:r>
+            <a:endParaRPr lang="en-US" sz="1600" dirty="0"/>
+          </a:p>
+          <a:p>
+            <a:pPr marL="342900" indent="-342900">
+              <a:spcAft>
+                <a:spcPts val="1200"/>
+              </a:spcAft>
+              <a:buSzPct val="100000"/>
+              <a:buChar char="•"/>
             </a:pPr>
             <a:r>
-              <a:rPr lang="en-US" sz="3200" b="1" dirty="0">
-                <a:solidFill>
-                  <a:schemeClr val="accent2"/>
+              <a:rPr lang="en-US" sz="1600" dirty="0">
+                <a:solidFill>
+                  <a:schemeClr val="tx1"/>
                 </a:solidFill>
               </a:rPr>
-              <a:t>10%</a:t>
-            </a:r>
-            <a:endParaRPr lang="en-US" sz="3200" dirty="0"/>
-          </a:p>
-        </p:txBody>
-      </p:sp>
-      <p:sp>
-        <p:nvSpPr>
-          <p:cNvPr id="12" name="Text 9"/>
-          <p:cNvSpPr txBox="1"/>
-          <p:nvPr/>
-        </p:nvSpPr>
-        <p:spPr>
-          <a:xfrm>
-            <a:off x="9144000" y="4663440"/>
-            <a:ext cx="2286000" cy="1371600"/>
-          </a:xfrm>
-          <a:prstGeom prst="rect">
-            <a:avLst/>
-          </a:prstGeom>
-          <a:noFill/>
-          <a:ln/>
-        </p:spPr>
-        <p:txBody>
-          <a:bodyPr wrap="square" lIns="0" tIns="0" rIns="0" bIns="0" rtlCol="0" anchor="ctr"/>
-          <a:lstStyle/>
-          <a:p>
-            <a:pPr indent="0" marL="0">
-              <a:buNone/>
+              <a:t>Add error correction and privacy amplification</a:t>
+            </a:r>
+            <a:endParaRPr lang="en-US" sz="1600" dirty="0"/>
+          </a:p>
+          <a:p>
+            <a:pPr marL="342900" indent="-342900">
+              <a:spcAft>
+                <a:spcPts val="1200"/>
+              </a:spcAft>
+              <a:buSzPct val="100000"/>
+              <a:buChar char="•"/>
             </a:pPr>
             <a:r>
-              <a:rPr lang="en-US" sz="1400" dirty="0">
+              <a:rPr lang="en-US" sz="1600" dirty="0">
                 <a:solidFill>
                   <a:schemeClr val="tx1"/>
                 </a:solidFill>
               </a:rPr>
-              <a:t>At 10% noise, 41% false alarms: the exchange becomes unreliable</a:t>
-            </a:r>
-            <a:endParaRPr lang="en-US" sz="1400" dirty="0"/>
+              <a:t>Try other protocols such as E91 and decoy-state BB84</a:t>
+            </a:r>
+            <a:endParaRPr lang="en-US" sz="1600" dirty="0"/>
+          </a:p>
+          <a:p>
+            <a:pPr marL="342900" indent="-342900">
+              <a:spcAft>
+                <a:spcPts val="1200"/>
+              </a:spcAft>
+              <a:buSzPct val="100000"/>
+              <a:buChar char="•"/>
+            </a:pPr>
+            <a:r>
+              <a:rPr lang="en-US" sz="1600" dirty="0">
+                <a:solidFill>
+                  <a:schemeClr val="tx1"/>
+                </a:solidFill>
+              </a:rPr>
+              <a:t>Combine with post-quantum cryptography in a hybrid scheme</a:t>
+            </a:r>
+            <a:endParaRPr lang="en-US" sz="1600" dirty="0"/>
           </a:p>
         </p:txBody>
       </p:sp>
@@ -14147,7 +10640,7 @@
           </a:prstGeom>
           <a:extLst>
             <a:ext uri="{C572A759-6A51-4108-AA02-DFA0A04FC94B}">
-              <ma14:wrappingTextBoxFlag xmlns:ma14="http://schemas.microsoft.com/office/mac/drawingml/2011/main" val="0"/>
+              <ma14:wrappingTextBoxFlag xmlns="" xmlns:ma14="http://schemas.microsoft.com/office/mac/drawingml/2011/main" val="0"/>
             </a:ext>
           </a:extLst>
         </p:spPr>
@@ -14165,7 +10658,7 @@
           <a:p>
             <a:pPr algn="r"/>
             <a:fld id="{F7021451-1387-4CA6-816F-3879F97B5CBC}" type="slidenum">
-              <a:rPr b="0" lang="en-US"/>
+              <a:rPr lang="en-US" b="0"/>
               <a:t>9</a:t>
             </a:fld>
             <a:endParaRPr lang="en-US"/>
@@ -14473,4 +10966,299 @@
     </a:ext>
   </a:extLst>
 </a:theme>
+</file>
+
+<file path=ppt/theme/theme2.xml><?xml version="1.0" encoding="utf-8"?>
+<a:theme xmlns:a="http://schemas.openxmlformats.org/drawingml/2006/main" name="Office Theme">
+  <a:themeElements>
+    <a:clrScheme name="Office">
+      <a:dk1>
+        <a:sysClr val="windowText" lastClr="000000"/>
+      </a:dk1>
+      <a:lt1>
+        <a:sysClr val="window" lastClr="FFFFFF"/>
+      </a:lt1>
+      <a:dk2>
+        <a:srgbClr val="44546A"/>
+      </a:dk2>
+      <a:lt2>
+        <a:srgbClr val="E7E6E6"/>
+      </a:lt2>
+      <a:accent1>
+        <a:srgbClr val="4472C4"/>
+      </a:accent1>
+      <a:accent2>
+        <a:srgbClr val="ED7D31"/>
+      </a:accent2>
+      <a:accent3>
+        <a:srgbClr val="A5A5A5"/>
+      </a:accent3>
+      <a:accent4>
+        <a:srgbClr val="FFC000"/>
+      </a:accent4>
+      <a:accent5>
+        <a:srgbClr val="5B9BD5"/>
+      </a:accent5>
+      <a:accent6>
+        <a:srgbClr val="70AD47"/>
+      </a:accent6>
+      <a:hlink>
+        <a:srgbClr val="0563C1"/>
+      </a:hlink>
+      <a:folHlink>
+        <a:srgbClr val="954F72"/>
+      </a:folHlink>
+    </a:clrScheme>
+    <a:fontScheme name="Office">
+      <a:majorFont>
+        <a:latin typeface="Calibri Light" panose="020F0302020204030204"/>
+        <a:ea typeface=""/>
+        <a:cs typeface=""/>
+        <a:font script="Jpan" typeface="游ゴシック Light"/>
+        <a:font script="Hang" typeface="맑은 고딕"/>
+        <a:font script="Hans" typeface="等线 Light"/>
+        <a:font script="Hant" typeface="新細明體"/>
+        <a:font script="Arab" typeface="Times New Roman"/>
+        <a:font script="Hebr" typeface="Times New Roman"/>
+        <a:font script="Thai" typeface="Angsana New"/>
+        <a:font script="Ethi" typeface="Nyala"/>
+        <a:font script="Beng" typeface="Vrinda"/>
+        <a:font script="Gujr" typeface="Shruti"/>
+        <a:font script="Khmr" typeface="MoolBoran"/>
+        <a:font script="Knda" typeface="Tunga"/>
+        <a:font script="Guru" typeface="Raavi"/>
+        <a:font script="Cans" typeface="Euphemia"/>
+        <a:font script="Cher" typeface="Plantagenet Cherokee"/>
+        <a:font script="Yiii" typeface="Microsoft Yi Baiti"/>
+        <a:font script="Tibt" typeface="Microsoft Himalaya"/>
+        <a:font script="Thaa" typeface="MV Boli"/>
+        <a:font script="Deva" typeface="Mangal"/>
+        <a:font script="Telu" typeface="Gautami"/>
+        <a:font script="Taml" typeface="Latha"/>
+        <a:font script="Syrc" typeface="Estrangelo Edessa"/>
+        <a:font script="Orya" typeface="Kalinga"/>
+        <a:font script="Mlym" typeface="Kartika"/>
+        <a:font script="Laoo" typeface="DokChampa"/>
+        <a:font script="Sinh" typeface="Iskoola Pota"/>
+        <a:font script="Mong" typeface="Mongolian Baiti"/>
+        <a:font script="Viet" typeface="Times New Roman"/>
+        <a:font script="Uigh" typeface="Microsoft Uighur"/>
+        <a:font script="Geor" typeface="Sylfaen"/>
+        <a:font script="Armn" typeface="Arial"/>
+        <a:font script="Bugi" typeface="Leelawadee UI"/>
+        <a:font script="Bopo" typeface="Microsoft JhengHei"/>
+        <a:font script="Java" typeface="Javanese Text"/>
+        <a:font script="Lisu" typeface="Segoe UI"/>
+        <a:font script="Mymr" typeface="Myanmar Text"/>
+        <a:font script="Nkoo" typeface="Ebrima"/>
+        <a:font script="Olck" typeface="Nirmala UI"/>
+        <a:font script="Osma" typeface="Ebrima"/>
+        <a:font script="Phag" typeface="Phagspa"/>
+        <a:font script="Syrn" typeface="Estrangelo Edessa"/>
+        <a:font script="Syrj" typeface="Estrangelo Edessa"/>
+        <a:font script="Syre" typeface="Estrangelo Edessa"/>
+        <a:font script="Sora" typeface="Nirmala UI"/>
+        <a:font script="Tale" typeface="Microsoft Tai Le"/>
+        <a:font script="Talu" typeface="Microsoft New Tai Lue"/>
+        <a:font script="Tfng" typeface="Ebrima"/>
+      </a:majorFont>
+      <a:minorFont>
+        <a:latin typeface="Calibri" panose="020F0502020204030204"/>
+        <a:ea typeface=""/>
+        <a:cs typeface=""/>
+        <a:font script="Jpan" typeface="游ゴシック"/>
+        <a:font script="Hang" typeface="맑은 고딕"/>
+        <a:font script="Hans" typeface="等线"/>
+        <a:font script="Hant" typeface="新細明體"/>
+        <a:font script="Arab" typeface="Arial"/>
+        <a:font script="Hebr" typeface="Arial"/>
+        <a:font script="Thai" typeface="Cordia New"/>
+        <a:font script="Ethi" typeface="Nyala"/>
+        <a:font script="Beng" typeface="Vrinda"/>
+        <a:font script="Gujr" typeface="Shruti"/>
+        <a:font script="Khmr" typeface="DaunPenh"/>
+        <a:font script="Knda" typeface="Tunga"/>
+        <a:font script="Guru" typeface="Raavi"/>
+        <a:font script="Cans" typeface="Euphemia"/>
+        <a:font script="Cher" typeface="Plantagenet Cherokee"/>
+        <a:font script="Yiii" typeface="Microsoft Yi Baiti"/>
+        <a:font script="Tibt" typeface="Microsoft Himalaya"/>
+        <a:font script="Thaa" typeface="MV Boli"/>
+        <a:font script="Deva" typeface="Mangal"/>
+        <a:font script="Telu" typeface="Gautami"/>
+        <a:font script="Taml" typeface="Latha"/>
+        <a:font script="Syrc" typeface="Estrangelo Edessa"/>
+        <a:font script="Orya" typeface="Kalinga"/>
+        <a:font script="Mlym" typeface="Kartika"/>
+        <a:font script="Laoo" typeface="DokChampa"/>
+        <a:font script="Sinh" typeface="Iskoola Pota"/>
+        <a:font script="Mong" typeface="Mongolian Baiti"/>
+        <a:font script="Viet" typeface="Arial"/>
+        <a:font script="Uigh" typeface="Microsoft Uighur"/>
+        <a:font script="Geor" typeface="Sylfaen"/>
+        <a:font script="Armn" typeface="Arial"/>
+        <a:font script="Bugi" typeface="Leelawadee UI"/>
+        <a:font script="Bopo" typeface="Microsoft JhengHei"/>
+        <a:font script="Java" typeface="Javanese Text"/>
+        <a:font script="Lisu" typeface="Segoe UI"/>
+        <a:font script="Mymr" typeface="Myanmar Text"/>
+        <a:font script="Nkoo" typeface="Ebrima"/>
+        <a:font script="Olck" typeface="Nirmala UI"/>
+        <a:font script="Osma" typeface="Ebrima"/>
+        <a:font script="Phag" typeface="Phagspa"/>
+        <a:font script="Syrn" typeface="Estrangelo Edessa"/>
+        <a:font script="Syrj" typeface="Estrangelo Edessa"/>
+        <a:font script="Syre" typeface="Estrangelo Edessa"/>
+        <a:font script="Sora" typeface="Nirmala UI"/>
+        <a:font script="Tale" typeface="Microsoft Tai Le"/>
+        <a:font script="Talu" typeface="Microsoft New Tai Lue"/>
+        <a:font script="Tfng" typeface="Ebrima"/>
+      </a:minorFont>
+    </a:fontScheme>
+    <a:fmtScheme name="Office">
+      <a:fillStyleLst>
+        <a:solidFill>
+          <a:schemeClr val="phClr"/>
+        </a:solidFill>
+        <a:gradFill rotWithShape="1">
+          <a:gsLst>
+            <a:gs pos="0">
+              <a:schemeClr val="phClr">
+                <a:lumMod val="110000"/>
+                <a:satMod val="105000"/>
+                <a:tint val="67000"/>
+              </a:schemeClr>
+            </a:gs>
+            <a:gs pos="50000">
+              <a:schemeClr val="phClr">
+                <a:lumMod val="105000"/>
+                <a:satMod val="103000"/>
+                <a:tint val="73000"/>
+              </a:schemeClr>
+            </a:gs>
+            <a:gs pos="100000">
+              <a:schemeClr val="phClr">
+                <a:lumMod val="105000"/>
+                <a:satMod val="109000"/>
+                <a:tint val="81000"/>
+              </a:schemeClr>
+            </a:gs>
+          </a:gsLst>
+          <a:lin ang="5400000" scaled="0"/>
+        </a:gradFill>
+        <a:gradFill rotWithShape="1">
+          <a:gsLst>
+            <a:gs pos="0">
+              <a:schemeClr val="phClr">
+                <a:satMod val="103000"/>
+                <a:lumMod val="102000"/>
+                <a:tint val="94000"/>
+              </a:schemeClr>
+            </a:gs>
+            <a:gs pos="50000">
+              <a:schemeClr val="phClr">
+                <a:satMod val="110000"/>
+                <a:lumMod val="100000"/>
+                <a:shade val="100000"/>
+              </a:schemeClr>
+            </a:gs>
+            <a:gs pos="100000">
+              <a:schemeClr val="phClr">
+                <a:lumMod val="99000"/>
+                <a:satMod val="120000"/>
+                <a:shade val="78000"/>
+              </a:schemeClr>
+            </a:gs>
+          </a:gsLst>
+          <a:lin ang="5400000" scaled="0"/>
+        </a:gradFill>
+      </a:fillStyleLst>
+      <a:lnStyleLst>
+        <a:ln w="6350" cap="flat" cmpd="sng" algn="ctr">
+          <a:solidFill>
+            <a:schemeClr val="phClr"/>
+          </a:solidFill>
+          <a:prstDash val="solid"/>
+          <a:miter lim="800000"/>
+        </a:ln>
+        <a:ln w="12700" cap="flat" cmpd="sng" algn="ctr">
+          <a:solidFill>
+            <a:schemeClr val="phClr"/>
+          </a:solidFill>
+          <a:prstDash val="solid"/>
+          <a:miter lim="800000"/>
+        </a:ln>
+        <a:ln w="19050" cap="flat" cmpd="sng" algn="ctr">
+          <a:solidFill>
+            <a:schemeClr val="phClr"/>
+          </a:solidFill>
+          <a:prstDash val="solid"/>
+          <a:miter lim="800000"/>
+        </a:ln>
+      </a:lnStyleLst>
+      <a:effectStyleLst>
+        <a:effectStyle>
+          <a:effectLst/>
+        </a:effectStyle>
+        <a:effectStyle>
+          <a:effectLst/>
+        </a:effectStyle>
+        <a:effectStyle>
+          <a:effectLst>
+            <a:outerShdw blurRad="57150" dist="19050" dir="5400000" algn="ctr" rotWithShape="0">
+              <a:srgbClr val="000000">
+                <a:alpha val="63000"/>
+              </a:srgbClr>
+            </a:outerShdw>
+          </a:effectLst>
+        </a:effectStyle>
+      </a:effectStyleLst>
+      <a:bgFillStyleLst>
+        <a:solidFill>
+          <a:schemeClr val="phClr"/>
+        </a:solidFill>
+        <a:solidFill>
+          <a:schemeClr val="phClr">
+            <a:tint val="95000"/>
+            <a:satMod val="170000"/>
+          </a:schemeClr>
+        </a:solidFill>
+        <a:gradFill rotWithShape="1">
+          <a:gsLst>
+            <a:gs pos="0">
+              <a:schemeClr val="phClr">
+                <a:tint val="93000"/>
+                <a:satMod val="150000"/>
+                <a:shade val="98000"/>
+                <a:lumMod val="102000"/>
+              </a:schemeClr>
+            </a:gs>
+            <a:gs pos="50000">
+              <a:schemeClr val="phClr">
+                <a:tint val="98000"/>
+                <a:satMod val="130000"/>
+                <a:shade val="90000"/>
+                <a:lumMod val="103000"/>
+              </a:schemeClr>
+            </a:gs>
+            <a:gs pos="100000">
+              <a:schemeClr val="phClr">
+                <a:shade val="63000"/>
+                <a:satMod val="120000"/>
+              </a:schemeClr>
+            </a:gs>
+          </a:gsLst>
+          <a:lin ang="5400000" scaled="0"/>
+        </a:gradFill>
+      </a:bgFillStyleLst>
+    </a:fmtScheme>
+  </a:themeElements>
+  <a:objectDefaults/>
+  <a:extraClrSchemeLst/>
+  <a:extLst>
+    <a:ext uri="{05A4C25C-085E-4340-85A3-A5531E510DB2}">
+      <thm15:themeFamily xmlns:thm15="http://schemas.microsoft.com/office/thememl/2012/main" name="Office Theme" id="{62F939B6-93AF-4DB8-9C6B-D6C7DFDC589F}" vid="{4A3C46E8-61CC-4603-A589-7422A47A8E4A}"/>
+    </a:ext>
+  </a:extLst>
+</a:theme>
 </file>